--- a/presentation/투수부상_조기경보_제안발표_KO.pptx
+++ b/presentation/투수부상_조기경보_제안발표_KO.pptx
@@ -23,9 +23,10 @@
     <p:sldId id="271" r:id="rId17"/>
     <p:sldId id="272" r:id="rId18"/>
     <p:sldId id="273" r:id="rId19"/>
+    <p:sldId id="274" r:id="rId20"/>
   </p:sldIdLst>
   <p:notesMasterIdLst>
-    <p:notesMasterId r:id="rId20"/>
+    <p:notesMasterId r:id="rId21"/>
   </p:notesMasterIdLst>
   <p:sldSz cx="9144000" cy="5143500"/>
   <p:notesSz cx="5143500" cy="9144000"/>
@@ -124,23 +125,23 @@
   <p:extLst>
     <p:ext uri="{521415D9-36F7-43E2-AB2F-B90AF26B5E84}">
       <p14:sectionLst xmlns:p14="http://schemas.microsoft.com/office/powerpoint/2010/main">
-        <p14:section name="표지" id="{535f5b9f-f774-4694-0601-00f59124b33e}">
+        <p14:section name="표지" id="{928e1890-35c4-2315-c442-d0603af358b2}">
           <p14:sldIdLst>
             <p14:sldId id="256"/>
           </p14:sldIdLst>
         </p14:section>
-        <p14:section name="목차" id="{88eafe11-34f0-bd42-5a88-1d988e62e434}">
+        <p14:section name="목차" id="{77464a19-286d-a561-8ee1-a17944b3322b}">
           <p14:sldIdLst>
             <p14:sldId id="257"/>
           </p14:sldIdLst>
         </p14:section>
-        <p14:section name="연구 배경" id="{387cacb1-8abd-469a-2a7b-0d848217206a}">
+        <p14:section name="연구 배경" id="{0b01861a-9e4a-a118-e4df-cddcc0d45e6b}">
           <p14:sldIdLst>
             <p14:sldId id="258"/>
             <p14:sldId id="259"/>
           </p14:sldIdLst>
         </p14:section>
-        <p14:section name="선행 연구" id="{5319f978-1703-e17a-0fae-4c23ff9acddf}">
+        <p14:section name="선행 연구" id="{f2676fab-ecbf-960d-e934-085ad3671ae8}">
           <p14:sldIdLst>
             <p14:sldId id="260"/>
             <p14:sldId id="261"/>
@@ -148,26 +149,31 @@
             <p14:sldId id="263"/>
           </p14:sldIdLst>
         </p14:section>
-        <p14:section name="데이터" id="{6484e86a-cb4a-8341-ae3d-6fa20893bb75}">
+        <p14:section name="데이터" id="{10069f0f-1361-aacf-0069-b35e7e8df01e}">
           <p14:sldIdLst>
             <p14:sldId id="264"/>
             <p14:sldId id="265"/>
           </p14:sldIdLst>
         </p14:section>
-        <p14:section name="방법론" id="{59f440c1-fec1-6445-92e5-b327f23453ea}">
+        <p14:section name="방법론" id="{fd05e079-66b0-8ee8-f94d-f8fda3a61091}">
           <p14:sldIdLst>
             <p14:sldId id="266"/>
             <p14:sldId id="267"/>
             <p14:sldId id="268"/>
           </p14:sldIdLst>
         </p14:section>
-        <p14:section name="EDA" id="{22711588-bd3b-f699-ff74-77f896ba270c}">
+        <p14:section name="EDA" id="{91987630-7283-9ce3-f076-f400125bb360}">
           <p14:sldIdLst>
             <p14:sldId id="269"/>
             <p14:sldId id="270"/>
             <p14:sldId id="271"/>
             <p14:sldId id="272"/>
             <p14:sldId id="273"/>
+          </p14:sldIdLst>
+        </p14:section>
+        <p14:section name="Thank you" id="{d31857b3-c8bc-4800-3410-d94497cf5a7b}">
+          <p14:sldIdLst>
+            <p14:sldId id="274"/>
           </p14:sldIdLst>
         </p14:section>
       </p14:sectionLst>
@@ -2218,6 +2224,94 @@
             <a:fld id="{F7021451-1387-4CA6-816F-3879F97B5CBC}" type="slidenum">
               <a:rPr lang="en-US"/>
               <a:t>18</a:t>
+            </a:fld>
+            <a:endParaRPr lang="en-US"/>
+          </a:p>
+        </p:txBody>
+      </p:sp>
+    </p:spTree>
+    <p:extLst>
+      <p:ext uri="{BB962C8B-B14F-4D97-AF65-F5344CB8AC3E}">
+        <p14:creationId xmlns:p14="http://schemas.microsoft.com/office/powerpoint/2010/main" val="1024086991"/>
+      </p:ext>
+    </p:extLst>
+  </p:cSld>
+  <p:clrMapOvr>
+    <a:masterClrMapping/>
+  </p:clrMapOvr>
+</p:notes>
+</file>
+
+<file path=ppt/notesSlides/notesSlide19.xml><?xml version="1.0" encoding="utf-8"?>
+<p:notes xmlns:a="http://schemas.openxmlformats.org/drawingml/2006/main" xmlns:r="http://schemas.openxmlformats.org/officeDocument/2006/relationships" xmlns:p="http://schemas.openxmlformats.org/presentationml/2006/main">
+  <p:cSld>
+    <p:spTree>
+      <p:nvGrpSpPr>
+        <p:cNvPr id="1" name=""/>
+        <p:cNvGrpSpPr/>
+        <p:nvPr/>
+      </p:nvGrpSpPr>
+      <p:grpSpPr>
+        <a:xfrm>
+          <a:off x="0" y="0"/>
+          <a:ext cx="0" cy="0"/>
+          <a:chOff x="0" y="0"/>
+          <a:chExt cx="0" cy="0"/>
+        </a:xfrm>
+      </p:grpSpPr>
+      <p:sp>
+        <p:nvSpPr>
+          <p:cNvPr id="2" name="Slide Image Placeholder 1"/>
+          <p:cNvSpPr>
+            <a:spLocks noGrp="1" noRot="1" noChangeAspect="1"/>
+          </p:cNvSpPr>
+          <p:nvPr>
+            <p:ph type="sldImg"/>
+          </p:nvPr>
+        </p:nvSpPr>
+        <p:spPr/>
+      </p:sp>
+      <p:sp>
+        <p:nvSpPr>
+          <p:cNvPr id="3" name="Notes Placeholder 2"/>
+          <p:cNvSpPr>
+            <a:spLocks noGrp="1"/>
+          </p:cNvSpPr>
+          <p:nvPr>
+            <p:ph type="body" idx="1"/>
+          </p:nvPr>
+        </p:nvSpPr>
+        <p:spPr/>
+        <p:txBody>
+          <a:bodyPr/>
+          <a:lstStyle/>
+          <a:p>
+            <a:r>
+              <a:rPr lang="en-US" dirty="0"/>
+              <a:t/>
+            </a:r>
+            <a:endParaRPr lang="en-US" dirty="0"/>
+          </a:p>
+        </p:txBody>
+      </p:sp>
+      <p:sp>
+        <p:nvSpPr>
+          <p:cNvPr id="4" name="Slide Number Placeholder 3"/>
+          <p:cNvSpPr>
+            <a:spLocks noGrp="1"/>
+          </p:cNvSpPr>
+          <p:nvPr>
+            <p:ph type="sldNum" sz="quarter" idx="10"/>
+          </p:nvPr>
+        </p:nvSpPr>
+        <p:spPr/>
+        <p:txBody>
+          <a:bodyPr/>
+          <a:lstStyle/>
+          <a:p>
+            <a:fld id="{F7021451-1387-4CA6-816F-3879F97B5CBC}" type="slidenum">
+              <a:rPr lang="en-US"/>
+              <a:t>19</a:t>
             </a:fld>
             <a:endParaRPr lang="en-US"/>
           </a:p>
@@ -4250,7 +4344,7 @@
           </p:nvPr>
         </p:nvGraphicFramePr>
         <p:xfrm>
-          <a:off x="914400" y="1024128"/>
+          <a:off x="274320" y="1005840"/>
           <a:ext cx="6858000" cy="914400"/>
         </p:xfrm>
         <a:graphic>
@@ -4258,12 +4352,152 @@
             <a:tbl>
               <a:tblPr/>
               <a:tblGrid>
-                <a:gridCol w="1463040"/>
-                <a:gridCol w="2011680"/>
-                <a:gridCol w="3840480"/>
+                <a:gridCol w="1645920"/>
+                <a:gridCol w="2194560"/>
+                <a:gridCol w="4754880"/>
               </a:tblGrid>
-              <a:tr h="274320">
+              <a:tr h="320040">
                 <a:tc>
+                  <a:txBody>
+                    <a:bodyPr/>
+                    <a:lstStyle/>
+                    <a:p>
+                      <a:pPr algn="ctr" indent="0" marL="0">
+                        <a:buNone/>
+                      </a:pPr>
+                      <a:r>
+                        <a:rPr lang="en-US" sz="1250" b="1" dirty="0">
+                          <a:solidFill>
+                            <a:schemeClr val="tx1"/>
+                          </a:solidFill>
+                        </a:rPr>
+                        <a:t>그룹</a:t>
+                      </a:r>
+                      <a:endParaRPr lang="en-US" sz="1250" dirty="0"/>
+                    </a:p>
+                  </a:txBody>
+                  <a:tcPr marL="54864" marR="54864" marT="54864" marB="54864" anchor="ctr">
+                    <a:lnL w="0" cap="flat" cmpd="sng" algn="ctr">
+                      <a:noFill/>
+                    </a:lnL>
+                    <a:lnR w="0" cap="flat" cmpd="sng" algn="ctr">
+                      <a:noFill/>
+                    </a:lnR>
+                    <a:lnT w="15875" cap="flat" cmpd="sng" algn="ctr">
+                      <a:solidFill>
+                        <a:srgbClr val="000000"/>
+                      </a:solidFill>
+                      <a:prstDash val="solid"/>
+                      <a:round/>
+                      <a:headEnd type="none" w="med" len="med"/>
+                      <a:tailEnd type="none" w="med" len="med"/>
+                    </a:lnT>
+                    <a:lnB w="9525" cap="flat" cmpd="sng" algn="ctr">
+                      <a:solidFill>
+                        <a:srgbClr val="000000"/>
+                      </a:solidFill>
+                      <a:prstDash val="solid"/>
+                      <a:round/>
+                      <a:headEnd type="none" w="med" len="med"/>
+                      <a:tailEnd type="none" w="med" len="med"/>
+                    </a:lnB>
+                  </a:tcPr>
+                </a:tc>
+                <a:tc>
+                  <a:txBody>
+                    <a:bodyPr/>
+                    <a:lstStyle/>
+                    <a:p>
+                      <a:pPr algn="ctr" indent="0" marL="0">
+                        <a:buNone/>
+                      </a:pPr>
+                      <a:r>
+                        <a:rPr lang="en-US" sz="1250" b="1" dirty="0">
+                          <a:solidFill>
+                            <a:schemeClr val="tx1"/>
+                          </a:solidFill>
+                        </a:rPr>
+                        <a:t>변수</a:t>
+                      </a:r>
+                      <a:endParaRPr lang="en-US" sz="1250" dirty="0"/>
+                    </a:p>
+                  </a:txBody>
+                  <a:tcPr marL="54864" marR="54864" marT="54864" marB="54864" anchor="ctr">
+                    <a:lnL w="0" cap="flat" cmpd="sng" algn="ctr">
+                      <a:noFill/>
+                    </a:lnL>
+                    <a:lnR w="0" cap="flat" cmpd="sng" algn="ctr">
+                      <a:noFill/>
+                    </a:lnR>
+                    <a:lnT w="15875" cap="flat" cmpd="sng" algn="ctr">
+                      <a:solidFill>
+                        <a:srgbClr val="000000"/>
+                      </a:solidFill>
+                      <a:prstDash val="solid"/>
+                      <a:round/>
+                      <a:headEnd type="none" w="med" len="med"/>
+                      <a:tailEnd type="none" w="med" len="med"/>
+                    </a:lnT>
+                    <a:lnB w="9525" cap="flat" cmpd="sng" algn="ctr">
+                      <a:solidFill>
+                        <a:srgbClr val="000000"/>
+                      </a:solidFill>
+                      <a:prstDash val="solid"/>
+                      <a:round/>
+                      <a:headEnd type="none" w="med" len="med"/>
+                      <a:tailEnd type="none" w="med" len="med"/>
+                    </a:lnB>
+                  </a:tcPr>
+                </a:tc>
+                <a:tc>
+                  <a:txBody>
+                    <a:bodyPr/>
+                    <a:lstStyle/>
+                    <a:p>
+                      <a:pPr algn="ctr" indent="0" marL="0">
+                        <a:buNone/>
+                      </a:pPr>
+                      <a:r>
+                        <a:rPr lang="en-US" sz="1250" b="1" dirty="0">
+                          <a:solidFill>
+                            <a:schemeClr val="tx1"/>
+                          </a:solidFill>
+                        </a:rPr>
+                        <a:t>정의</a:t>
+                      </a:r>
+                      <a:endParaRPr lang="en-US" sz="1250" dirty="0"/>
+                    </a:p>
+                  </a:txBody>
+                  <a:tcPr marL="54864" marR="54864" marT="54864" marB="54864" anchor="ctr">
+                    <a:lnL w="0" cap="flat" cmpd="sng" algn="ctr">
+                      <a:noFill/>
+                    </a:lnL>
+                    <a:lnR w="0" cap="flat" cmpd="sng" algn="ctr">
+                      <a:noFill/>
+                    </a:lnR>
+                    <a:lnT w="15875" cap="flat" cmpd="sng" algn="ctr">
+                      <a:solidFill>
+                        <a:srgbClr val="000000"/>
+                      </a:solidFill>
+                      <a:prstDash val="solid"/>
+                      <a:round/>
+                      <a:headEnd type="none" w="med" len="med"/>
+                      <a:tailEnd type="none" w="med" len="med"/>
+                    </a:lnT>
+                    <a:lnB w="9525" cap="flat" cmpd="sng" algn="ctr">
+                      <a:solidFill>
+                        <a:srgbClr val="000000"/>
+                      </a:solidFill>
+                      <a:prstDash val="solid"/>
+                      <a:round/>
+                      <a:headEnd type="none" w="med" len="med"/>
+                      <a:tailEnd type="none" w="med" len="med"/>
+                    </a:lnB>
+                  </a:tcPr>
+                </a:tc>
+              </a:tr>
+              <a:tr h="320040">
+                <a:tc rowSpan="4">
                   <a:txBody>
                     <a:bodyPr/>
                     <a:lstStyle/>
@@ -4277,7 +4511,7 @@
                             <a:schemeClr val="tx1"/>
                           </a:solidFill>
                         </a:rPr>
-                        <a:t>그룹</a:t>
+                        <a:t>투구 지표</a:t>
                       </a:r>
                       <a:endParaRPr lang="en-US" sz="1200" dirty="0"/>
                     </a:p>
@@ -4289,18 +4523,18 @@
                     <a:lnR w="0" cap="flat" cmpd="sng" algn="ctr">
                       <a:noFill/>
                     </a:lnR>
-                    <a:lnT w="15875" cap="flat" cmpd="sng" algn="ctr">
-                      <a:solidFill>
-                        <a:srgbClr val="000000"/>
+                    <a:lnT w="6350" cap="flat" cmpd="sng" algn="ctr">
+                      <a:solidFill>
+                        <a:srgbClr val="BFBFBF"/>
                       </a:solidFill>
                       <a:prstDash val="solid"/>
                       <a:round/>
                       <a:headEnd type="none" w="med" len="med"/>
                       <a:tailEnd type="none" w="med" len="med"/>
                     </a:lnT>
-                    <a:lnB w="9525" cap="flat" cmpd="sng" algn="ctr">
-                      <a:solidFill>
-                        <a:srgbClr val="000000"/>
+                    <a:lnB w="6350" cap="flat" cmpd="sng" algn="ctr">
+                      <a:solidFill>
+                        <a:srgbClr val="BFBFBF"/>
                       </a:solidFill>
                       <a:prstDash val="solid"/>
                       <a:round/>
@@ -4323,7 +4557,7 @@
                             <a:schemeClr val="tx1"/>
                           </a:solidFill>
                         </a:rPr>
-                        <a:t>변수</a:t>
+                        <a:t>구속</a:t>
                       </a:r>
                       <a:endParaRPr lang="en-US" sz="1200" dirty="0"/>
                     </a:p>
@@ -4335,9 +4569,394 @@
                     <a:lnR w="0" cap="flat" cmpd="sng" algn="ctr">
                       <a:noFill/>
                     </a:lnR>
-                    <a:lnT w="15875" cap="flat" cmpd="sng" algn="ctr">
-                      <a:solidFill>
-                        <a:srgbClr val="000000"/>
+                    <a:lnT w="6350" cap="flat" cmpd="sng" algn="ctr">
+                      <a:solidFill>
+                        <a:srgbClr val="BFBFBF"/>
+                      </a:solidFill>
+                      <a:prstDash val="solid"/>
+                      <a:round/>
+                      <a:headEnd type="none" w="med" len="med"/>
+                      <a:tailEnd type="none" w="med" len="med"/>
+                    </a:lnT>
+                    <a:lnB w="6350" cap="flat" cmpd="sng" algn="ctr">
+                      <a:solidFill>
+                        <a:srgbClr val="BFBFBF"/>
+                      </a:solidFill>
+                      <a:prstDash val="solid"/>
+                      <a:round/>
+                      <a:headEnd type="none" w="med" len="med"/>
+                      <a:tailEnd type="none" w="med" len="med"/>
+                    </a:lnB>
+                  </a:tcPr>
+                </a:tc>
+                <a:tc>
+                  <a:txBody>
+                    <a:bodyPr/>
+                    <a:lstStyle/>
+                    <a:p>
+                      <a:pPr algn="ctr" indent="0" marL="0">
+                        <a:buNone/>
+                      </a:pPr>
+                      <a:r>
+                        <a:rPr lang="en-US" sz="1200" dirty="0">
+                          <a:solidFill>
+                            <a:schemeClr val="tx1"/>
+                          </a:solidFill>
+                        </a:rPr>
+                        <a:t>등판 내 패스트볼 평균·최고 구속</a:t>
+                      </a:r>
+                      <a:endParaRPr lang="en-US" sz="1200" dirty="0"/>
+                    </a:p>
+                  </a:txBody>
+                  <a:tcPr marL="54864" marR="54864" marT="54864" marB="54864" anchor="ctr">
+                    <a:lnL w="0" cap="flat" cmpd="sng" algn="ctr">
+                      <a:noFill/>
+                    </a:lnL>
+                    <a:lnR w="0" cap="flat" cmpd="sng" algn="ctr">
+                      <a:noFill/>
+                    </a:lnR>
+                    <a:lnT w="6350" cap="flat" cmpd="sng" algn="ctr">
+                      <a:solidFill>
+                        <a:srgbClr val="BFBFBF"/>
+                      </a:solidFill>
+                      <a:prstDash val="solid"/>
+                      <a:round/>
+                      <a:headEnd type="none" w="med" len="med"/>
+                      <a:tailEnd type="none" w="med" len="med"/>
+                    </a:lnT>
+                    <a:lnB w="6350" cap="flat" cmpd="sng" algn="ctr">
+                      <a:solidFill>
+                        <a:srgbClr val="BFBFBF"/>
+                      </a:solidFill>
+                      <a:prstDash val="solid"/>
+                      <a:round/>
+                      <a:headEnd type="none" w="med" len="med"/>
+                      <a:tailEnd type="none" w="med" len="med"/>
+                    </a:lnB>
+                  </a:tcPr>
+                </a:tc>
+              </a:tr>
+              <a:tr h="320040">
+                <a:tc vMerge="1">
+                  <a:tcPr/>
+                </a:tc>
+                <a:tc>
+                  <a:txBody>
+                    <a:bodyPr/>
+                    <a:lstStyle/>
+                    <a:p>
+                      <a:pPr algn="ctr" indent="0" marL="0">
+                        <a:buNone/>
+                      </a:pPr>
+                      <a:r>
+                        <a:rPr lang="en-US" sz="1200" b="1" dirty="0">
+                          <a:solidFill>
+                            <a:schemeClr val="tx1"/>
+                          </a:solidFill>
+                        </a:rPr>
+                        <a:t>구속 변동성</a:t>
+                      </a:r>
+                      <a:endParaRPr lang="en-US" sz="1200" dirty="0"/>
+                    </a:p>
+                  </a:txBody>
+                  <a:tcPr marL="54864" marR="54864" marT="54864" marB="54864" anchor="ctr">
+                    <a:lnL w="0" cap="flat" cmpd="sng" algn="ctr">
+                      <a:noFill/>
+                    </a:lnL>
+                    <a:lnR w="0" cap="flat" cmpd="sng" algn="ctr">
+                      <a:noFill/>
+                    </a:lnR>
+                    <a:lnT w="6350" cap="flat" cmpd="sng" algn="ctr">
+                      <a:solidFill>
+                        <a:srgbClr val="BFBFBF"/>
+                      </a:solidFill>
+                      <a:prstDash val="solid"/>
+                      <a:round/>
+                      <a:headEnd type="none" w="med" len="med"/>
+                      <a:tailEnd type="none" w="med" len="med"/>
+                    </a:lnT>
+                    <a:lnB w="6350" cap="flat" cmpd="sng" algn="ctr">
+                      <a:solidFill>
+                        <a:srgbClr val="BFBFBF"/>
+                      </a:solidFill>
+                      <a:prstDash val="solid"/>
+                      <a:round/>
+                      <a:headEnd type="none" w="med" len="med"/>
+                      <a:tailEnd type="none" w="med" len="med"/>
+                    </a:lnB>
+                  </a:tcPr>
+                </a:tc>
+                <a:tc>
+                  <a:txBody>
+                    <a:bodyPr/>
+                    <a:lstStyle/>
+                    <a:p>
+                      <a:pPr algn="ctr" indent="0" marL="0">
+                        <a:buNone/>
+                      </a:pPr>
+                      <a:r>
+                        <a:rPr lang="en-US" sz="1200" dirty="0">
+                          <a:solidFill>
+                            <a:schemeClr val="tx1"/>
+                          </a:solidFill>
+                        </a:rPr>
+                        <a:t>등판 내 패스트볼 구속의 표준편차</a:t>
+                      </a:r>
+                      <a:endParaRPr lang="en-US" sz="1200" dirty="0"/>
+                    </a:p>
+                  </a:txBody>
+                  <a:tcPr marL="54864" marR="54864" marT="54864" marB="54864" anchor="ctr">
+                    <a:lnL w="0" cap="flat" cmpd="sng" algn="ctr">
+                      <a:noFill/>
+                    </a:lnL>
+                    <a:lnR w="0" cap="flat" cmpd="sng" algn="ctr">
+                      <a:noFill/>
+                    </a:lnR>
+                    <a:lnT w="6350" cap="flat" cmpd="sng" algn="ctr">
+                      <a:solidFill>
+                        <a:srgbClr val="BFBFBF"/>
+                      </a:solidFill>
+                      <a:prstDash val="solid"/>
+                      <a:round/>
+                      <a:headEnd type="none" w="med" len="med"/>
+                      <a:tailEnd type="none" w="med" len="med"/>
+                    </a:lnT>
+                    <a:lnB w="6350" cap="flat" cmpd="sng" algn="ctr">
+                      <a:solidFill>
+                        <a:srgbClr val="BFBFBF"/>
+                      </a:solidFill>
+                      <a:prstDash val="solid"/>
+                      <a:round/>
+                      <a:headEnd type="none" w="med" len="med"/>
+                      <a:tailEnd type="none" w="med" len="med"/>
+                    </a:lnB>
+                  </a:tcPr>
+                </a:tc>
+              </a:tr>
+              <a:tr h="320040">
+                <a:tc vMerge="1">
+                  <a:tcPr/>
+                </a:tc>
+                <a:tc>
+                  <a:txBody>
+                    <a:bodyPr/>
+                    <a:lstStyle/>
+                    <a:p>
+                      <a:pPr algn="ctr" indent="0" marL="0">
+                        <a:buNone/>
+                      </a:pPr>
+                      <a:r>
+                        <a:rPr lang="en-US" sz="1200" b="1" dirty="0">
+                          <a:solidFill>
+                            <a:schemeClr val="tx1"/>
+                          </a:solidFill>
+                        </a:rPr>
+                        <a:t>릴리스 포인트</a:t>
+                      </a:r>
+                      <a:endParaRPr lang="en-US" sz="1200" dirty="0"/>
+                    </a:p>
+                  </a:txBody>
+                  <a:tcPr marL="54864" marR="54864" marT="54864" marB="54864" anchor="ctr">
+                    <a:lnL w="0" cap="flat" cmpd="sng" algn="ctr">
+                      <a:noFill/>
+                    </a:lnL>
+                    <a:lnR w="0" cap="flat" cmpd="sng" algn="ctr">
+                      <a:noFill/>
+                    </a:lnR>
+                    <a:lnT w="6350" cap="flat" cmpd="sng" algn="ctr">
+                      <a:solidFill>
+                        <a:srgbClr val="BFBFBF"/>
+                      </a:solidFill>
+                      <a:prstDash val="solid"/>
+                      <a:round/>
+                      <a:headEnd type="none" w="med" len="med"/>
+                      <a:tailEnd type="none" w="med" len="med"/>
+                    </a:lnT>
+                    <a:lnB w="6350" cap="flat" cmpd="sng" algn="ctr">
+                      <a:solidFill>
+                        <a:srgbClr val="BFBFBF"/>
+                      </a:solidFill>
+                      <a:prstDash val="solid"/>
+                      <a:round/>
+                      <a:headEnd type="none" w="med" len="med"/>
+                      <a:tailEnd type="none" w="med" len="med"/>
+                    </a:lnB>
+                  </a:tcPr>
+                </a:tc>
+                <a:tc>
+                  <a:txBody>
+                    <a:bodyPr/>
+                    <a:lstStyle/>
+                    <a:p>
+                      <a:pPr algn="ctr" indent="0" marL="0">
+                        <a:buNone/>
+                      </a:pPr>
+                      <a:r>
+                        <a:rPr lang="en-US" sz="1200" dirty="0">
+                          <a:solidFill>
+                            <a:schemeClr val="tx1"/>
+                          </a:solidFill>
+                        </a:rPr>
+                        <a:t>수평·수직 릴리스 위치의 평균과 표준편차</a:t>
+                      </a:r>
+                      <a:endParaRPr lang="en-US" sz="1200" dirty="0"/>
+                    </a:p>
+                  </a:txBody>
+                  <a:tcPr marL="54864" marR="54864" marT="54864" marB="54864" anchor="ctr">
+                    <a:lnL w="0" cap="flat" cmpd="sng" algn="ctr">
+                      <a:noFill/>
+                    </a:lnL>
+                    <a:lnR w="0" cap="flat" cmpd="sng" algn="ctr">
+                      <a:noFill/>
+                    </a:lnR>
+                    <a:lnT w="6350" cap="flat" cmpd="sng" algn="ctr">
+                      <a:solidFill>
+                        <a:srgbClr val="BFBFBF"/>
+                      </a:solidFill>
+                      <a:prstDash val="solid"/>
+                      <a:round/>
+                      <a:headEnd type="none" w="med" len="med"/>
+                      <a:tailEnd type="none" w="med" len="med"/>
+                    </a:lnT>
+                    <a:lnB w="6350" cap="flat" cmpd="sng" algn="ctr">
+                      <a:solidFill>
+                        <a:srgbClr val="BFBFBF"/>
+                      </a:solidFill>
+                      <a:prstDash val="solid"/>
+                      <a:round/>
+                      <a:headEnd type="none" w="med" len="med"/>
+                      <a:tailEnd type="none" w="med" len="med"/>
+                    </a:lnB>
+                  </a:tcPr>
+                </a:tc>
+              </a:tr>
+              <a:tr h="320040">
+                <a:tc vMerge="1">
+                  <a:tcPr/>
+                </a:tc>
+                <a:tc>
+                  <a:txBody>
+                    <a:bodyPr/>
+                    <a:lstStyle/>
+                    <a:p>
+                      <a:pPr algn="ctr" indent="0" marL="0">
+                        <a:buNone/>
+                      </a:pPr>
+                      <a:r>
+                        <a:rPr lang="en-US" sz="1200" b="1" dirty="0">
+                          <a:solidFill>
+                            <a:schemeClr val="tx1"/>
+                          </a:solidFill>
+                        </a:rPr>
+                        <a:t>보조</a:t>
+                      </a:r>
+                      <a:endParaRPr lang="en-US" sz="1200" dirty="0"/>
+                    </a:p>
+                  </a:txBody>
+                  <a:tcPr marL="54864" marR="54864" marT="54864" marB="54864" anchor="ctr">
+                    <a:lnL w="0" cap="flat" cmpd="sng" algn="ctr">
+                      <a:noFill/>
+                    </a:lnL>
+                    <a:lnR w="0" cap="flat" cmpd="sng" algn="ctr">
+                      <a:noFill/>
+                    </a:lnR>
+                    <a:lnT w="6350" cap="flat" cmpd="sng" algn="ctr">
+                      <a:solidFill>
+                        <a:srgbClr val="BFBFBF"/>
+                      </a:solidFill>
+                      <a:prstDash val="solid"/>
+                      <a:round/>
+                      <a:headEnd type="none" w="med" len="med"/>
+                      <a:tailEnd type="none" w="med" len="med"/>
+                    </a:lnT>
+                    <a:lnB w="6350" cap="flat" cmpd="sng" algn="ctr">
+                      <a:solidFill>
+                        <a:srgbClr val="BFBFBF"/>
+                      </a:solidFill>
+                      <a:prstDash val="solid"/>
+                      <a:round/>
+                      <a:headEnd type="none" w="med" len="med"/>
+                      <a:tailEnd type="none" w="med" len="med"/>
+                    </a:lnB>
+                  </a:tcPr>
+                </a:tc>
+                <a:tc>
+                  <a:txBody>
+                    <a:bodyPr/>
+                    <a:lstStyle/>
+                    <a:p>
+                      <a:pPr algn="ctr" indent="0" marL="0">
+                        <a:buNone/>
+                      </a:pPr>
+                      <a:r>
+                        <a:rPr lang="en-US" sz="1200" dirty="0">
+                          <a:solidFill>
+                            <a:schemeClr val="tx1"/>
+                          </a:solidFill>
+                        </a:rPr>
+                        <a:t>회전수, 익스텐션, 경기 내 구속 하락 기울기</a:t>
+                      </a:r>
+                      <a:endParaRPr lang="en-US" sz="1200" dirty="0"/>
+                    </a:p>
+                  </a:txBody>
+                  <a:tcPr marL="54864" marR="54864" marT="54864" marB="54864" anchor="ctr">
+                    <a:lnL w="0" cap="flat" cmpd="sng" algn="ctr">
+                      <a:noFill/>
+                    </a:lnL>
+                    <a:lnR w="0" cap="flat" cmpd="sng" algn="ctr">
+                      <a:noFill/>
+                    </a:lnR>
+                    <a:lnT w="6350" cap="flat" cmpd="sng" algn="ctr">
+                      <a:solidFill>
+                        <a:srgbClr val="BFBFBF"/>
+                      </a:solidFill>
+                      <a:prstDash val="solid"/>
+                      <a:round/>
+                      <a:headEnd type="none" w="med" len="med"/>
+                      <a:tailEnd type="none" w="med" len="med"/>
+                    </a:lnT>
+                    <a:lnB w="6350" cap="flat" cmpd="sng" algn="ctr">
+                      <a:solidFill>
+                        <a:srgbClr val="BFBFBF"/>
+                      </a:solidFill>
+                      <a:prstDash val="solid"/>
+                      <a:round/>
+                      <a:headEnd type="none" w="med" len="med"/>
+                      <a:tailEnd type="none" w="med" len="med"/>
+                    </a:lnB>
+                  </a:tcPr>
+                </a:tc>
+              </a:tr>
+              <a:tr h="320040">
+                <a:tc rowSpan="3">
+                  <a:txBody>
+                    <a:bodyPr/>
+                    <a:lstStyle/>
+                    <a:p>
+                      <a:pPr algn="ctr" indent="0" marL="0">
+                        <a:buNone/>
+                      </a:pPr>
+                      <a:r>
+                        <a:rPr lang="en-US" sz="1200" b="1" dirty="0">
+                          <a:solidFill>
+                            <a:schemeClr val="tx1"/>
+                          </a:solidFill>
+                        </a:rPr>
+                        <a:t>부하 지표</a:t>
+                      </a:r>
+                      <a:endParaRPr lang="en-US" sz="1200" dirty="0"/>
+                    </a:p>
+                  </a:txBody>
+                  <a:tcPr marL="54864" marR="54864" marT="54864" marB="54864" anchor="ctr">
+                    <a:lnL w="0" cap="flat" cmpd="sng" algn="ctr">
+                      <a:noFill/>
+                    </a:lnL>
+                    <a:lnR w="0" cap="flat" cmpd="sng" algn="ctr">
+                      <a:noFill/>
+                    </a:lnR>
+                    <a:lnT w="6350" cap="flat" cmpd="sng" algn="ctr">
+                      <a:solidFill>
+                        <a:srgbClr val="BFBFBF"/>
                       </a:solidFill>
                       <a:prstDash val="solid"/>
                       <a:round/>
@@ -4369,57 +4988,9 @@
                             <a:schemeClr val="tx1"/>
                           </a:solidFill>
                         </a:rPr>
-                        <a:t>정의</a:t>
+                        <a:t>등판 간격</a:t>
                       </a:r>
                       <a:endParaRPr lang="en-US" sz="1200" dirty="0"/>
-                    </a:p>
-                  </a:txBody>
-                  <a:tcPr marL="54864" marR="54864" marT="54864" marB="54864" anchor="ctr">
-                    <a:lnL w="0" cap="flat" cmpd="sng" algn="ctr">
-                      <a:noFill/>
-                    </a:lnL>
-                    <a:lnR w="0" cap="flat" cmpd="sng" algn="ctr">
-                      <a:noFill/>
-                    </a:lnR>
-                    <a:lnT w="15875" cap="flat" cmpd="sng" algn="ctr">
-                      <a:solidFill>
-                        <a:srgbClr val="000000"/>
-                      </a:solidFill>
-                      <a:prstDash val="solid"/>
-                      <a:round/>
-                      <a:headEnd type="none" w="med" len="med"/>
-                      <a:tailEnd type="none" w="med" len="med"/>
-                    </a:lnT>
-                    <a:lnB w="9525" cap="flat" cmpd="sng" algn="ctr">
-                      <a:solidFill>
-                        <a:srgbClr val="000000"/>
-                      </a:solidFill>
-                      <a:prstDash val="solid"/>
-                      <a:round/>
-                      <a:headEnd type="none" w="med" len="med"/>
-                      <a:tailEnd type="none" w="med" len="med"/>
-                    </a:lnB>
-                  </a:tcPr>
-                </a:tc>
-              </a:tr>
-              <a:tr h="274320">
-                <a:tc rowSpan="4">
-                  <a:txBody>
-                    <a:bodyPr/>
-                    <a:lstStyle/>
-                    <a:p>
-                      <a:pPr algn="ctr" indent="0" marL="0">
-                        <a:buNone/>
-                      </a:pPr>
-                      <a:r>
-                        <a:rPr lang="en-US" sz="1100" b="1" dirty="0">
-                          <a:solidFill>
-                            <a:schemeClr val="tx1"/>
-                          </a:solidFill>
-                        </a:rPr>
-                        <a:t>투구 지표</a:t>
-                      </a:r>
-                      <a:endParaRPr lang="en-US" sz="1100" dirty="0"/>
                     </a:p>
                   </a:txBody>
                   <a:tcPr marL="54864" marR="54864" marT="54864" marB="54864" anchor="ctr">
@@ -4458,14 +5029,65 @@
                         <a:buNone/>
                       </a:pPr>
                       <a:r>
-                        <a:rPr lang="en-US" sz="1100" b="1" dirty="0">
+                        <a:rPr lang="en-US" sz="1200" dirty="0">
                           <a:solidFill>
                             <a:schemeClr val="tx1"/>
                           </a:solidFill>
                         </a:rPr>
-                        <a:t>구속</a:t>
+                        <a:t>직전 등판 이후 일수</a:t>
                       </a:r>
-                      <a:endParaRPr lang="en-US" sz="1100" dirty="0"/>
+                      <a:endParaRPr lang="en-US" sz="1200" dirty="0"/>
+                    </a:p>
+                  </a:txBody>
+                  <a:tcPr marL="54864" marR="54864" marT="54864" marB="54864" anchor="ctr">
+                    <a:lnL w="0" cap="flat" cmpd="sng" algn="ctr">
+                      <a:noFill/>
+                    </a:lnL>
+                    <a:lnR w="0" cap="flat" cmpd="sng" algn="ctr">
+                      <a:noFill/>
+                    </a:lnR>
+                    <a:lnT w="6350" cap="flat" cmpd="sng" algn="ctr">
+                      <a:solidFill>
+                        <a:srgbClr val="BFBFBF"/>
+                      </a:solidFill>
+                      <a:prstDash val="solid"/>
+                      <a:round/>
+                      <a:headEnd type="none" w="med" len="med"/>
+                      <a:tailEnd type="none" w="med" len="med"/>
+                    </a:lnT>
+                    <a:lnB w="6350" cap="flat" cmpd="sng" algn="ctr">
+                      <a:solidFill>
+                        <a:srgbClr val="BFBFBF"/>
+                      </a:solidFill>
+                      <a:prstDash val="solid"/>
+                      <a:round/>
+                      <a:headEnd type="none" w="med" len="med"/>
+                      <a:tailEnd type="none" w="med" len="med"/>
+                    </a:lnB>
+                  </a:tcPr>
+                </a:tc>
+              </a:tr>
+              <a:tr h="320040">
+                <a:tc vMerge="1">
+                  <a:tcPr/>
+                </a:tc>
+                <a:tc>
+                  <a:txBody>
+                    <a:bodyPr/>
+                    <a:lstStyle/>
+                    <a:p>
+                      <a:pPr algn="ctr" indent="0" marL="0">
+                        <a:buNone/>
+                      </a:pPr>
+                      <a:r>
+                        <a:rPr lang="en-US" sz="1200" b="1" dirty="0">
+                          <a:solidFill>
+                            <a:schemeClr val="tx1"/>
+                          </a:solidFill>
+                        </a:rPr>
+                        <a:t>최근 투구량</a:t>
+                      </a:r>
+                      <a:endParaRPr lang="en-US" sz="1200" dirty="0"/>
                     </a:p>
                   </a:txBody>
                   <a:tcPr marL="54864" marR="54864" marT="54864" marB="54864" anchor="ctr">
@@ -4504,14 +5126,14 @@
                         <a:buNone/>
                       </a:pPr>
                       <a:r>
-                        <a:rPr lang="en-US" sz="1100" dirty="0">
+                        <a:rPr lang="en-US" sz="1200" dirty="0">
                           <a:solidFill>
                             <a:schemeClr val="tx1"/>
                           </a:solidFill>
                         </a:rPr>
-                        <a:t>등판 내 패스트볼 평균·최고 구속</a:t>
+                        <a:t>최근 7·14·28일 누적 투구 수</a:t>
                       </a:r>
-                      <a:endParaRPr lang="en-US" sz="1100" dirty="0"/>
+                      <a:endParaRPr lang="en-US" sz="1200" dirty="0"/>
                     </a:p>
                   </a:txBody>
                   <a:tcPr marL="54864" marR="54864" marT="54864" marB="54864" anchor="ctr">
@@ -4542,7 +5164,7 @@
                   </a:tcPr>
                 </a:tc>
               </a:tr>
-              <a:tr h="274320">
+              <a:tr h="320040">
                 <a:tc vMerge="1">
                   <a:tcPr/>
                 </a:tc>
@@ -4555,14 +5177,14 @@
                         <a:buNone/>
                       </a:pPr>
                       <a:r>
-                        <a:rPr lang="en-US" sz="1100" b="1" dirty="0">
+                        <a:rPr lang="en-US" sz="1200" b="1" dirty="0">
                           <a:solidFill>
                             <a:schemeClr val="tx1"/>
                           </a:solidFill>
                         </a:rPr>
-                        <a:t>구속 변동성</a:t>
+                        <a:t>ACWR</a:t>
                       </a:r>
-                      <a:endParaRPr lang="en-US" sz="1100" dirty="0"/>
+                      <a:endParaRPr lang="en-US" sz="1200" dirty="0"/>
                     </a:p>
                   </a:txBody>
                   <a:tcPr marL="54864" marR="54864" marT="54864" marB="54864" anchor="ctr">
@@ -4581,9 +5203,9 @@
                       <a:headEnd type="none" w="med" len="med"/>
                       <a:tailEnd type="none" w="med" len="med"/>
                     </a:lnT>
-                    <a:lnB w="6350" cap="flat" cmpd="sng" algn="ctr">
-                      <a:solidFill>
-                        <a:srgbClr val="BFBFBF"/>
+                    <a:lnB w="9525" cap="flat" cmpd="sng" algn="ctr">
+                      <a:solidFill>
+                        <a:srgbClr val="000000"/>
                       </a:solidFill>
                       <a:prstDash val="solid"/>
                       <a:round/>
@@ -4601,542 +5223,14 @@
                         <a:buNone/>
                       </a:pPr>
                       <a:r>
-                        <a:rPr lang="en-US" sz="1100" dirty="0">
-                          <a:solidFill>
-                            <a:schemeClr val="tx1"/>
-                          </a:solidFill>
-                        </a:rPr>
-                        <a:t>등판 내 패스트볼 구속의 표준편차</a:t>
-                      </a:r>
-                      <a:endParaRPr lang="en-US" sz="1100" dirty="0"/>
-                    </a:p>
-                  </a:txBody>
-                  <a:tcPr marL="54864" marR="54864" marT="54864" marB="54864" anchor="ctr">
-                    <a:lnL w="0" cap="flat" cmpd="sng" algn="ctr">
-                      <a:noFill/>
-                    </a:lnL>
-                    <a:lnR w="0" cap="flat" cmpd="sng" algn="ctr">
-                      <a:noFill/>
-                    </a:lnR>
-                    <a:lnT w="6350" cap="flat" cmpd="sng" algn="ctr">
-                      <a:solidFill>
-                        <a:srgbClr val="BFBFBF"/>
-                      </a:solidFill>
-                      <a:prstDash val="solid"/>
-                      <a:round/>
-                      <a:headEnd type="none" w="med" len="med"/>
-                      <a:tailEnd type="none" w="med" len="med"/>
-                    </a:lnT>
-                    <a:lnB w="6350" cap="flat" cmpd="sng" algn="ctr">
-                      <a:solidFill>
-                        <a:srgbClr val="BFBFBF"/>
-                      </a:solidFill>
-                      <a:prstDash val="solid"/>
-                      <a:round/>
-                      <a:headEnd type="none" w="med" len="med"/>
-                      <a:tailEnd type="none" w="med" len="med"/>
-                    </a:lnB>
-                  </a:tcPr>
-                </a:tc>
-              </a:tr>
-              <a:tr h="274320">
-                <a:tc vMerge="1">
-                  <a:tcPr/>
-                </a:tc>
-                <a:tc>
-                  <a:txBody>
-                    <a:bodyPr/>
-                    <a:lstStyle/>
-                    <a:p>
-                      <a:pPr algn="ctr" indent="0" marL="0">
-                        <a:buNone/>
-                      </a:pPr>
-                      <a:r>
-                        <a:rPr lang="en-US" sz="1100" b="1" dirty="0">
-                          <a:solidFill>
-                            <a:schemeClr val="tx1"/>
-                          </a:solidFill>
-                        </a:rPr>
-                        <a:t>릴리스 포인트</a:t>
-                      </a:r>
-                      <a:endParaRPr lang="en-US" sz="1100" dirty="0"/>
-                    </a:p>
-                  </a:txBody>
-                  <a:tcPr marL="54864" marR="54864" marT="54864" marB="54864" anchor="ctr">
-                    <a:lnL w="0" cap="flat" cmpd="sng" algn="ctr">
-                      <a:noFill/>
-                    </a:lnL>
-                    <a:lnR w="0" cap="flat" cmpd="sng" algn="ctr">
-                      <a:noFill/>
-                    </a:lnR>
-                    <a:lnT w="6350" cap="flat" cmpd="sng" algn="ctr">
-                      <a:solidFill>
-                        <a:srgbClr val="BFBFBF"/>
-                      </a:solidFill>
-                      <a:prstDash val="solid"/>
-                      <a:round/>
-                      <a:headEnd type="none" w="med" len="med"/>
-                      <a:tailEnd type="none" w="med" len="med"/>
-                    </a:lnT>
-                    <a:lnB w="6350" cap="flat" cmpd="sng" algn="ctr">
-                      <a:solidFill>
-                        <a:srgbClr val="BFBFBF"/>
-                      </a:solidFill>
-                      <a:prstDash val="solid"/>
-                      <a:round/>
-                      <a:headEnd type="none" w="med" len="med"/>
-                      <a:tailEnd type="none" w="med" len="med"/>
-                    </a:lnB>
-                  </a:tcPr>
-                </a:tc>
-                <a:tc>
-                  <a:txBody>
-                    <a:bodyPr/>
-                    <a:lstStyle/>
-                    <a:p>
-                      <a:pPr algn="ctr" indent="0" marL="0">
-                        <a:buNone/>
-                      </a:pPr>
-                      <a:r>
-                        <a:rPr lang="en-US" sz="1100" dirty="0">
-                          <a:solidFill>
-                            <a:schemeClr val="tx1"/>
-                          </a:solidFill>
-                        </a:rPr>
-                        <a:t>수평·수직 릴리스 위치의 평균과 표준편차</a:t>
-                      </a:r>
-                      <a:endParaRPr lang="en-US" sz="1100" dirty="0"/>
-                    </a:p>
-                  </a:txBody>
-                  <a:tcPr marL="54864" marR="54864" marT="54864" marB="54864" anchor="ctr">
-                    <a:lnL w="0" cap="flat" cmpd="sng" algn="ctr">
-                      <a:noFill/>
-                    </a:lnL>
-                    <a:lnR w="0" cap="flat" cmpd="sng" algn="ctr">
-                      <a:noFill/>
-                    </a:lnR>
-                    <a:lnT w="6350" cap="flat" cmpd="sng" algn="ctr">
-                      <a:solidFill>
-                        <a:srgbClr val="BFBFBF"/>
-                      </a:solidFill>
-                      <a:prstDash val="solid"/>
-                      <a:round/>
-                      <a:headEnd type="none" w="med" len="med"/>
-                      <a:tailEnd type="none" w="med" len="med"/>
-                    </a:lnT>
-                    <a:lnB w="6350" cap="flat" cmpd="sng" algn="ctr">
-                      <a:solidFill>
-                        <a:srgbClr val="BFBFBF"/>
-                      </a:solidFill>
-                      <a:prstDash val="solid"/>
-                      <a:round/>
-                      <a:headEnd type="none" w="med" len="med"/>
-                      <a:tailEnd type="none" w="med" len="med"/>
-                    </a:lnB>
-                  </a:tcPr>
-                </a:tc>
-              </a:tr>
-              <a:tr h="274320">
-                <a:tc vMerge="1">
-                  <a:tcPr/>
-                </a:tc>
-                <a:tc>
-                  <a:txBody>
-                    <a:bodyPr/>
-                    <a:lstStyle/>
-                    <a:p>
-                      <a:pPr algn="ctr" indent="0" marL="0">
-                        <a:buNone/>
-                      </a:pPr>
-                      <a:r>
-                        <a:rPr lang="en-US" sz="1100" b="1" dirty="0">
-                          <a:solidFill>
-                            <a:schemeClr val="tx1"/>
-                          </a:solidFill>
-                        </a:rPr>
-                        <a:t>보조</a:t>
-                      </a:r>
-                      <a:endParaRPr lang="en-US" sz="1100" dirty="0"/>
-                    </a:p>
-                  </a:txBody>
-                  <a:tcPr marL="54864" marR="54864" marT="54864" marB="54864" anchor="ctr">
-                    <a:lnL w="0" cap="flat" cmpd="sng" algn="ctr">
-                      <a:noFill/>
-                    </a:lnL>
-                    <a:lnR w="0" cap="flat" cmpd="sng" algn="ctr">
-                      <a:noFill/>
-                    </a:lnR>
-                    <a:lnT w="6350" cap="flat" cmpd="sng" algn="ctr">
-                      <a:solidFill>
-                        <a:srgbClr val="BFBFBF"/>
-                      </a:solidFill>
-                      <a:prstDash val="solid"/>
-                      <a:round/>
-                      <a:headEnd type="none" w="med" len="med"/>
-                      <a:tailEnd type="none" w="med" len="med"/>
-                    </a:lnT>
-                    <a:lnB w="6350" cap="flat" cmpd="sng" algn="ctr">
-                      <a:solidFill>
-                        <a:srgbClr val="BFBFBF"/>
-                      </a:solidFill>
-                      <a:prstDash val="solid"/>
-                      <a:round/>
-                      <a:headEnd type="none" w="med" len="med"/>
-                      <a:tailEnd type="none" w="med" len="med"/>
-                    </a:lnB>
-                  </a:tcPr>
-                </a:tc>
-                <a:tc>
-                  <a:txBody>
-                    <a:bodyPr/>
-                    <a:lstStyle/>
-                    <a:p>
-                      <a:pPr algn="ctr" indent="0" marL="0">
-                        <a:buNone/>
-                      </a:pPr>
-                      <a:r>
-                        <a:rPr lang="en-US" sz="1100" dirty="0">
-                          <a:solidFill>
-                            <a:schemeClr val="tx1"/>
-                          </a:solidFill>
-                        </a:rPr>
-                        <a:t>회전수, 익스텐션, 경기 내 구속 하락 기울기</a:t>
-                      </a:r>
-                      <a:endParaRPr lang="en-US" sz="1100" dirty="0"/>
-                    </a:p>
-                  </a:txBody>
-                  <a:tcPr marL="54864" marR="54864" marT="54864" marB="54864" anchor="ctr">
-                    <a:lnL w="0" cap="flat" cmpd="sng" algn="ctr">
-                      <a:noFill/>
-                    </a:lnL>
-                    <a:lnR w="0" cap="flat" cmpd="sng" algn="ctr">
-                      <a:noFill/>
-                    </a:lnR>
-                    <a:lnT w="6350" cap="flat" cmpd="sng" algn="ctr">
-                      <a:solidFill>
-                        <a:srgbClr val="BFBFBF"/>
-                      </a:solidFill>
-                      <a:prstDash val="solid"/>
-                      <a:round/>
-                      <a:headEnd type="none" w="med" len="med"/>
-                      <a:tailEnd type="none" w="med" len="med"/>
-                    </a:lnT>
-                    <a:lnB w="6350" cap="flat" cmpd="sng" algn="ctr">
-                      <a:solidFill>
-                        <a:srgbClr val="BFBFBF"/>
-                      </a:solidFill>
-                      <a:prstDash val="solid"/>
-                      <a:round/>
-                      <a:headEnd type="none" w="med" len="med"/>
-                      <a:tailEnd type="none" w="med" len="med"/>
-                    </a:lnB>
-                  </a:tcPr>
-                </a:tc>
-              </a:tr>
-              <a:tr h="274320">
-                <a:tc rowSpan="3">
-                  <a:txBody>
-                    <a:bodyPr/>
-                    <a:lstStyle/>
-                    <a:p>
-                      <a:pPr algn="ctr" indent="0" marL="0">
-                        <a:buNone/>
-                      </a:pPr>
-                      <a:r>
-                        <a:rPr lang="en-US" sz="1100" b="1" dirty="0">
-                          <a:solidFill>
-                            <a:schemeClr val="tx1"/>
-                          </a:solidFill>
-                        </a:rPr>
-                        <a:t>부하 지표</a:t>
-                      </a:r>
-                      <a:endParaRPr lang="en-US" sz="1100" dirty="0"/>
-                    </a:p>
-                  </a:txBody>
-                  <a:tcPr marL="54864" marR="54864" marT="54864" marB="54864" anchor="ctr">
-                    <a:lnL w="0" cap="flat" cmpd="sng" algn="ctr">
-                      <a:noFill/>
-                    </a:lnL>
-                    <a:lnR w="0" cap="flat" cmpd="sng" algn="ctr">
-                      <a:noFill/>
-                    </a:lnR>
-                    <a:lnT w="6350" cap="flat" cmpd="sng" algn="ctr">
-                      <a:solidFill>
-                        <a:srgbClr val="BFBFBF"/>
-                      </a:solidFill>
-                      <a:prstDash val="solid"/>
-                      <a:round/>
-                      <a:headEnd type="none" w="med" len="med"/>
-                      <a:tailEnd type="none" w="med" len="med"/>
-                    </a:lnT>
-                    <a:lnB w="9525" cap="flat" cmpd="sng" algn="ctr">
-                      <a:solidFill>
-                        <a:srgbClr val="000000"/>
-                      </a:solidFill>
-                      <a:prstDash val="solid"/>
-                      <a:round/>
-                      <a:headEnd type="none" w="med" len="med"/>
-                      <a:tailEnd type="none" w="med" len="med"/>
-                    </a:lnB>
-                  </a:tcPr>
-                </a:tc>
-                <a:tc>
-                  <a:txBody>
-                    <a:bodyPr/>
-                    <a:lstStyle/>
-                    <a:p>
-                      <a:pPr algn="ctr" indent="0" marL="0">
-                        <a:buNone/>
-                      </a:pPr>
-                      <a:r>
-                        <a:rPr lang="en-US" sz="1100" b="1" dirty="0">
-                          <a:solidFill>
-                            <a:schemeClr val="tx1"/>
-                          </a:solidFill>
-                        </a:rPr>
-                        <a:t>등판 간격</a:t>
-                      </a:r>
-                      <a:endParaRPr lang="en-US" sz="1100" dirty="0"/>
-                    </a:p>
-                  </a:txBody>
-                  <a:tcPr marL="54864" marR="54864" marT="54864" marB="54864" anchor="ctr">
-                    <a:lnL w="0" cap="flat" cmpd="sng" algn="ctr">
-                      <a:noFill/>
-                    </a:lnL>
-                    <a:lnR w="0" cap="flat" cmpd="sng" algn="ctr">
-                      <a:noFill/>
-                    </a:lnR>
-                    <a:lnT w="6350" cap="flat" cmpd="sng" algn="ctr">
-                      <a:solidFill>
-                        <a:srgbClr val="BFBFBF"/>
-                      </a:solidFill>
-                      <a:prstDash val="solid"/>
-                      <a:round/>
-                      <a:headEnd type="none" w="med" len="med"/>
-                      <a:tailEnd type="none" w="med" len="med"/>
-                    </a:lnT>
-                    <a:lnB w="6350" cap="flat" cmpd="sng" algn="ctr">
-                      <a:solidFill>
-                        <a:srgbClr val="BFBFBF"/>
-                      </a:solidFill>
-                      <a:prstDash val="solid"/>
-                      <a:round/>
-                      <a:headEnd type="none" w="med" len="med"/>
-                      <a:tailEnd type="none" w="med" len="med"/>
-                    </a:lnB>
-                  </a:tcPr>
-                </a:tc>
-                <a:tc>
-                  <a:txBody>
-                    <a:bodyPr/>
-                    <a:lstStyle/>
-                    <a:p>
-                      <a:pPr algn="ctr" indent="0" marL="0">
-                        <a:buNone/>
-                      </a:pPr>
-                      <a:r>
-                        <a:rPr lang="en-US" sz="1100" dirty="0">
-                          <a:solidFill>
-                            <a:schemeClr val="tx1"/>
-                          </a:solidFill>
-                        </a:rPr>
-                        <a:t>직전 등판 이후 일수</a:t>
-                      </a:r>
-                      <a:endParaRPr lang="en-US" sz="1100" dirty="0"/>
-                    </a:p>
-                  </a:txBody>
-                  <a:tcPr marL="54864" marR="54864" marT="54864" marB="54864" anchor="ctr">
-                    <a:lnL w="0" cap="flat" cmpd="sng" algn="ctr">
-                      <a:noFill/>
-                    </a:lnL>
-                    <a:lnR w="0" cap="flat" cmpd="sng" algn="ctr">
-                      <a:noFill/>
-                    </a:lnR>
-                    <a:lnT w="6350" cap="flat" cmpd="sng" algn="ctr">
-                      <a:solidFill>
-                        <a:srgbClr val="BFBFBF"/>
-                      </a:solidFill>
-                      <a:prstDash val="solid"/>
-                      <a:round/>
-                      <a:headEnd type="none" w="med" len="med"/>
-                      <a:tailEnd type="none" w="med" len="med"/>
-                    </a:lnT>
-                    <a:lnB w="6350" cap="flat" cmpd="sng" algn="ctr">
-                      <a:solidFill>
-                        <a:srgbClr val="BFBFBF"/>
-                      </a:solidFill>
-                      <a:prstDash val="solid"/>
-                      <a:round/>
-                      <a:headEnd type="none" w="med" len="med"/>
-                      <a:tailEnd type="none" w="med" len="med"/>
-                    </a:lnB>
-                  </a:tcPr>
-                </a:tc>
-              </a:tr>
-              <a:tr h="274320">
-                <a:tc vMerge="1">
-                  <a:tcPr/>
-                </a:tc>
-                <a:tc>
-                  <a:txBody>
-                    <a:bodyPr/>
-                    <a:lstStyle/>
-                    <a:p>
-                      <a:pPr algn="ctr" indent="0" marL="0">
-                        <a:buNone/>
-                      </a:pPr>
-                      <a:r>
-                        <a:rPr lang="en-US" sz="1100" b="1" dirty="0">
-                          <a:solidFill>
-                            <a:schemeClr val="tx1"/>
-                          </a:solidFill>
-                        </a:rPr>
-                        <a:t>최근 투구량</a:t>
-                      </a:r>
-                      <a:endParaRPr lang="en-US" sz="1100" dirty="0"/>
-                    </a:p>
-                  </a:txBody>
-                  <a:tcPr marL="54864" marR="54864" marT="54864" marB="54864" anchor="ctr">
-                    <a:lnL w="0" cap="flat" cmpd="sng" algn="ctr">
-                      <a:noFill/>
-                    </a:lnL>
-                    <a:lnR w="0" cap="flat" cmpd="sng" algn="ctr">
-                      <a:noFill/>
-                    </a:lnR>
-                    <a:lnT w="6350" cap="flat" cmpd="sng" algn="ctr">
-                      <a:solidFill>
-                        <a:srgbClr val="BFBFBF"/>
-                      </a:solidFill>
-                      <a:prstDash val="solid"/>
-                      <a:round/>
-                      <a:headEnd type="none" w="med" len="med"/>
-                      <a:tailEnd type="none" w="med" len="med"/>
-                    </a:lnT>
-                    <a:lnB w="6350" cap="flat" cmpd="sng" algn="ctr">
-                      <a:solidFill>
-                        <a:srgbClr val="BFBFBF"/>
-                      </a:solidFill>
-                      <a:prstDash val="solid"/>
-                      <a:round/>
-                      <a:headEnd type="none" w="med" len="med"/>
-                      <a:tailEnd type="none" w="med" len="med"/>
-                    </a:lnB>
-                  </a:tcPr>
-                </a:tc>
-                <a:tc>
-                  <a:txBody>
-                    <a:bodyPr/>
-                    <a:lstStyle/>
-                    <a:p>
-                      <a:pPr algn="ctr" indent="0" marL="0">
-                        <a:buNone/>
-                      </a:pPr>
-                      <a:r>
-                        <a:rPr lang="en-US" sz="1100" dirty="0">
-                          <a:solidFill>
-                            <a:schemeClr val="tx1"/>
-                          </a:solidFill>
-                        </a:rPr>
-                        <a:t>최근 7·14·28일 누적 투구 수</a:t>
-                      </a:r>
-                      <a:endParaRPr lang="en-US" sz="1100" dirty="0"/>
-                    </a:p>
-                  </a:txBody>
-                  <a:tcPr marL="54864" marR="54864" marT="54864" marB="54864" anchor="ctr">
-                    <a:lnL w="0" cap="flat" cmpd="sng" algn="ctr">
-                      <a:noFill/>
-                    </a:lnL>
-                    <a:lnR w="0" cap="flat" cmpd="sng" algn="ctr">
-                      <a:noFill/>
-                    </a:lnR>
-                    <a:lnT w="6350" cap="flat" cmpd="sng" algn="ctr">
-                      <a:solidFill>
-                        <a:srgbClr val="BFBFBF"/>
-                      </a:solidFill>
-                      <a:prstDash val="solid"/>
-                      <a:round/>
-                      <a:headEnd type="none" w="med" len="med"/>
-                      <a:tailEnd type="none" w="med" len="med"/>
-                    </a:lnT>
-                    <a:lnB w="6350" cap="flat" cmpd="sng" algn="ctr">
-                      <a:solidFill>
-                        <a:srgbClr val="BFBFBF"/>
-                      </a:solidFill>
-                      <a:prstDash val="solid"/>
-                      <a:round/>
-                      <a:headEnd type="none" w="med" len="med"/>
-                      <a:tailEnd type="none" w="med" len="med"/>
-                    </a:lnB>
-                  </a:tcPr>
-                </a:tc>
-              </a:tr>
-              <a:tr h="274320">
-                <a:tc vMerge="1">
-                  <a:tcPr/>
-                </a:tc>
-                <a:tc>
-                  <a:txBody>
-                    <a:bodyPr/>
-                    <a:lstStyle/>
-                    <a:p>
-                      <a:pPr algn="ctr" indent="0" marL="0">
-                        <a:buNone/>
-                      </a:pPr>
-                      <a:r>
-                        <a:rPr lang="en-US" sz="1100" b="1" dirty="0">
-                          <a:solidFill>
-                            <a:schemeClr val="tx1"/>
-                          </a:solidFill>
-                        </a:rPr>
-                        <a:t>ACWR</a:t>
-                      </a:r>
-                      <a:endParaRPr lang="en-US" sz="1100" dirty="0"/>
-                    </a:p>
-                  </a:txBody>
-                  <a:tcPr marL="54864" marR="54864" marT="54864" marB="54864" anchor="ctr">
-                    <a:lnL w="0" cap="flat" cmpd="sng" algn="ctr">
-                      <a:noFill/>
-                    </a:lnL>
-                    <a:lnR w="0" cap="flat" cmpd="sng" algn="ctr">
-                      <a:noFill/>
-                    </a:lnR>
-                    <a:lnT w="6350" cap="flat" cmpd="sng" algn="ctr">
-                      <a:solidFill>
-                        <a:srgbClr val="BFBFBF"/>
-                      </a:solidFill>
-                      <a:prstDash val="solid"/>
-                      <a:round/>
-                      <a:headEnd type="none" w="med" len="med"/>
-                      <a:tailEnd type="none" w="med" len="med"/>
-                    </a:lnT>
-                    <a:lnB w="9525" cap="flat" cmpd="sng" algn="ctr">
-                      <a:solidFill>
-                        <a:srgbClr val="000000"/>
-                      </a:solidFill>
-                      <a:prstDash val="solid"/>
-                      <a:round/>
-                      <a:headEnd type="none" w="med" len="med"/>
-                      <a:tailEnd type="none" w="med" len="med"/>
-                    </a:lnB>
-                  </a:tcPr>
-                </a:tc>
-                <a:tc>
-                  <a:txBody>
-                    <a:bodyPr/>
-                    <a:lstStyle/>
-                    <a:p>
-                      <a:pPr algn="ctr" indent="0" marL="0">
-                        <a:buNone/>
-                      </a:pPr>
-                      <a:r>
-                        <a:rPr lang="en-US" sz="1100" dirty="0">
+                        <a:rPr lang="en-US" sz="1200" dirty="0">
                           <a:solidFill>
                             <a:schemeClr val="tx1"/>
                           </a:solidFill>
                         </a:rPr>
                         <a:t>7일 평균 ÷ 28일 평균 투구량</a:t>
                       </a:r>
-                      <a:endParaRPr lang="en-US" sz="1100" dirty="0"/>
+                      <a:endParaRPr lang="en-US" sz="1200" dirty="0"/>
                     </a:p>
                   </a:txBody>
                   <a:tcPr marL="54864" marR="54864" marT="54864" marB="54864" anchor="ctr">
@@ -5179,8 +5273,8 @@
         </p:nvSpPr>
         <p:spPr>
           <a:xfrm>
-            <a:off x="228600" y="3429000"/>
-            <a:ext cx="8686800" cy="1280160"/>
+            <a:off x="228600" y="3749040"/>
+            <a:ext cx="8686800" cy="1005840"/>
           </a:xfrm>
           <a:prstGeom prst="rect">
             <a:avLst/>
@@ -5200,7 +5294,7 @@
               <a:buChar char="❏"/>
             </a:pPr>
             <a:r>
-              <a:rPr lang="en-US" sz="1500" b="1" dirty="0">
+              <a:rPr lang="en-US" sz="1450" b="1" dirty="0">
                 <a:solidFill>
                   <a:schemeClr val="tx1"/>
                 </a:solidFill>
@@ -5208,14 +5302,14 @@
               <a:t>분석 단위</a:t>
             </a:r>
             <a:r>
-              <a:rPr lang="en-US" sz="1500" dirty="0">
+              <a:rPr lang="en-US" sz="1450" dirty="0">
                 <a:solidFill>
                   <a:schemeClr val="tx1"/>
                 </a:solidFill>
               </a:rPr>
               <a:t>: 투수 × 등판. 시간축 = 등판 순번, 등판 간격은 별도 변수</a:t>
             </a:r>
-            <a:endParaRPr lang="en-US" sz="1500" dirty="0"/>
+            <a:endParaRPr lang="en-US" sz="1450" dirty="0"/>
           </a:p>
           <a:p>
             <a:pPr lvl="1" marL="558800" indent="-279400">
@@ -5226,7 +5320,7 @@
               <a:buChar char="❏"/>
             </a:pPr>
             <a:r>
-              <a:rPr lang="en-US" sz="1500" b="1" dirty="0">
+              <a:rPr lang="en-US" sz="1450" b="1" dirty="0">
                 <a:solidFill>
                   <a:schemeClr val="tx1"/>
                 </a:solidFill>
@@ -5234,14 +5328,14 @@
               <a:t>부상 사건</a:t>
             </a:r>
             <a:r>
-              <a:rPr lang="en-US" sz="1500" dirty="0">
+              <a:rPr lang="en-US" sz="1450" dirty="0">
                 <a:solidFill>
                   <a:schemeClr val="tx1"/>
                 </a:solidFill>
               </a:rPr>
               <a:t>: 팔 관련 사유로 IL 등재</a:t>
             </a:r>
-            <a:endParaRPr lang="en-US" sz="1500" dirty="0"/>
+            <a:endParaRPr lang="en-US" sz="1450" dirty="0"/>
           </a:p>
           <a:p>
             <a:pPr lvl="1" marL="558800" indent="-279400">
@@ -5252,7 +5346,7 @@
               <a:buChar char="❏"/>
             </a:pPr>
             <a:r>
-              <a:rPr lang="en-US" sz="1500" dirty="0">
+              <a:rPr lang="en-US" sz="1450" dirty="0">
                 <a:solidFill>
                   <a:schemeClr val="tx1"/>
                 </a:solidFill>
@@ -5260,7 +5354,7 @@
               <a:t>IL 기록은 </a:t>
             </a:r>
             <a:r>
-              <a:rPr lang="en-US" sz="1500" b="1" dirty="0">
+              <a:rPr lang="en-US" sz="1450" b="1" dirty="0">
                 <a:solidFill>
                   <a:schemeClr val="tx1"/>
                 </a:solidFill>
@@ -5268,14 +5362,14 @@
               <a:t>평가에만</a:t>
             </a:r>
             <a:r>
-              <a:rPr lang="en-US" sz="1500" dirty="0">
+              <a:rPr lang="en-US" sz="1450" dirty="0">
                 <a:solidFill>
                   <a:schemeClr val="tx1"/>
                 </a:solidFill>
               </a:rPr>
               <a:t> 쓰고, 학습에는 쓰지 않는다</a:t>
             </a:r>
-            <a:endParaRPr lang="en-US" sz="1500" dirty="0"/>
+            <a:endParaRPr lang="en-US" sz="1450" dirty="0"/>
           </a:p>
         </p:txBody>
       </p:sp>
@@ -5636,8 +5730,8 @@
         </p:nvSpPr>
         <p:spPr>
           <a:xfrm>
-            <a:off x="274320" y="1051560"/>
-            <a:ext cx="960120" cy="749808"/>
+            <a:off x="274320" y="1024128"/>
+            <a:ext cx="1005840" cy="804672"/>
           </a:xfrm>
           <a:prstGeom prst="rect">
             <a:avLst/>
@@ -5647,7 +5741,6 @@
             <a:solidFill>
               <a:srgbClr val="000000"/>
             </a:solidFill>
-            <a:prstDash val="solid"/>
           </a:ln>
         </p:spPr>
         <p:txBody>
@@ -5677,8 +5770,8 @@
         </p:nvSpPr>
         <p:spPr>
           <a:xfrm>
-            <a:off x="1325880" y="1051560"/>
-            <a:ext cx="7543800" cy="749808"/>
+            <a:off x="1371600" y="1024128"/>
+            <a:ext cx="7498080" cy="804672"/>
           </a:xfrm>
           <a:prstGeom prst="rect">
             <a:avLst/>
@@ -5688,7 +5781,6 @@
             <a:solidFill>
               <a:srgbClr val="000000"/>
             </a:solidFill>
-            <a:prstDash val="solid"/>
           </a:ln>
         </p:spPr>
         <p:txBody>
@@ -5718,8 +5810,8 @@
         </p:nvSpPr>
         <p:spPr>
           <a:xfrm>
-            <a:off x="274320" y="1965960"/>
-            <a:ext cx="960120" cy="749808"/>
+            <a:off x="274320" y="1956816"/>
+            <a:ext cx="1005840" cy="804672"/>
           </a:xfrm>
           <a:prstGeom prst="rect">
             <a:avLst/>
@@ -5729,7 +5821,6 @@
             <a:solidFill>
               <a:srgbClr val="000000"/>
             </a:solidFill>
-            <a:prstDash val="solid"/>
           </a:ln>
         </p:spPr>
         <p:txBody>
@@ -5759,8 +5850,8 @@
         </p:nvSpPr>
         <p:spPr>
           <a:xfrm>
-            <a:off x="1325880" y="1965960"/>
-            <a:ext cx="7543800" cy="749808"/>
+            <a:off x="1371600" y="1956816"/>
+            <a:ext cx="7498080" cy="804672"/>
           </a:xfrm>
           <a:prstGeom prst="rect">
             <a:avLst/>
@@ -5770,7 +5861,6 @@
             <a:solidFill>
               <a:srgbClr val="000000"/>
             </a:solidFill>
-            <a:prstDash val="solid"/>
           </a:ln>
         </p:spPr>
         <p:txBody>
@@ -5800,8 +5890,8 @@
         </p:nvSpPr>
         <p:spPr>
           <a:xfrm>
-            <a:off x="274320" y="2880360"/>
-            <a:ext cx="960120" cy="749808"/>
+            <a:off x="274320" y="2889504"/>
+            <a:ext cx="1005840" cy="804672"/>
           </a:xfrm>
           <a:prstGeom prst="rect">
             <a:avLst/>
@@ -5811,7 +5901,6 @@
             <a:solidFill>
               <a:srgbClr val="000000"/>
             </a:solidFill>
-            <a:prstDash val="solid"/>
           </a:ln>
         </p:spPr>
         <p:txBody>
@@ -5841,8 +5930,8 @@
         </p:nvSpPr>
         <p:spPr>
           <a:xfrm>
-            <a:off x="1325880" y="2880360"/>
-            <a:ext cx="7543800" cy="749808"/>
+            <a:off x="1371600" y="2889504"/>
+            <a:ext cx="7498080" cy="804672"/>
           </a:xfrm>
           <a:prstGeom prst="rect">
             <a:avLst/>
@@ -5852,7 +5941,6 @@
             <a:solidFill>
               <a:srgbClr val="000000"/>
             </a:solidFill>
-            <a:prstDash val="solid"/>
           </a:ln>
         </p:spPr>
         <p:txBody>
@@ -5882,8 +5970,8 @@
         </p:nvSpPr>
         <p:spPr>
           <a:xfrm>
-            <a:off x="274320" y="3794760"/>
-            <a:ext cx="960120" cy="749808"/>
+            <a:off x="274320" y="3822192"/>
+            <a:ext cx="1005840" cy="804672"/>
           </a:xfrm>
           <a:prstGeom prst="rect">
             <a:avLst/>
@@ -5893,7 +5981,6 @@
             <a:solidFill>
               <a:srgbClr val="000000"/>
             </a:solidFill>
-            <a:prstDash val="solid"/>
           </a:ln>
         </p:spPr>
         <p:txBody>
@@ -5923,8 +6010,8 @@
         </p:nvSpPr>
         <p:spPr>
           <a:xfrm>
-            <a:off x="1325880" y="3794760"/>
-            <a:ext cx="7543800" cy="749808"/>
+            <a:off x="1371600" y="3822192"/>
+            <a:ext cx="7498080" cy="804672"/>
           </a:xfrm>
           <a:prstGeom prst="rect">
             <a:avLst/>
@@ -5934,7 +6021,6 @@
             <a:solidFill>
               <a:srgbClr val="000000"/>
             </a:solidFill>
-            <a:prstDash val="solid"/>
           </a:ln>
         </p:spPr>
         <p:txBody>
@@ -6313,8 +6399,8 @@
         </p:nvSpPr>
         <p:spPr>
           <a:xfrm>
-            <a:off x="274320" y="1143000"/>
-            <a:ext cx="1828800" cy="2103120"/>
+            <a:off x="274320" y="1051560"/>
+            <a:ext cx="1828800" cy="2240280"/>
           </a:xfrm>
           <a:prstGeom prst="rect">
             <a:avLst/>
@@ -6324,7 +6410,6 @@
             <a:solidFill>
               <a:srgbClr val="000000"/>
             </a:solidFill>
-            <a:prstDash val="solid"/>
           </a:ln>
         </p:spPr>
         <p:txBody>
@@ -6396,8 +6481,8 @@
         </p:nvSpPr>
         <p:spPr>
           <a:xfrm>
-            <a:off x="2139696" y="2048256"/>
-            <a:ext cx="292608" cy="292608"/>
+            <a:off x="2148840" y="2020824"/>
+            <a:ext cx="301752" cy="301752"/>
           </a:xfrm>
           <a:prstGeom prst="rightArrow">
             <a:avLst/>
@@ -6421,8 +6506,8 @@
         </p:nvSpPr>
         <p:spPr>
           <a:xfrm>
-            <a:off x="2468880" y="1143000"/>
-            <a:ext cx="1828800" cy="2103120"/>
+            <a:off x="2496312" y="1051560"/>
+            <a:ext cx="1828800" cy="2240280"/>
           </a:xfrm>
           <a:prstGeom prst="rect">
             <a:avLst/>
@@ -6432,7 +6517,6 @@
             <a:solidFill>
               <a:srgbClr val="000000"/>
             </a:solidFill>
-            <a:prstDash val="solid"/>
           </a:ln>
         </p:spPr>
         <p:txBody>
@@ -6490,8 +6574,8 @@
         </p:nvSpPr>
         <p:spPr>
           <a:xfrm>
-            <a:off x="4334256" y="2048256"/>
-            <a:ext cx="292608" cy="292608"/>
+            <a:off x="4370832" y="2020824"/>
+            <a:ext cx="301752" cy="301752"/>
           </a:xfrm>
           <a:prstGeom prst="rightArrow">
             <a:avLst/>
@@ -6515,8 +6599,8 @@
         </p:nvSpPr>
         <p:spPr>
           <a:xfrm>
-            <a:off x="4663440" y="1143000"/>
-            <a:ext cx="1828800" cy="2103120"/>
+            <a:off x="4718304" y="1051560"/>
+            <a:ext cx="1828800" cy="2240280"/>
           </a:xfrm>
           <a:prstGeom prst="rect">
             <a:avLst/>
@@ -6526,7 +6610,6 @@
             <a:solidFill>
               <a:srgbClr val="000000"/>
             </a:solidFill>
-            <a:prstDash val="solid"/>
           </a:ln>
         </p:spPr>
         <p:txBody>
@@ -6598,8 +6681,8 @@
         </p:nvSpPr>
         <p:spPr>
           <a:xfrm>
-            <a:off x="6528816" y="2048256"/>
-            <a:ext cx="292608" cy="292608"/>
+            <a:off x="6592824" y="2020824"/>
+            <a:ext cx="301752" cy="301752"/>
           </a:xfrm>
           <a:prstGeom prst="rightArrow">
             <a:avLst/>
@@ -6623,8 +6706,8 @@
         </p:nvSpPr>
         <p:spPr>
           <a:xfrm>
-            <a:off x="6858000" y="1143000"/>
-            <a:ext cx="1828800" cy="2103120"/>
+            <a:off x="6940296" y="1051560"/>
+            <a:ext cx="1828800" cy="2240280"/>
           </a:xfrm>
           <a:prstGeom prst="rect">
             <a:avLst/>
@@ -6634,7 +6717,6 @@
             <a:solidFill>
               <a:srgbClr val="000000"/>
             </a:solidFill>
-            <a:prstDash val="solid"/>
           </a:ln>
         </p:spPr>
         <p:txBody>
@@ -6720,8 +6802,8 @@
         </p:nvSpPr>
         <p:spPr>
           <a:xfrm>
-            <a:off x="1828800" y="3520440"/>
-            <a:ext cx="5303520" cy="502920"/>
+            <a:off x="1371600" y="3520440"/>
+            <a:ext cx="6400800" cy="548640"/>
           </a:xfrm>
           <a:prstGeom prst="rect">
             <a:avLst/>
@@ -6731,7 +6813,6 @@
             <a:solidFill>
               <a:srgbClr val="000000"/>
             </a:solidFill>
-            <a:prstDash val="solid"/>
           </a:ln>
         </p:spPr>
         <p:txBody>
@@ -6742,7 +6823,7 @@
               <a:buNone/>
             </a:pPr>
             <a:r>
-              <a:rPr lang="en-US" sz="1200" dirty="0">
+              <a:rPr lang="en-US" sz="1250" dirty="0">
                 <a:solidFill>
                   <a:schemeClr val="tx1"/>
                 </a:solidFill>
@@ -6762,7 +6843,7 @@
         <p:spPr>
           <a:xfrm>
             <a:off x="274320" y="4279392"/>
-            <a:ext cx="8595360" cy="365760"/>
+            <a:ext cx="8595360" cy="411480"/>
           </a:xfrm>
           <a:prstGeom prst="rect">
             <a:avLst/>
@@ -7148,14 +7229,14 @@
       </p:sp>
       <p:sp>
         <p:nvSpPr>
-          <p:cNvPr id="9" name="Split label"/>
+          <p:cNvPr id="9" name="Label 시간 순서 분할"/>
           <p:cNvSpPr txBox="1"/>
           <p:nvPr/>
         </p:nvSpPr>
         <p:spPr>
           <a:xfrm>
-            <a:off x="274320" y="960120"/>
-            <a:ext cx="1371600" cy="365760"/>
+            <a:off x="274320" y="1005840"/>
+            <a:ext cx="1554480" cy="274320"/>
           </a:xfrm>
           <a:prstGeom prst="rect">
             <a:avLst/>
@@ -7171,14 +7252,14 @@
               <a:buNone/>
             </a:pPr>
             <a:r>
-              <a:rPr lang="en-US" sz="1200" b="1" dirty="0">
+              <a:rPr lang="en-US" sz="1300" b="1" dirty="0">
                 <a:solidFill>
                   <a:schemeClr val="tx1"/>
                 </a:solidFill>
               </a:rPr>
               <a:t>시간 순서 분할</a:t>
             </a:r>
-            <a:endParaRPr lang="en-US" sz="1200" dirty="0"/>
+            <a:endParaRPr lang="en-US" sz="1300" dirty="0"/>
           </a:p>
         </p:txBody>
       </p:sp>
@@ -7190,18 +7271,16 @@
         </p:nvSpPr>
         <p:spPr>
           <a:xfrm>
-            <a:off x="1645920" y="960120"/>
-            <a:ext cx="3796912" cy="365760"/>
-          </a:xfrm>
-          <a:prstGeom prst="rect">
-            <a:avLst/>
-          </a:prstGeom>
-          <a:solidFill>
-            <a:srgbClr val="D9D9D9"/>
-          </a:solidFill>
-          <a:ln>
+            <a:off x="1828800" y="987552"/>
+            <a:ext cx="3672661" cy="329184"/>
+          </a:xfrm>
+          <a:prstGeom prst="rect">
+            <a:avLst/>
+          </a:prstGeom>
+          <a:noFill/>
+          <a:ln w="9525">
             <a:solidFill>
-              <a:srgbClr val="D9D9D9"/>
+              <a:srgbClr val="000000"/>
             </a:solidFill>
           </a:ln>
         </p:spPr>
@@ -7213,14 +7292,14 @@
               <a:buNone/>
             </a:pPr>
             <a:r>
-              <a:rPr lang="en-US" sz="1100" b="1" dirty="0">
+              <a:rPr lang="en-US" sz="1150" b="1" dirty="0">
                 <a:solidFill>
                   <a:schemeClr val="tx1"/>
                 </a:solidFill>
               </a:rPr>
               <a:t>학습  2021–2024</a:t>
             </a:r>
-            <a:endParaRPr lang="en-US" sz="1100" dirty="0"/>
+            <a:endParaRPr lang="en-US" sz="1200" dirty="0"/>
           </a:p>
         </p:txBody>
       </p:sp>
@@ -7232,18 +7311,16 @@
         </p:nvSpPr>
         <p:spPr>
           <a:xfrm>
-            <a:off x="5470264" y="960120"/>
-            <a:ext cx="1990972" cy="365760"/>
-          </a:xfrm>
-          <a:prstGeom prst="rect">
-            <a:avLst/>
-          </a:prstGeom>
-          <a:solidFill>
-            <a:srgbClr val="BFBFBF"/>
-          </a:solidFill>
-          <a:ln>
+            <a:off x="5556325" y="987552"/>
+            <a:ext cx="1912441" cy="329184"/>
+          </a:xfrm>
+          <a:prstGeom prst="rect">
+            <a:avLst/>
+          </a:prstGeom>
+          <a:noFill/>
+          <a:ln w="9525">
             <a:solidFill>
-              <a:srgbClr val="BFBFBF"/>
+              <a:srgbClr val="000000"/>
             </a:solidFill>
           </a:ln>
         </p:spPr>
@@ -7255,14 +7332,14 @@
               <a:buNone/>
             </a:pPr>
             <a:r>
-              <a:rPr lang="en-US" sz="1100" b="1" dirty="0">
+              <a:rPr lang="en-US" sz="1150" b="1" dirty="0">
                 <a:solidFill>
                   <a:schemeClr val="tx1"/>
                 </a:solidFill>
               </a:rPr>
               <a:t>검증  2025 (임계값 결정)</a:t>
             </a:r>
-            <a:endParaRPr lang="en-US" sz="1100" dirty="0"/>
+            <a:endParaRPr lang="en-US" sz="1200" dirty="0"/>
           </a:p>
         </p:txBody>
       </p:sp>
@@ -7274,18 +7351,16 @@
         </p:nvSpPr>
         <p:spPr>
           <a:xfrm>
-            <a:off x="7488667" y="960120"/>
-            <a:ext cx="1353581" cy="365760"/>
-          </a:xfrm>
-          <a:prstGeom prst="rect">
-            <a:avLst/>
-          </a:prstGeom>
-          <a:solidFill>
-            <a:srgbClr val="A6A6A6"/>
-          </a:solidFill>
-          <a:ln>
+            <a:off x="7523629" y="987552"/>
+            <a:ext cx="1291187" cy="329184"/>
+          </a:xfrm>
+          <a:prstGeom prst="rect">
+            <a:avLst/>
+          </a:prstGeom>
+          <a:noFill/>
+          <a:ln w="9525">
             <a:solidFill>
-              <a:srgbClr val="A6A6A6"/>
+              <a:srgbClr val="000000"/>
             </a:solidFill>
           </a:ln>
         </p:spPr>
@@ -7297,14 +7372,86 @@
               <a:buNone/>
             </a:pPr>
             <a:r>
-              <a:rPr lang="en-US" sz="1100" b="1" dirty="0">
+              <a:rPr lang="en-US" sz="1150" b="1" dirty="0">
                 <a:solidFill>
                   <a:schemeClr val="tx1"/>
                 </a:solidFill>
               </a:rPr>
               <a:t>테스트  2026</a:t>
             </a:r>
-            <a:endParaRPr lang="en-US" sz="1100" dirty="0"/>
+            <a:endParaRPr lang="en-US" sz="1200" dirty="0"/>
+          </a:p>
+        </p:txBody>
+      </p:sp>
+      <p:sp>
+        <p:nvSpPr>
+          <p:cNvPr id="13" name="Label 모델"/>
+          <p:cNvSpPr txBox="1"/>
+          <p:nvPr/>
+        </p:nvSpPr>
+        <p:spPr>
+          <a:xfrm>
+            <a:off x="274320" y="1463040"/>
+            <a:ext cx="2743200" cy="274320"/>
+          </a:xfrm>
+          <a:prstGeom prst="rect">
+            <a:avLst/>
+          </a:prstGeom>
+          <a:noFill/>
+          <a:ln/>
+        </p:spPr>
+        <p:txBody>
+          <a:bodyPr wrap="square" lIns="0" tIns="0" rIns="0" bIns="0" rtlCol="0" anchor="ctr"/>
+          <a:lstStyle/>
+          <a:p>
+            <a:pPr indent="0" marL="0">
+              <a:buNone/>
+            </a:pPr>
+            <a:r>
+              <a:rPr lang="en-US" sz="1300" b="1" dirty="0">
+                <a:solidFill>
+                  <a:schemeClr val="tx1"/>
+                </a:solidFill>
+              </a:rPr>
+              <a:t>모델</a:t>
+            </a:r>
+            <a:endParaRPr lang="en-US" sz="1300" dirty="0"/>
+          </a:p>
+        </p:txBody>
+      </p:sp>
+      <p:sp>
+        <p:nvSpPr>
+          <p:cNvPr id="14" name="Label 평가 지표"/>
+          <p:cNvSpPr txBox="1"/>
+          <p:nvPr/>
+        </p:nvSpPr>
+        <p:spPr>
+          <a:xfrm>
+            <a:off x="5440680" y="1463040"/>
+            <a:ext cx="2743200" cy="274320"/>
+          </a:xfrm>
+          <a:prstGeom prst="rect">
+            <a:avLst/>
+          </a:prstGeom>
+          <a:noFill/>
+          <a:ln/>
+        </p:spPr>
+        <p:txBody>
+          <a:bodyPr wrap="square" lIns="0" tIns="0" rIns="0" bIns="0" rtlCol="0" anchor="ctr"/>
+          <a:lstStyle/>
+          <a:p>
+            <a:pPr indent="0" marL="0">
+              <a:buNone/>
+            </a:pPr>
+            <a:r>
+              <a:rPr lang="en-US" sz="1300" b="1" dirty="0">
+                <a:solidFill>
+                  <a:schemeClr val="tx1"/>
+                </a:solidFill>
+              </a:rPr>
+              <a:t>평가 지표</a:t>
+            </a:r>
+            <a:endParaRPr lang="en-US" sz="1300" dirty="0"/>
           </a:p>
         </p:txBody>
       </p:sp>
@@ -7323,7 +7470,7 @@
           </p:nvPr>
         </p:nvGraphicFramePr>
         <p:xfrm>
-          <a:off x="274320" y="1508760"/>
+          <a:off x="274320" y="1783080"/>
           <a:ext cx="6858000" cy="914400"/>
         </p:xfrm>
         <a:graphic>
@@ -7331,11 +7478,11 @@
             <a:tbl>
               <a:tblPr/>
               <a:tblGrid>
-                <a:gridCol w="868680"/>
-                <a:gridCol w="1280160"/>
-                <a:gridCol w="2788920"/>
+                <a:gridCol w="914400"/>
+                <a:gridCol w="1325880"/>
+                <a:gridCol w="2743200"/>
               </a:tblGrid>
-              <a:tr h="274320">
+              <a:tr h="292608">
                 <a:tc>
                   <a:txBody>
                     <a:bodyPr/>
@@ -7475,7 +7622,7 @@
                   </a:tcPr>
                 </a:tc>
               </a:tr>
-              <a:tr h="384048">
+              <a:tr h="365760">
                 <a:tc rowSpan="3">
                   <a:txBody>
                     <a:bodyPr/>
@@ -7615,7 +7762,7 @@
                   </a:tcPr>
                 </a:tc>
               </a:tr>
-              <a:tr h="384048">
+              <a:tr h="365760">
                 <a:tc vMerge="1">
                   <a:tcPr/>
                 </a:tc>
@@ -7712,7 +7859,7 @@
                   </a:tcPr>
                 </a:tc>
               </a:tr>
-              <a:tr h="384048">
+              <a:tr h="365760">
                 <a:tc vMerge="1">
                   <a:tcPr/>
                 </a:tc>
@@ -7809,7 +7956,7 @@
                   </a:tcPr>
                 </a:tc>
               </a:tr>
-              <a:tr h="384048">
+              <a:tr h="365760">
                 <a:tc rowSpan="2">
                   <a:txBody>
                     <a:bodyPr/>
@@ -8046,7 +8193,7 @@
                   </a:tcPr>
                 </a:tc>
               </a:tr>
-              <a:tr h="384048">
+              <a:tr h="365760">
                 <a:tc>
                   <a:txBody>
                     <a:bodyPr/>
@@ -8186,7 +8333,7 @@
                   </a:tcPr>
                 </a:tc>
               </a:tr>
-              <a:tr h="384048">
+              <a:tr h="365760">
                 <a:tc>
                   <a:txBody>
                     <a:bodyPr/>
@@ -8345,7 +8492,7 @@
           </p:nvPr>
         </p:nvGraphicFramePr>
         <p:xfrm>
-          <a:off x="5440680" y="1508760"/>
+          <a:off x="5440680" y="1783080"/>
           <a:ext cx="6858000" cy="914400"/>
         </p:xfrm>
         <a:graphic>
@@ -8353,10 +8500,10 @@
             <a:tbl>
               <a:tblPr/>
               <a:tblGrid>
-                <a:gridCol w="868680"/>
-                <a:gridCol w="2560320"/>
+                <a:gridCol w="960120"/>
+                <a:gridCol w="2468880"/>
               </a:tblGrid>
-              <a:tr h="274320">
+              <a:tr h="292608">
                 <a:tc>
                   <a:txBody>
                     <a:bodyPr/>
@@ -8450,7 +8597,7 @@
                   </a:tcPr>
                 </a:tc>
               </a:tr>
-              <a:tr h="566928">
+              <a:tr h="640080">
                 <a:tc>
                   <a:txBody>
                     <a:bodyPr/>
@@ -8544,7 +8691,7 @@
                   </a:tcPr>
                 </a:tc>
               </a:tr>
-              <a:tr h="502920">
+              <a:tr h="548640">
                 <a:tc>
                   <a:txBody>
                     <a:bodyPr/>
@@ -8638,7 +8785,7 @@
                   </a:tcPr>
                 </a:tc>
               </a:tr>
-              <a:tr h="502920">
+              <a:tr h="548640">
                 <a:tc>
                   <a:txBody>
                     <a:bodyPr/>
@@ -8732,7 +8879,7 @@
                   </a:tcPr>
                 </a:tc>
               </a:tr>
-              <a:tr h="384048">
+              <a:tr h="411480">
                 <a:tc>
                   <a:txBody>
                     <a:bodyPr/>
@@ -8826,7 +8973,7 @@
                   </a:tcPr>
                 </a:tc>
               </a:tr>
-              <a:tr h="384048">
+              <a:tr h="411480">
                 <a:tc>
                   <a:txBody>
                     <a:bodyPr/>
@@ -9290,7 +9437,7 @@
         <p:spPr>
           <a:xfrm>
             <a:off x="274320" y="941832"/>
-            <a:ext cx="4160520" cy="2532888"/>
+            <a:ext cx="4206240" cy="2560320"/>
           </a:xfrm>
           <a:prstGeom prst="rect">
             <a:avLst/>
@@ -9313,8 +9460,8 @@
         </p:blipFill>
         <p:spPr>
           <a:xfrm>
-            <a:off x="4709160" y="941832"/>
-            <a:ext cx="4160520" cy="2532888"/>
+            <a:off x="4663440" y="941832"/>
+            <a:ext cx="4206240" cy="2560320"/>
           </a:xfrm>
           <a:prstGeom prst="rect">
             <a:avLst/>
@@ -9329,7 +9476,7 @@
         </p:nvSpPr>
         <p:spPr>
           <a:xfrm>
-            <a:off x="274320" y="3493008"/>
+            <a:off x="274320" y="3529584"/>
             <a:ext cx="8595360" cy="201168"/>
           </a:xfrm>
           <a:prstGeom prst="rect">
@@ -9365,8 +9512,8 @@
         </p:nvSpPr>
         <p:spPr>
           <a:xfrm>
-            <a:off x="228600" y="3749040"/>
-            <a:ext cx="8686800" cy="1005840"/>
+            <a:off x="228600" y="3794760"/>
+            <a:ext cx="8686800" cy="960120"/>
           </a:xfrm>
           <a:prstGeom prst="rect">
             <a:avLst/>
@@ -9813,7 +9960,7 @@
         <p:spPr>
           <a:xfrm>
             <a:off x="274320" y="914400"/>
-            <a:ext cx="4087368" cy="3127248"/>
+            <a:ext cx="4800600" cy="3200400"/>
           </a:xfrm>
           <a:prstGeom prst="rect">
             <a:avLst/>
@@ -9836,8 +9983,8 @@
         </p:blipFill>
         <p:spPr>
           <a:xfrm>
-            <a:off x="4526280" y="914400"/>
-            <a:ext cx="3337560" cy="3127248"/>
+            <a:off x="5212080" y="914400"/>
+            <a:ext cx="3657600" cy="3200400"/>
           </a:xfrm>
           <a:prstGeom prst="rect">
             <a:avLst/>
@@ -9846,92 +9993,14 @@
       </p:pic>
       <p:sp>
         <p:nvSpPr>
-          <p:cNvPr id="11" name="Share callout"/>
+          <p:cNvPr id="11" name="Bullets"/>
           <p:cNvSpPr txBox="1"/>
           <p:nvPr/>
         </p:nvSpPr>
         <p:spPr>
           <a:xfrm>
-            <a:off x="7909560" y="1463040"/>
-            <a:ext cx="1051560" cy="1463040"/>
-          </a:xfrm>
-          <a:prstGeom prst="rect">
-            <a:avLst/>
-          </a:prstGeom>
-          <a:noFill/>
-          <a:ln/>
-        </p:spPr>
-        <p:txBody>
-          <a:bodyPr wrap="square" lIns="0" tIns="0" rIns="0" bIns="0" rtlCol="0" anchor="ctr"/>
-          <a:lstStyle/>
-          <a:p>
-            <a:pPr algn="ctr" indent="0" marL="0">
-              <a:buNone/>
-            </a:pPr>
-            <a:r>
-              <a:rPr lang="en-US" sz="1200" b="1" dirty="0">
-                <a:solidFill>
-                  <a:schemeClr val="tx1"/>
-                </a:solidFill>
-              </a:rPr>
-              <a:t>어깨·팔꿈치</a:t>
-            </a:r>
-            <a:endParaRPr lang="en-US" sz="1200" dirty="0"/>
-          </a:p>
-          <a:p>
-            <a:pPr algn="ctr" indent="0" marL="0">
-              <a:buNone/>
-            </a:pPr>
-            <a:r>
-              <a:rPr lang="en-US" sz="2400" b="1" dirty="0">
-                <a:solidFill>
-                  <a:schemeClr val="tx1"/>
-                </a:solidFill>
-              </a:rPr>
-              <a:t>33.7%</a:t>
-            </a:r>
-            <a:endParaRPr lang="en-US" sz="1200" dirty="0"/>
-          </a:p>
-          <a:p>
-            <a:pPr algn="ctr" indent="0" marL="0">
-              <a:buNone/>
-            </a:pPr>
-            <a:r>
-              <a:rPr lang="en-US" sz="1050" dirty="0">
-                <a:solidFill>
-                  <a:schemeClr val="accent5"/>
-                </a:solidFill>
-              </a:rPr>
-              <a:t>전체 IL 등재 중</a:t>
-            </a:r>
-            <a:endParaRPr lang="en-US" sz="1200" dirty="0"/>
-          </a:p>
-          <a:p>
-            <a:pPr algn="ctr" indent="0" marL="0">
-              <a:buNone/>
-            </a:pPr>
-            <a:r>
-              <a:rPr lang="en-US" sz="1050" dirty="0">
-                <a:solidFill>
-                  <a:schemeClr val="accent5"/>
-                </a:solidFill>
-              </a:rPr>
-              <a:t>(584 + 529건)</a:t>
-            </a:r>
-            <a:endParaRPr lang="en-US" sz="1200" dirty="0"/>
-          </a:p>
-        </p:txBody>
-      </p:sp>
-      <p:sp>
-        <p:nvSpPr>
-          <p:cNvPr id="12" name="Bullets"/>
-          <p:cNvSpPr txBox="1"/>
-          <p:nvPr/>
-        </p:nvSpPr>
-        <p:spPr>
-          <a:xfrm>
-            <a:off x="228600" y="4096512"/>
-            <a:ext cx="8686800" cy="685800"/>
+            <a:off x="228600" y="4178808"/>
+            <a:ext cx="8686800" cy="603504"/>
           </a:xfrm>
           <a:prstGeom prst="rect">
             <a:avLst/>
@@ -10384,7 +10453,7 @@
           </p:nvPr>
         </p:nvGraphicFramePr>
         <p:xfrm>
-          <a:off x="6080760" y="1051560"/>
+          <a:off x="6035040" y="1545336"/>
           <a:ext cx="6858000" cy="914400"/>
         </p:xfrm>
         <a:graphic>
@@ -10392,11 +10461,11 @@
             <a:tbl>
               <a:tblPr/>
               <a:tblGrid>
-                <a:gridCol w="1051560"/>
+                <a:gridCol w="1005840"/>
                 <a:gridCol w="868680"/>
-                <a:gridCol w="868680"/>
+                <a:gridCol w="960120"/>
               </a:tblGrid>
-              <a:tr h="301752">
+              <a:tr h="310896">
                 <a:tc>
                   <a:txBody>
                     <a:bodyPr/>
@@ -10406,14 +10475,14 @@
                         <a:buNone/>
                       </a:pPr>
                       <a:r>
-                        <a:rPr lang="en-US" sz="1100" b="1" dirty="0">
+                        <a:rPr lang="en-US" sz="1150" b="1" dirty="0">
                           <a:solidFill>
                             <a:schemeClr val="tx1"/>
                           </a:solidFill>
                         </a:rPr>
                         <a:t>사건 수</a:t>
                       </a:r>
-                      <a:endParaRPr lang="en-US" sz="1100" dirty="0"/>
+                      <a:endParaRPr lang="en-US" sz="1150" dirty="0"/>
                     </a:p>
                   </a:txBody>
                   <a:tcPr marL="54864" marR="54864" marT="54864" marB="54864" anchor="ctr">
@@ -10452,14 +10521,14 @@
                         <a:buNone/>
                       </a:pPr>
                       <a:r>
-                        <a:rPr lang="en-US" sz="1100" b="1" dirty="0">
+                        <a:rPr lang="en-US" sz="1150" b="1" dirty="0">
                           <a:solidFill>
                             <a:schemeClr val="tx1"/>
                           </a:solidFill>
                         </a:rPr>
                         <a:t>전체 IL</a:t>
                       </a:r>
-                      <a:endParaRPr lang="en-US" sz="1100" dirty="0"/>
+                      <a:endParaRPr lang="en-US" sz="1150" dirty="0"/>
                     </a:p>
                   </a:txBody>
                   <a:tcPr marL="54864" marR="54864" marT="54864" marB="54864" anchor="ctr">
@@ -10498,14 +10567,14 @@
                         <a:buNone/>
                       </a:pPr>
                       <a:r>
-                        <a:rPr lang="en-US" sz="1100" b="1" dirty="0">
+                        <a:rPr lang="en-US" sz="1150" b="1" dirty="0">
                           <a:solidFill>
                             <a:schemeClr val="tx1"/>
                           </a:solidFill>
                         </a:rPr>
                         <a:t>팔 관련</a:t>
                       </a:r>
-                      <a:endParaRPr lang="en-US" sz="1100" dirty="0"/>
+                      <a:endParaRPr lang="en-US" sz="1150" dirty="0"/>
                     </a:p>
                   </a:txBody>
                   <a:tcPr marL="54864" marR="54864" marT="54864" marB="54864" anchor="ctr">
@@ -10536,7 +10605,7 @@
                   </a:tcPr>
                 </a:tc>
               </a:tr>
-              <a:tr h="301752">
+              <a:tr h="310896">
                 <a:tc>
                   <a:txBody>
                     <a:bodyPr/>
@@ -10546,14 +10615,14 @@
                         <a:buNone/>
                       </a:pPr>
                       <a:r>
-                        <a:rPr lang="en-US" sz="1100" b="1" dirty="0">
+                        <a:rPr lang="en-US" sz="1150" b="1" dirty="0">
                           <a:solidFill>
                             <a:schemeClr val="tx1"/>
                           </a:solidFill>
                         </a:rPr>
                         <a:t>직전 1등판</a:t>
                       </a:r>
-                      <a:endParaRPr lang="en-US" sz="1100" dirty="0"/>
+                      <a:endParaRPr lang="en-US" sz="1150" dirty="0"/>
                     </a:p>
                   </a:txBody>
                   <a:tcPr marL="54864" marR="54864" marT="54864" marB="54864" anchor="ctr">
@@ -10592,14 +10661,14 @@
                         <a:buNone/>
                       </a:pPr>
                       <a:r>
-                        <a:rPr lang="en-US" sz="1100" dirty="0">
+                        <a:rPr lang="en-US" sz="1150" dirty="0">
                           <a:solidFill>
                             <a:schemeClr val="tx1"/>
                           </a:solidFill>
                         </a:rPr>
                         <a:t>1,479</a:t>
                       </a:r>
-                      <a:endParaRPr lang="en-US" sz="1100" dirty="0"/>
+                      <a:endParaRPr lang="en-US" sz="1150" dirty="0"/>
                     </a:p>
                   </a:txBody>
                   <a:tcPr marL="54864" marR="54864" marT="54864" marB="54864" anchor="ctr">
@@ -10638,14 +10707,14 @@
                         <a:buNone/>
                       </a:pPr>
                       <a:r>
-                        <a:rPr lang="en-US" sz="1100" dirty="0">
+                        <a:rPr lang="en-US" sz="1150" dirty="0">
                           <a:solidFill>
                             <a:schemeClr val="tx1"/>
                           </a:solidFill>
                         </a:rPr>
                         <a:t>663</a:t>
                       </a:r>
-                      <a:endParaRPr lang="en-US" sz="1100" dirty="0"/>
+                      <a:endParaRPr lang="en-US" sz="1150" dirty="0"/>
                     </a:p>
                   </a:txBody>
                   <a:tcPr marL="54864" marR="54864" marT="54864" marB="54864" anchor="ctr">
@@ -10676,7 +10745,7 @@
                   </a:tcPr>
                 </a:tc>
               </a:tr>
-              <a:tr h="301752">
+              <a:tr h="310896">
                 <a:tc>
                   <a:txBody>
                     <a:bodyPr/>
@@ -10686,14 +10755,14 @@
                         <a:buNone/>
                       </a:pPr>
                       <a:r>
-                        <a:rPr lang="en-US" sz="1100" b="1" dirty="0">
+                        <a:rPr lang="en-US" sz="1150" b="1" dirty="0">
                           <a:solidFill>
                             <a:schemeClr val="tx1"/>
                           </a:solidFill>
                         </a:rPr>
                         <a:t>직전 3등판</a:t>
                       </a:r>
-                      <a:endParaRPr lang="en-US" sz="1100" dirty="0"/>
+                      <a:endParaRPr lang="en-US" sz="1150" dirty="0"/>
                     </a:p>
                   </a:txBody>
                   <a:tcPr marL="54864" marR="54864" marT="54864" marB="54864" anchor="ctr">
@@ -10732,14 +10801,14 @@
                         <a:buNone/>
                       </a:pPr>
                       <a:r>
-                        <a:rPr lang="en-US" sz="1100" dirty="0">
+                        <a:rPr lang="en-US" sz="1150" dirty="0">
                           <a:solidFill>
                             <a:schemeClr val="tx1"/>
                           </a:solidFill>
                         </a:rPr>
                         <a:t>1,066</a:t>
                       </a:r>
-                      <a:endParaRPr lang="en-US" sz="1100" dirty="0"/>
+                      <a:endParaRPr lang="en-US" sz="1150" dirty="0"/>
                     </a:p>
                   </a:txBody>
                   <a:tcPr marL="54864" marR="54864" marT="54864" marB="54864" anchor="ctr">
@@ -10778,14 +10847,14 @@
                         <a:buNone/>
                       </a:pPr>
                       <a:r>
-                        <a:rPr lang="en-US" sz="1100" dirty="0">
+                        <a:rPr lang="en-US" sz="1150" dirty="0">
                           <a:solidFill>
                             <a:schemeClr val="tx1"/>
                           </a:solidFill>
                         </a:rPr>
                         <a:t>460</a:t>
                       </a:r>
-                      <a:endParaRPr lang="en-US" sz="1100" dirty="0"/>
+                      <a:endParaRPr lang="en-US" sz="1150" dirty="0"/>
                     </a:p>
                   </a:txBody>
                   <a:tcPr marL="54864" marR="54864" marT="54864" marB="54864" anchor="ctr">
@@ -10816,7 +10885,7 @@
                   </a:tcPr>
                 </a:tc>
               </a:tr>
-              <a:tr h="301752">
+              <a:tr h="310896">
                 <a:tc>
                   <a:txBody>
                     <a:bodyPr/>
@@ -10826,14 +10895,14 @@
                         <a:buNone/>
                       </a:pPr>
                       <a:r>
-                        <a:rPr lang="en-US" sz="1100" b="1" dirty="0">
+                        <a:rPr lang="en-US" sz="1150" b="1" dirty="0">
                           <a:solidFill>
                             <a:schemeClr val="tx1"/>
                           </a:solidFill>
                         </a:rPr>
                         <a:t>직전 5등판</a:t>
                       </a:r>
-                      <a:endParaRPr lang="en-US" sz="1100" dirty="0"/>
+                      <a:endParaRPr lang="en-US" sz="1150" dirty="0"/>
                     </a:p>
                   </a:txBody>
                   <a:tcPr marL="54864" marR="54864" marT="54864" marB="54864" anchor="ctr">
@@ -10872,14 +10941,14 @@
                         <a:buNone/>
                       </a:pPr>
                       <a:r>
-                        <a:rPr lang="en-US" sz="1100" dirty="0">
+                        <a:rPr lang="en-US" sz="1150" dirty="0">
                           <a:solidFill>
                             <a:schemeClr val="tx1"/>
                           </a:solidFill>
                         </a:rPr>
                         <a:t>786</a:t>
                       </a:r>
-                      <a:endParaRPr lang="en-US" sz="1100" dirty="0"/>
+                      <a:endParaRPr lang="en-US" sz="1150" dirty="0"/>
                     </a:p>
                   </a:txBody>
                   <a:tcPr marL="54864" marR="54864" marT="54864" marB="54864" anchor="ctr">
@@ -10918,14 +10987,14 @@
                         <a:buNone/>
                       </a:pPr>
                       <a:r>
-                        <a:rPr lang="en-US" sz="1100" dirty="0">
+                        <a:rPr lang="en-US" sz="1150" dirty="0">
                           <a:solidFill>
                             <a:schemeClr val="tx1"/>
                           </a:solidFill>
                         </a:rPr>
                         <a:t>329</a:t>
                       </a:r>
-                      <a:endParaRPr lang="en-US" sz="1100" dirty="0"/>
+                      <a:endParaRPr lang="en-US" sz="1150" dirty="0"/>
                     </a:p>
                   </a:txBody>
                   <a:tcPr marL="54864" marR="54864" marT="54864" marB="54864" anchor="ctr">
@@ -10962,104 +11031,12 @@
       </p:graphicFrame>
       <p:sp>
         <p:nvSpPr>
-          <p:cNvPr id="11" name="Key diff"/>
+          <p:cNvPr id="11" name="Caption"/>
           <p:cNvSpPr txBox="1"/>
           <p:nvPr/>
         </p:nvSpPr>
         <p:spPr>
           <a:xfrm>
-            <a:off x="6080760" y="2377440"/>
-            <a:ext cx="2788920" cy="1143000"/>
-          </a:xfrm>
-          <a:prstGeom prst="rect">
-            <a:avLst/>
-          </a:prstGeom>
-          <a:noFill/>
-          <a:ln/>
-        </p:spPr>
-        <p:txBody>
-          <a:bodyPr wrap="square" lIns="0" tIns="0" rIns="0" bIns="0" rtlCol="0" anchor="ctr"/>
-          <a:lstStyle/>
-          <a:p>
-            <a:pPr algn="ctr" indent="0" marL="0">
-              <a:buNone/>
-            </a:pPr>
-            <a:r>
-              <a:rPr lang="en-US" sz="1100" b="1" dirty="0">
-                <a:solidFill>
-                  <a:schemeClr val="tx1"/>
-                </a:solidFill>
-              </a:rPr>
-              <a:t>직전 1등판 − 이전 등판</a:t>
-            </a:r>
-            <a:endParaRPr lang="en-US" sz="1100" dirty="0"/>
-          </a:p>
-          <a:p>
-            <a:pPr algn="ctr" indent="0" marL="0">
-              <a:buNone/>
-            </a:pPr>
-            <a:r>
-              <a:rPr lang="en-US" sz="1300" b="1" dirty="0">
-                <a:solidFill>
-                  <a:schemeClr val="tx1"/>
-                </a:solidFill>
-              </a:rPr>
-              <a:t>전체 IL  −0.26 mph</a:t>
-            </a:r>
-            <a:endParaRPr lang="en-US" sz="1100" dirty="0"/>
-          </a:p>
-          <a:p>
-            <a:pPr algn="ctr" indent="0" marL="0">
-              <a:buNone/>
-            </a:pPr>
-            <a:r>
-              <a:rPr lang="en-US" sz="1000" dirty="0">
-                <a:solidFill>
-                  <a:schemeClr val="accent5"/>
-                </a:solidFill>
-              </a:rPr>
-              <a:t>[95% CI −0.31, −0.22]</a:t>
-            </a:r>
-            <a:endParaRPr lang="en-US" sz="1100" dirty="0"/>
-          </a:p>
-          <a:p>
-            <a:pPr algn="ctr" indent="0" marL="0">
-              <a:buNone/>
-            </a:pPr>
-            <a:r>
-              <a:rPr lang="en-US" sz="1300" b="1" dirty="0">
-                <a:solidFill>
-                  <a:schemeClr val="tx1"/>
-                </a:solidFill>
-              </a:rPr>
-              <a:t>팔 관련  −0.37 mph</a:t>
-            </a:r>
-            <a:endParaRPr lang="en-US" sz="1100" dirty="0"/>
-          </a:p>
-          <a:p>
-            <a:pPr algn="ctr" indent="0" marL="0">
-              <a:buNone/>
-            </a:pPr>
-            <a:r>
-              <a:rPr lang="en-US" sz="1000" dirty="0">
-                <a:solidFill>
-                  <a:schemeClr val="accent5"/>
-                </a:solidFill>
-              </a:rPr>
-              <a:t>[95% CI −0.45, −0.30]</a:t>
-            </a:r>
-            <a:endParaRPr lang="en-US" sz="1100" dirty="0"/>
-          </a:p>
-        </p:txBody>
-      </p:sp>
-      <p:sp>
-        <p:nvSpPr>
-          <p:cNvPr id="12" name="Caption"/>
-          <p:cNvSpPr txBox="1"/>
-          <p:nvPr/>
-        </p:nvSpPr>
-        <p:spPr>
-          <a:xfrm>
             <a:off x="182880" y="3456432"/>
             <a:ext cx="8778240" cy="201168"/>
           </a:xfrm>
@@ -11090,7 +11067,7 @@
       </p:sp>
       <p:sp>
         <p:nvSpPr>
-          <p:cNvPr id="13" name="Bullets"/>
+          <p:cNvPr id="12" name="Bullets"/>
           <p:cNvSpPr txBox="1"/>
           <p:nvPr/>
         </p:nvSpPr>
@@ -11148,7 +11125,7 @@
                   <a:schemeClr val="tx1"/>
                 </a:solidFill>
               </a:rPr>
-              <a:t>직전 1등판에서 가장 크게 떨어지고, N이 커질수록 차이가 줄어든다. 팔 관련 IL이 모든 구간에서 더 크게 하락</a:t>
+              <a:t>직전 1등판에서 가장 크게 떨어지고 (전체 −0.26, 팔 관련 −0.37 mph), N이 커질수록 차이가 줄어든다. 팔 관련 IL이 모든 구간에서 더 크게 하락</a:t>
             </a:r>
             <a:endParaRPr lang="en-US" sz="1300" dirty="0"/>
           </a:p>
@@ -11537,8 +11514,8 @@
         </p:blipFill>
         <p:spPr>
           <a:xfrm>
-            <a:off x="274320" y="932688"/>
-            <a:ext cx="4160520" cy="2487168"/>
+            <a:off x="274320" y="914400"/>
+            <a:ext cx="4206240" cy="2743200"/>
           </a:xfrm>
           <a:prstGeom prst="rect">
             <a:avLst/>
@@ -11561,8 +11538,8 @@
         </p:blipFill>
         <p:spPr>
           <a:xfrm>
-            <a:off x="4709160" y="932688"/>
-            <a:ext cx="4160520" cy="2487168"/>
+            <a:off x="4663440" y="914400"/>
+            <a:ext cx="4206240" cy="2743200"/>
           </a:xfrm>
           <a:prstGeom prst="rect">
             <a:avLst/>
@@ -11577,7 +11554,7 @@
         </p:nvSpPr>
         <p:spPr>
           <a:xfrm>
-            <a:off x="182880" y="3447288"/>
+            <a:off x="182880" y="3703320"/>
             <a:ext cx="8778240" cy="201168"/>
           </a:xfrm>
           <a:prstGeom prst="rect">
@@ -11613,8 +11590,8 @@
         </p:nvSpPr>
         <p:spPr>
           <a:xfrm>
-            <a:off x="228600" y="3749040"/>
-            <a:ext cx="8686800" cy="1005840"/>
+            <a:off x="228600" y="4005072"/>
+            <a:ext cx="8686800" cy="777240"/>
           </a:xfrm>
           <a:prstGeom prst="rect">
             <a:avLst/>
@@ -12044,8 +12021,8 @@
         </p:blipFill>
         <p:spPr>
           <a:xfrm>
-            <a:off x="228600" y="914400"/>
-            <a:ext cx="5669280" cy="3191256"/>
+            <a:off x="274320" y="914400"/>
+            <a:ext cx="5760720" cy="3374136"/>
           </a:xfrm>
           <a:prstGeom prst="rect">
             <a:avLst/>
@@ -12060,8 +12037,8 @@
         </p:nvSpPr>
         <p:spPr>
           <a:xfrm>
-            <a:off x="228600" y="4133088"/>
-            <a:ext cx="5669280" cy="201168"/>
+            <a:off x="274320" y="4343400"/>
+            <a:ext cx="5760720" cy="201168"/>
           </a:xfrm>
           <a:prstGeom prst="rect">
             <a:avLst/>
@@ -12096,8 +12073,8 @@
         </p:nvSpPr>
         <p:spPr>
           <a:xfrm>
-            <a:off x="6080760" y="1005840"/>
-            <a:ext cx="2834640" cy="3017520"/>
+            <a:off x="6263640" y="914400"/>
+            <a:ext cx="2606040" cy="3383280"/>
           </a:xfrm>
           <a:prstGeom prst="rect">
             <a:avLst/>
@@ -12106,36 +12083,36 @@
           <a:ln/>
         </p:spPr>
         <p:txBody>
-          <a:bodyPr wrap="square" lIns="0" tIns="0" rIns="0" bIns="0" rtlCol="0" anchor="t"/>
+          <a:bodyPr wrap="square" lIns="0" tIns="0" rIns="0" bIns="0" rtlCol="0" anchor="ctr"/>
           <a:lstStyle/>
           <a:p>
             <a:pPr lvl="1" marL="558800" indent="-279400">
               <a:spcBef>
-                <a:spcPts val="300"/>
+                <a:spcPts val="1200"/>
               </a:spcBef>
               <a:buSzPct val="100000"/>
               <a:buChar char="❏"/>
             </a:pPr>
             <a:r>
-              <a:rPr lang="en-US" sz="1300" dirty="0">
+              <a:rPr lang="en-US" sz="1400" dirty="0">
                 <a:solidFill>
                   <a:schemeClr val="tx1"/>
                 </a:solidFill>
               </a:rPr>
               <a:t>투수 집단끼리 비교: 연도·투구손별 평균 구속보다 빠른가 느린가</a:t>
             </a:r>
-            <a:endParaRPr lang="en-US" sz="1300" dirty="0"/>
+            <a:endParaRPr lang="en-US" sz="1400" dirty="0"/>
           </a:p>
           <a:p>
             <a:pPr lvl="1" marL="558800" indent="-279400">
               <a:spcBef>
-                <a:spcPts val="300"/>
+                <a:spcPts val="1200"/>
               </a:spcBef>
               <a:buSzPct val="100000"/>
               <a:buChar char="❏"/>
             </a:pPr>
             <a:r>
-              <a:rPr lang="en-US" sz="1300" dirty="0">
+              <a:rPr lang="en-US" sz="1400" dirty="0">
                 <a:solidFill>
                   <a:schemeClr val="tx1"/>
                 </a:solidFill>
@@ -12143,7 +12120,7 @@
               <a:t>빠른 집단이 더 높은 경우는 </a:t>
             </a:r>
             <a:r>
-              <a:rPr lang="en-US" sz="1300" b="1" dirty="0">
+              <a:rPr lang="en-US" sz="1400" b="1" dirty="0">
                 <a:solidFill>
                   <a:schemeClr val="tx1"/>
                 </a:solidFill>
@@ -12151,14 +12128,14 @@
               <a:t>24개 조합 중 12개</a:t>
             </a:r>
             <a:r>
-              <a:rPr lang="en-US" sz="1300" dirty="0">
+              <a:rPr lang="en-US" sz="1400" dirty="0">
                 <a:solidFill>
                   <a:schemeClr val="tx1"/>
                 </a:solidFill>
               </a:rPr>
               <a:t>. 방향이 일관되지 않다</a:t>
             </a:r>
-            <a:endParaRPr lang="en-US" sz="1300" dirty="0"/>
+            <a:endParaRPr lang="en-US" sz="1400" dirty="0"/>
           </a:p>
         </p:txBody>
       </p:sp>
@@ -12207,6 +12184,163 @@
               <a:t>18</a:t>
             </a:fld>
             <a:endParaRPr lang="en-US"/>
+          </a:p>
+        </p:txBody>
+      </p:sp>
+    </p:spTree>
+  </p:cSld>
+  <p:clrMapOvr>
+    <a:masterClrMapping/>
+  </p:clrMapOvr>
+</p:sld>
+</file>
+
+<file path=ppt/slides/slide19.xml><?xml version="1.0" encoding="utf-8"?>
+<p:sld xmlns:a="http://schemas.openxmlformats.org/drawingml/2006/main" xmlns:r="http://schemas.openxmlformats.org/officeDocument/2006/relationships" xmlns:p="http://schemas.openxmlformats.org/presentationml/2006/main">
+  <p:cSld name="Slide 19">
+    <p:spTree>
+      <p:nvGrpSpPr>
+        <p:cNvPr id="1" name=""/>
+        <p:cNvGrpSpPr/>
+        <p:nvPr/>
+      </p:nvGrpSpPr>
+      <p:grpSpPr>
+        <a:xfrm>
+          <a:off x="0" y="0"/>
+          <a:ext cx="0" cy="0"/>
+          <a:chOff x="0" y="0"/>
+          <a:chExt cx="0" cy="0"/>
+        </a:xfrm>
+      </p:grpSpPr>
+      <p:sp>
+        <p:nvSpPr>
+          <p:cNvPr id="2" name="Text 0"/>
+          <p:cNvSpPr/>
+          <p:nvPr>
+            <p:ph idx="105" type="title" hasCustomPrompt="1"/>
+          </p:nvPr>
+        </p:nvSpPr>
+        <p:spPr>
+          <a:xfrm>
+            <a:off x="457200" y="1417320"/>
+            <a:ext cx="8229600" cy="1143000"/>
+          </a:xfrm>
+          <a:prstGeom prst="rect">
+            <a:avLst/>
+          </a:prstGeom>
+          <a:noFill/>
+          <a:ln/>
+        </p:spPr>
+        <p:txBody>
+          <a:bodyPr wrap="square" lIns="0" tIns="0" rIns="0" bIns="0" rtlCol="0" anchor="ctr"/>
+          <a:lstStyle/>
+          <a:p>
+            <a:pPr algn="ctr" indent="0" marL="0">
+              <a:buNone/>
+            </a:pPr>
+            <a:r>
+              <a:rPr lang="en-US" sz="3200" b="1" dirty="0">
+                <a:solidFill>
+                  <a:schemeClr val="tx1"/>
+                </a:solidFill>
+              </a:rPr>
+              <a:t>감사합니다</a:t>
+            </a:r>
+            <a:endParaRPr lang="en-US" sz="3200" dirty="0"/>
+          </a:p>
+          <a:p>
+            <a:pPr algn="ctr" indent="0" marL="0">
+              <a:buNone/>
+            </a:pPr>
+            <a:r>
+              <a:rPr lang="en-US" sz="2200" b="1" dirty="0">
+                <a:solidFill>
+                  <a:schemeClr val="tx1"/>
+                </a:solidFill>
+              </a:rPr>
+              <a:t>Thank you</a:t>
+            </a:r>
+            <a:endParaRPr lang="en-US" sz="3200" dirty="0"/>
+          </a:p>
+        </p:txBody>
+      </p:sp>
+      <p:sp>
+        <p:nvSpPr>
+          <p:cNvPr id="3" name="Text 0"/>
+          <p:cNvSpPr/>
+          <p:nvPr>
+            <p:ph idx="106" type="body" hasCustomPrompt="1"/>
+          </p:nvPr>
+        </p:nvSpPr>
+        <p:spPr>
+          <a:xfrm>
+            <a:off x="914400" y="3063240"/>
+            <a:ext cx="7315200" cy="1737360"/>
+          </a:xfrm>
+          <a:prstGeom prst="rect">
+            <a:avLst/>
+          </a:prstGeom>
+          <a:noFill/>
+          <a:ln/>
+        </p:spPr>
+        <p:txBody>
+          <a:bodyPr wrap="square" lIns="0" tIns="0" rIns="0" bIns="0" rtlCol="0" anchor="t"/>
+          <a:lstStyle/>
+          <a:p>
+            <a:pPr algn="ctr" indent="0" marL="0">
+              <a:buNone/>
+            </a:pPr>
+            <a:r>
+              <a:rPr lang="en-US" sz="1800" b="1" dirty="0">
+                <a:solidFill>
+                  <a:schemeClr val="tx1"/>
+                </a:solidFill>
+              </a:rPr>
+              <a:t>Q &amp; A</a:t>
+            </a:r>
+            <a:endParaRPr lang="en-US" sz="1500" dirty="0"/>
+          </a:p>
+          <a:p>
+            <a:pPr algn="ctr" indent="0" marL="0">
+              <a:buNone/>
+            </a:pPr>
+            <a:r>
+              <a:rPr lang="en-US" sz="1200" dirty="0">
+                <a:solidFill>
+                  <a:schemeClr val="tx1"/>
+                </a:solidFill>
+              </a:rPr>
+              <a:t> </a:t>
+            </a:r>
+            <a:endParaRPr lang="en-US" sz="1500" dirty="0"/>
+          </a:p>
+          <a:p>
+            <a:pPr algn="ctr" indent="0" marL="0">
+              <a:buNone/>
+            </a:pPr>
+            <a:r>
+              <a:rPr lang="en-US" sz="1300" dirty="0">
+                <a:solidFill>
+                  <a:schemeClr val="accent5"/>
+                </a:solidFill>
+              </a:rPr>
+              <a:t>데이터사이언스전공</a:t>
+            </a:r>
+            <a:endParaRPr lang="en-US" sz="1500" dirty="0"/>
+          </a:p>
+          <a:p>
+            <a:pPr algn="ctr" indent="0" marL="0">
+              <a:buNone/>
+            </a:pPr>
+            <a:r>
+              <a:rPr lang="en-US" sz="1500" dirty="0">
+                <a:solidFill>
+                  <a:schemeClr val="tx1"/>
+                </a:solidFill>
+              </a:rPr>
+              <a:t>김소연 · 정민서 · 강동한 · 최민석</a:t>
+            </a:r>
+            <a:endParaRPr lang="en-US" sz="1500" dirty="0"/>
           </a:p>
         </p:txBody>
       </p:sp>
@@ -12319,8 +12453,8 @@
         </p:nvSpPr>
         <p:spPr>
           <a:xfrm>
-            <a:off x="822960" y="1143000"/>
-            <a:ext cx="502920" cy="512064"/>
+            <a:off x="548640" y="1097280"/>
+            <a:ext cx="548640" cy="548640"/>
           </a:xfrm>
           <a:prstGeom prst="rect">
             <a:avLst/>
@@ -12355,8 +12489,8 @@
         </p:nvSpPr>
         <p:spPr>
           <a:xfrm>
-            <a:off x="1417320" y="1143000"/>
-            <a:ext cx="5852160" cy="512064"/>
+            <a:off x="1188720" y="1097280"/>
+            <a:ext cx="6400800" cy="548640"/>
           </a:xfrm>
           <a:prstGeom prst="rect">
             <a:avLst/>
@@ -12393,14 +12527,14 @@
       </p:sp>
       <p:sp>
         <p:nvSpPr>
-          <p:cNvPr id="6" name="Agenda rule"/>
+          <p:cNvPr id="6" name="Agenda rule light"/>
           <p:cNvSpPr/>
           <p:nvPr/>
         </p:nvSpPr>
         <p:spPr>
           <a:xfrm>
-            <a:off x="822960" y="1719072"/>
-            <a:ext cx="7543800" cy="0"/>
+            <a:off x="548640" y="1719072"/>
+            <a:ext cx="8046720" cy="0"/>
           </a:xfrm>
           <a:prstGeom prst="line">
             <a:avLst/>
@@ -12422,8 +12556,8 @@
         </p:nvSpPr>
         <p:spPr>
           <a:xfrm>
-            <a:off x="7269480" y="1143000"/>
-            <a:ext cx="1097280" cy="512064"/>
+            <a:off x="7498080" y="1097280"/>
+            <a:ext cx="1097280" cy="548640"/>
           </a:xfrm>
           <a:prstGeom prst="rect">
             <a:avLst/>
@@ -12458,8 +12592,8 @@
         </p:nvSpPr>
         <p:spPr>
           <a:xfrm>
-            <a:off x="822960" y="1837944"/>
-            <a:ext cx="502920" cy="512064"/>
+            <a:off x="548640" y="1828800"/>
+            <a:ext cx="548640" cy="548640"/>
           </a:xfrm>
           <a:prstGeom prst="rect">
             <a:avLst/>
@@ -12494,8 +12628,8 @@
         </p:nvSpPr>
         <p:spPr>
           <a:xfrm>
-            <a:off x="1417320" y="1837944"/>
-            <a:ext cx="5852160" cy="512064"/>
+            <a:off x="1188720" y="1828800"/>
+            <a:ext cx="6400800" cy="548640"/>
           </a:xfrm>
           <a:prstGeom prst="rect">
             <a:avLst/>
@@ -12532,14 +12666,14 @@
       </p:sp>
       <p:sp>
         <p:nvSpPr>
-          <p:cNvPr id="10" name="Agenda rule"/>
+          <p:cNvPr id="10" name="Agenda rule light"/>
           <p:cNvSpPr/>
           <p:nvPr/>
         </p:nvSpPr>
         <p:spPr>
           <a:xfrm>
-            <a:off x="822960" y="2414016"/>
-            <a:ext cx="7543800" cy="0"/>
+            <a:off x="548640" y="2450592"/>
+            <a:ext cx="8046720" cy="0"/>
           </a:xfrm>
           <a:prstGeom prst="line">
             <a:avLst/>
@@ -12561,8 +12695,8 @@
         </p:nvSpPr>
         <p:spPr>
           <a:xfrm>
-            <a:off x="7269480" y="1837944"/>
-            <a:ext cx="1097280" cy="512064"/>
+            <a:off x="7498080" y="1828800"/>
+            <a:ext cx="1097280" cy="548640"/>
           </a:xfrm>
           <a:prstGeom prst="rect">
             <a:avLst/>
@@ -12597,8 +12731,8 @@
         </p:nvSpPr>
         <p:spPr>
           <a:xfrm>
-            <a:off x="822960" y="2532888"/>
-            <a:ext cx="502920" cy="512064"/>
+            <a:off x="548640" y="2560320"/>
+            <a:ext cx="548640" cy="548640"/>
           </a:xfrm>
           <a:prstGeom prst="rect">
             <a:avLst/>
@@ -12633,8 +12767,8 @@
         </p:nvSpPr>
         <p:spPr>
           <a:xfrm>
-            <a:off x="1417320" y="2532888"/>
-            <a:ext cx="5852160" cy="512064"/>
+            <a:off x="1188720" y="2560320"/>
+            <a:ext cx="6400800" cy="548640"/>
           </a:xfrm>
           <a:prstGeom prst="rect">
             <a:avLst/>
@@ -12671,14 +12805,14 @@
       </p:sp>
       <p:sp>
         <p:nvSpPr>
-          <p:cNvPr id="14" name="Agenda rule"/>
+          <p:cNvPr id="14" name="Agenda rule light"/>
           <p:cNvSpPr/>
           <p:nvPr/>
         </p:nvSpPr>
         <p:spPr>
           <a:xfrm>
-            <a:off x="822960" y="3108960"/>
-            <a:ext cx="7543800" cy="0"/>
+            <a:off x="548640" y="3182112"/>
+            <a:ext cx="8046720" cy="0"/>
           </a:xfrm>
           <a:prstGeom prst="line">
             <a:avLst/>
@@ -12700,8 +12834,8 @@
         </p:nvSpPr>
         <p:spPr>
           <a:xfrm>
-            <a:off x="7269480" y="2532888"/>
-            <a:ext cx="1097280" cy="512064"/>
+            <a:off x="7498080" y="2560320"/>
+            <a:ext cx="1097280" cy="548640"/>
           </a:xfrm>
           <a:prstGeom prst="rect">
             <a:avLst/>
@@ -12736,8 +12870,8 @@
         </p:nvSpPr>
         <p:spPr>
           <a:xfrm>
-            <a:off x="822960" y="3227832"/>
-            <a:ext cx="502920" cy="512064"/>
+            <a:off x="548640" y="3291840"/>
+            <a:ext cx="548640" cy="548640"/>
           </a:xfrm>
           <a:prstGeom prst="rect">
             <a:avLst/>
@@ -12772,8 +12906,8 @@
         </p:nvSpPr>
         <p:spPr>
           <a:xfrm>
-            <a:off x="1417320" y="3227832"/>
-            <a:ext cx="5852160" cy="512064"/>
+            <a:off x="1188720" y="3291840"/>
+            <a:ext cx="6400800" cy="548640"/>
           </a:xfrm>
           <a:prstGeom prst="rect">
             <a:avLst/>
@@ -12810,14 +12944,14 @@
       </p:sp>
       <p:sp>
         <p:nvSpPr>
-          <p:cNvPr id="18" name="Agenda rule"/>
+          <p:cNvPr id="18" name="Agenda rule light"/>
           <p:cNvSpPr/>
           <p:nvPr/>
         </p:nvSpPr>
         <p:spPr>
           <a:xfrm>
-            <a:off x="822960" y="3803904"/>
-            <a:ext cx="7543800" cy="0"/>
+            <a:off x="548640" y="3913632"/>
+            <a:ext cx="8046720" cy="0"/>
           </a:xfrm>
           <a:prstGeom prst="line">
             <a:avLst/>
@@ -12839,8 +12973,8 @@
         </p:nvSpPr>
         <p:spPr>
           <a:xfrm>
-            <a:off x="7269480" y="3227832"/>
-            <a:ext cx="1097280" cy="512064"/>
+            <a:off x="7498080" y="3291840"/>
+            <a:ext cx="1097280" cy="548640"/>
           </a:xfrm>
           <a:prstGeom prst="rect">
             <a:avLst/>
@@ -12875,8 +13009,8 @@
         </p:nvSpPr>
         <p:spPr>
           <a:xfrm>
-            <a:off x="822960" y="3922776"/>
-            <a:ext cx="502920" cy="512064"/>
+            <a:off x="548640" y="4023360"/>
+            <a:ext cx="548640" cy="548640"/>
           </a:xfrm>
           <a:prstGeom prst="rect">
             <a:avLst/>
@@ -12911,8 +13045,8 @@
         </p:nvSpPr>
         <p:spPr>
           <a:xfrm>
-            <a:off x="1417320" y="3922776"/>
-            <a:ext cx="5852160" cy="512064"/>
+            <a:off x="1188720" y="4023360"/>
+            <a:ext cx="6400800" cy="548640"/>
           </a:xfrm>
           <a:prstGeom prst="rect">
             <a:avLst/>
@@ -12949,14 +13083,14 @@
       </p:sp>
       <p:sp>
         <p:nvSpPr>
-          <p:cNvPr id="22" name="Agenda rule"/>
+          <p:cNvPr id="22" name="Agenda rule light"/>
           <p:cNvSpPr/>
           <p:nvPr/>
         </p:nvSpPr>
         <p:spPr>
           <a:xfrm>
-            <a:off x="822960" y="4498848"/>
-            <a:ext cx="7543800" cy="0"/>
+            <a:off x="548640" y="4645152"/>
+            <a:ext cx="8046720" cy="0"/>
           </a:xfrm>
           <a:prstGeom prst="line">
             <a:avLst/>
@@ -12978,8 +13112,8 @@
         </p:nvSpPr>
         <p:spPr>
           <a:xfrm>
-            <a:off x="7269480" y="3922776"/>
-            <a:ext cx="1097280" cy="512064"/>
+            <a:off x="7498080" y="4023360"/>
+            <a:ext cx="1097280" cy="548640"/>
           </a:xfrm>
           <a:prstGeom prst="rect">
             <a:avLst/>
@@ -13364,7 +13498,7 @@
         <p:spPr>
           <a:xfrm>
             <a:off x="274320" y="978408"/>
-            <a:ext cx="8595360" cy="502920"/>
+            <a:ext cx="8595360" cy="530352"/>
           </a:xfrm>
           <a:prstGeom prst="rect">
             <a:avLst/>
@@ -13410,8 +13544,8 @@
           <p:nvPr/>
         </p:nvGraphicFramePr>
         <p:xfrm>
-          <a:off x="274320" y="1554480"/>
-          <a:ext cx="2743200" cy="1417320"/>
+          <a:off x="274320" y="1572768"/>
+          <a:ext cx="2798064" cy="1463040"/>
         </p:xfrm>
         <a:graphic xmlns:a="http://schemas.openxmlformats.org/drawingml/2006/main">
           <a:graphicData uri="http://schemas.openxmlformats.org/drawingml/2006/chart">
@@ -13426,8 +13560,8 @@
           <p:nvPr/>
         </p:nvGraphicFramePr>
         <p:xfrm>
-          <a:off x="3172968" y="1554480"/>
-          <a:ext cx="2743200" cy="1417320"/>
+          <a:off x="3172968" y="1572768"/>
+          <a:ext cx="2798064" cy="1463040"/>
         </p:xfrm>
         <a:graphic xmlns:a="http://schemas.openxmlformats.org/drawingml/2006/main">
           <a:graphicData uri="http://schemas.openxmlformats.org/drawingml/2006/chart">
@@ -13442,8 +13576,8 @@
           <p:nvPr/>
         </p:nvGraphicFramePr>
         <p:xfrm>
-          <a:off x="6071616" y="1554480"/>
-          <a:ext cx="2743200" cy="1417320"/>
+          <a:off x="6071616" y="1572768"/>
+          <a:ext cx="2798064" cy="1463040"/>
         </p:xfrm>
         <a:graphic xmlns:a="http://schemas.openxmlformats.org/drawingml/2006/main">
           <a:graphicData uri="http://schemas.openxmlformats.org/drawingml/2006/chart">
@@ -13459,7 +13593,7 @@
         </p:nvSpPr>
         <p:spPr>
           <a:xfrm>
-            <a:off x="274320" y="2971800"/>
+            <a:off x="274320" y="3035808"/>
             <a:ext cx="8595360" cy="201168"/>
           </a:xfrm>
           <a:prstGeom prst="rect">
@@ -13495,8 +13629,8 @@
         </p:nvSpPr>
         <p:spPr>
           <a:xfrm>
-            <a:off x="228600" y="3246120"/>
-            <a:ext cx="8686800" cy="1508760"/>
+            <a:off x="228600" y="3310128"/>
+            <a:ext cx="8686800" cy="1463040"/>
           </a:xfrm>
           <a:prstGeom prst="rect">
             <a:avLst/>
@@ -14036,16 +14170,16 @@
       </p:sp>
       <p:sp>
         <p:nvSpPr>
-          <p:cNvPr id="9" name="자기상관"/>
+          <p:cNvPr id="9" name="Cross vertical"/>
           <p:cNvSpPr/>
           <p:nvPr/>
         </p:nvSpPr>
         <p:spPr>
           <a:xfrm>
-            <a:off x="274320" y="1005840"/>
-            <a:ext cx="4251960" cy="1353312"/>
-          </a:xfrm>
-          <a:prstGeom prst="rect">
+            <a:off x="4572000" y="1051560"/>
+            <a:ext cx="0" cy="3657600"/>
+          </a:xfrm>
+          <a:prstGeom prst="line">
             <a:avLst/>
           </a:prstGeom>
           <a:noFill/>
@@ -14056,96 +14190,19 @@
             <a:prstDash val="solid"/>
           </a:ln>
         </p:spPr>
-        <p:txBody>
-          <a:bodyPr wrap="square" lIns="114300" tIns="114300" rIns="114300" bIns="114300" rtlCol="0" anchor="t"/>
-          <a:lstStyle/>
-          <a:p>
-            <a:pPr algn="l" indent="0" marL="0">
-              <a:buNone/>
-            </a:pPr>
-            <a:r>
-              <a:rPr lang="en-US" sz="1500" b="1" dirty="0">
-                <a:solidFill>
-                  <a:schemeClr val="tx1"/>
-                </a:solidFill>
-              </a:rPr>
-              <a:t>자기상관</a:t>
-            </a:r>
-            <a:endParaRPr lang="en-US" sz="1200" dirty="0"/>
-          </a:p>
-          <a:p>
-            <a:pPr algn="l" indent="0" marL="0">
-              <a:buNone/>
-            </a:pPr>
-            <a:r>
-              <a:rPr lang="en-US" sz="400" dirty="0">
-                <a:solidFill>
-                  <a:schemeClr val="tx1"/>
-                </a:solidFill>
-              </a:rPr>
-              <a:t> </a:t>
-            </a:r>
-            <a:endParaRPr lang="en-US" sz="1200" dirty="0"/>
-          </a:p>
-          <a:p>
-            <a:pPr algn="l" marL="152400" indent="-152400">
-              <a:buSzPct val="100000"/>
-              <a:buChar char="•"/>
-            </a:pPr>
-            <a:r>
-              <a:rPr lang="en-US" sz="1200" dirty="0">
-                <a:solidFill>
-                  <a:schemeClr val="tx1"/>
-                </a:solidFill>
-              </a:rPr>
-              <a:t>신호는 투수 자신의 과거 대비 편차로만 정의된다</a:t>
-            </a:r>
-            <a:endParaRPr lang="en-US" sz="1200" dirty="0"/>
-          </a:p>
-          <a:p>
-            <a:pPr algn="l" marL="152400" indent="-152400">
-              <a:buSzPct val="100000"/>
-              <a:buChar char="•"/>
-            </a:pPr>
-            <a:r>
-              <a:rPr lang="en-US" sz="1200" dirty="0">
-                <a:solidFill>
-                  <a:schemeClr val="tx1"/>
-                </a:solidFill>
-              </a:rPr>
-              <a:t>등판 순서를 무작위로 섞으면 신호가 사라진다</a:t>
-            </a:r>
-            <a:endParaRPr lang="en-US" sz="1200" dirty="0"/>
-          </a:p>
-          <a:p>
-            <a:pPr algn="l" marL="152400" indent="-152400">
-              <a:buSzPct val="100000"/>
-              <a:buChar char="•"/>
-            </a:pPr>
-            <a:r>
-              <a:rPr lang="en-US" sz="1200" dirty="0">
-                <a:solidFill>
-                  <a:schemeClr val="tx1"/>
-                </a:solidFill>
-              </a:rPr>
-              <a:t>과거로 다음 값을 예측하고 그 잔차를 감시할 수 있다</a:t>
-            </a:r>
-            <a:endParaRPr lang="en-US" sz="1200" dirty="0"/>
-          </a:p>
-        </p:txBody>
-      </p:sp>
-      <p:sp>
-        <p:nvSpPr>
-          <p:cNvPr id="10" name="추세"/>
+      </p:sp>
+      <p:sp>
+        <p:nvSpPr>
+          <p:cNvPr id="10" name="Cross horizontal"/>
           <p:cNvSpPr/>
           <p:nvPr/>
         </p:nvSpPr>
         <p:spPr>
           <a:xfrm>
-            <a:off x="4617720" y="1005840"/>
-            <a:ext cx="4251960" cy="1353312"/>
-          </a:xfrm>
-          <a:prstGeom prst="rect">
+            <a:off x="274320" y="2880360"/>
+            <a:ext cx="8595360" cy="0"/>
+          </a:xfrm>
+          <a:prstGeom prst="line">
             <a:avLst/>
           </a:prstGeom>
           <a:noFill/>
@@ -14156,294 +14213,329 @@
             <a:prstDash val="solid"/>
           </a:ln>
         </p:spPr>
-        <p:txBody>
-          <a:bodyPr wrap="square" lIns="114300" tIns="114300" rIns="114300" bIns="114300" rtlCol="0" anchor="t"/>
-          <a:lstStyle/>
-          <a:p>
-            <a:pPr algn="l" indent="0" marL="0">
-              <a:buNone/>
-            </a:pPr>
-            <a:r>
-              <a:rPr lang="en-US" sz="1500" b="1" dirty="0">
+      </p:sp>
+      <p:sp>
+        <p:nvSpPr>
+          <p:cNvPr id="11" name="자기상관"/>
+          <p:cNvSpPr txBox="1"/>
+          <p:nvPr/>
+        </p:nvSpPr>
+        <p:spPr>
+          <a:xfrm>
+            <a:off x="320040" y="1078992"/>
+            <a:ext cx="4023360" cy="1664208"/>
+          </a:xfrm>
+          <a:prstGeom prst="rect">
+            <a:avLst/>
+          </a:prstGeom>
+          <a:noFill/>
+          <a:ln/>
+        </p:spPr>
+        <p:txBody>
+          <a:bodyPr wrap="square" lIns="0" tIns="0" rIns="0" bIns="0" rtlCol="0" anchor="t"/>
+          <a:lstStyle/>
+          <a:p>
+            <a:pPr indent="0" marL="0">
+              <a:buNone/>
+            </a:pPr>
+            <a:r>
+              <a:rPr lang="en-US" sz="1600" b="1" dirty="0">
                 <a:solidFill>
                   <a:schemeClr val="tx1"/>
                 </a:solidFill>
               </a:rPr>
-              <a:t>추세</a:t>
-            </a:r>
-            <a:endParaRPr lang="en-US" sz="1200" dirty="0"/>
-          </a:p>
-          <a:p>
-            <a:pPr algn="l" indent="0" marL="0">
-              <a:buNone/>
-            </a:pPr>
-            <a:r>
-              <a:rPr lang="en-US" sz="400" dirty="0">
+              <a:t>자기상관</a:t>
+            </a:r>
+            <a:endParaRPr lang="en-US" sz="1600" dirty="0"/>
+          </a:p>
+          <a:p>
+            <a:pPr indent="0" marL="0">
+              <a:buNone/>
+            </a:pPr>
+            <a:r>
+              <a:rPr lang="en-US" sz="500" dirty="0">
                 <a:solidFill>
                   <a:schemeClr val="tx1"/>
                 </a:solidFill>
               </a:rPr>
               <a:t> </a:t>
             </a:r>
-            <a:endParaRPr lang="en-US" sz="1200" dirty="0"/>
-          </a:p>
-          <a:p>
-            <a:pPr algn="l" marL="152400" indent="-152400">
+            <a:endParaRPr lang="en-US" sz="1600" dirty="0"/>
+          </a:p>
+          <a:p>
+            <a:pPr marL="165100" indent="-165100">
+              <a:spcBef>
+                <a:spcPts val="300"/>
+              </a:spcBef>
               <a:buSzPct val="100000"/>
               <a:buChar char="•"/>
             </a:pPr>
             <a:r>
-              <a:rPr lang="en-US" sz="1200" dirty="0">
+              <a:rPr lang="en-US" sz="1300" dirty="0">
                 <a:solidFill>
                   <a:schemeClr val="tx1"/>
                 </a:solidFill>
               </a:rPr>
-              <a:t>'구속 혁명'으로 리그 포심 평균이 꾸준히 오른다</a:t>
-            </a:r>
-            <a:endParaRPr lang="en-US" sz="1200" dirty="0"/>
-          </a:p>
-          <a:p>
-            <a:pPr algn="l" marL="152400" indent="-152400">
+              <a:t>신호는 투수 자신의 과거 대비 편차로만 정의된다</a:t>
+            </a:r>
+            <a:endParaRPr lang="en-US" sz="1600" dirty="0"/>
+          </a:p>
+          <a:p>
+            <a:pPr marL="165100" indent="-165100">
+              <a:spcBef>
+                <a:spcPts val="300"/>
+              </a:spcBef>
               <a:buSzPct val="100000"/>
               <a:buChar char="•"/>
             </a:pPr>
             <a:r>
-              <a:rPr lang="en-US" sz="1200" dirty="0">
+              <a:rPr lang="en-US" sz="1300" dirty="0">
                 <a:solidFill>
                   <a:schemeClr val="tx1"/>
                 </a:solidFill>
               </a:rPr>
-              <a:t>93.69 → 94.77 mph (2021→2026), 6시즌 동안 한 번도 꺾이지 않고 +1.08</a:t>
-            </a:r>
-            <a:endParaRPr lang="en-US" sz="1200" dirty="0"/>
-          </a:p>
-          <a:p>
-            <a:pPr algn="l" marL="152400" indent="-152400">
+              <a:t>등판 순서를 무작위로 섞으면 신호가 사라진다</a:t>
+            </a:r>
+            <a:endParaRPr lang="en-US" sz="1600" dirty="0"/>
+          </a:p>
+          <a:p>
+            <a:pPr marL="165100" indent="-165100">
+              <a:spcBef>
+                <a:spcPts val="300"/>
+              </a:spcBef>
               <a:buSzPct val="100000"/>
               <a:buChar char="•"/>
             </a:pPr>
             <a:r>
-              <a:rPr lang="en-US" sz="1200" dirty="0">
+              <a:rPr lang="en-US" sz="1300" dirty="0">
                 <a:solidFill>
                   <a:schemeClr val="tx1"/>
                 </a:solidFill>
               </a:rPr>
-              <a:t>개인의 이상을 판단할 때 반드시 제거할 성분</a:t>
-            </a:r>
-            <a:endParaRPr lang="en-US" sz="1200" dirty="0"/>
-          </a:p>
-        </p:txBody>
-      </p:sp>
-      <p:sp>
-        <p:nvSpPr>
-          <p:cNvPr id="11" name="계절성"/>
-          <p:cNvSpPr/>
+              <a:t>과거로 다음 값을 예측하고, 그 예측 잔차를 감시하는 접근이 성립한다</a:t>
+            </a:r>
+            <a:endParaRPr lang="en-US" sz="1600" dirty="0"/>
+          </a:p>
+        </p:txBody>
+      </p:sp>
+      <p:sp>
+        <p:nvSpPr>
+          <p:cNvPr id="12" name="추세"/>
+          <p:cNvSpPr txBox="1"/>
           <p:nvPr/>
         </p:nvSpPr>
         <p:spPr>
           <a:xfrm>
-            <a:off x="274320" y="2487168"/>
-            <a:ext cx="4251960" cy="1353312"/>
-          </a:xfrm>
-          <a:prstGeom prst="rect">
-            <a:avLst/>
-          </a:prstGeom>
-          <a:noFill/>
-          <a:ln w="9525">
-            <a:solidFill>
-              <a:srgbClr val="000000"/>
-            </a:solidFill>
-            <a:prstDash val="solid"/>
-          </a:ln>
-        </p:spPr>
-        <p:txBody>
-          <a:bodyPr wrap="square" lIns="114300" tIns="114300" rIns="114300" bIns="114300" rtlCol="0" anchor="t"/>
-          <a:lstStyle/>
-          <a:p>
-            <a:pPr algn="l" indent="0" marL="0">
-              <a:buNone/>
-            </a:pPr>
-            <a:r>
-              <a:rPr lang="en-US" sz="1500" b="1" dirty="0">
+            <a:off x="4800600" y="1078992"/>
+            <a:ext cx="4023360" cy="1664208"/>
+          </a:xfrm>
+          <a:prstGeom prst="rect">
+            <a:avLst/>
+          </a:prstGeom>
+          <a:noFill/>
+          <a:ln/>
+        </p:spPr>
+        <p:txBody>
+          <a:bodyPr wrap="square" lIns="0" tIns="0" rIns="0" bIns="0" rtlCol="0" anchor="t"/>
+          <a:lstStyle/>
+          <a:p>
+            <a:pPr indent="0" marL="0">
+              <a:buNone/>
+            </a:pPr>
+            <a:r>
+              <a:rPr lang="en-US" sz="1600" b="1" dirty="0">
                 <a:solidFill>
                   <a:schemeClr val="tx1"/>
                 </a:solidFill>
               </a:rPr>
-              <a:t>계절성</a:t>
-            </a:r>
-            <a:endParaRPr lang="en-US" sz="1200" dirty="0"/>
-          </a:p>
-          <a:p>
-            <a:pPr algn="l" indent="0" marL="0">
-              <a:buNone/>
-            </a:pPr>
-            <a:r>
-              <a:rPr lang="en-US" sz="400" dirty="0">
+              <a:t>추세</a:t>
+            </a:r>
+            <a:endParaRPr lang="en-US" sz="1600" dirty="0"/>
+          </a:p>
+          <a:p>
+            <a:pPr indent="0" marL="0">
+              <a:buNone/>
+            </a:pPr>
+            <a:r>
+              <a:rPr lang="en-US" sz="500" dirty="0">
                 <a:solidFill>
                   <a:schemeClr val="tx1"/>
                 </a:solidFill>
               </a:rPr>
               <a:t> </a:t>
             </a:r>
-            <a:endParaRPr lang="en-US" sz="1200" dirty="0"/>
-          </a:p>
-          <a:p>
-            <a:pPr algn="l" marL="152400" indent="-152400">
+            <a:endParaRPr lang="en-US" sz="1600" dirty="0"/>
+          </a:p>
+          <a:p>
+            <a:pPr marL="165100" indent="-165100">
+              <a:spcBef>
+                <a:spcPts val="300"/>
+              </a:spcBef>
               <a:buSzPct val="100000"/>
               <a:buChar char="•"/>
             </a:pPr>
             <a:r>
-              <a:rPr lang="en-US" sz="1200" dirty="0">
+              <a:rPr lang="en-US" sz="1300" dirty="0">
                 <a:solidFill>
                   <a:schemeClr val="tx1"/>
                 </a:solidFill>
               </a:rPr>
-              <a:t>구속은 시즌 초보다 후반에 높다</a:t>
-            </a:r>
-            <a:endParaRPr lang="en-US" sz="1200" dirty="0"/>
-          </a:p>
-          <a:p>
-            <a:pPr algn="l" marL="152400" indent="-152400">
+              <a:t>'구속 혁명'으로 리그 포심 평균 구속이 꾸준히 오른다</a:t>
+            </a:r>
+            <a:endParaRPr lang="en-US" sz="1600" dirty="0"/>
+          </a:p>
+          <a:p>
+            <a:pPr marL="165100" indent="-165100">
+              <a:spcBef>
+                <a:spcPts val="300"/>
+              </a:spcBef>
               <a:buSzPct val="100000"/>
               <a:buChar char="•"/>
             </a:pPr>
             <a:r>
-              <a:rPr lang="en-US" sz="1200" dirty="0">
+              <a:rPr lang="en-US" sz="1300" dirty="0">
                 <a:solidFill>
                   <a:schemeClr val="tx1"/>
                 </a:solidFill>
               </a:rPr>
-              <a:t>2025년 4월 94.18 → 6월 94.61 mph 후 평평 (2024년: 94.04 → 94.40)</a:t>
-            </a:r>
-            <a:endParaRPr lang="en-US" sz="1200" dirty="0"/>
-          </a:p>
-          <a:p>
-            <a:pPr algn="l" marL="152400" indent="-152400">
+              <a:t>93.69 → 94.77 mph (2021→2026): 6시즌 동안 한 번도 꺾이지 않고 +1.08</a:t>
+            </a:r>
+            <a:endParaRPr lang="en-US" sz="1600" dirty="0"/>
+          </a:p>
+          <a:p>
+            <a:pPr marL="165100" indent="-165100">
+              <a:spcBef>
+                <a:spcPts val="300"/>
+              </a:spcBef>
               <a:buSzPct val="100000"/>
               <a:buChar char="•"/>
             </a:pPr>
             <a:r>
-              <a:rPr lang="en-US" sz="1200" dirty="0">
+              <a:rPr lang="en-US" sz="1300" dirty="0">
                 <a:solidFill>
                   <a:schemeClr val="tx1"/>
                 </a:solidFill>
               </a:rPr>
-              <a:t>부상 발생 자체도 특정 시기에 몰린다</a:t>
-            </a:r>
-            <a:endParaRPr lang="en-US" sz="1200" dirty="0"/>
-          </a:p>
-        </p:txBody>
-      </p:sp>
-      <p:sp>
-        <p:nvSpPr>
-          <p:cNvPr id="12" name="외생 변수"/>
-          <p:cNvSpPr/>
+              <a:t>투수 개인의 이상을 판단할 때 반드시 제거해야 할 성분</a:t>
+            </a:r>
+            <a:endParaRPr lang="en-US" sz="1600" dirty="0"/>
+          </a:p>
+        </p:txBody>
+      </p:sp>
+      <p:sp>
+        <p:nvSpPr>
+          <p:cNvPr id="13" name="계절성"/>
+          <p:cNvSpPr txBox="1"/>
           <p:nvPr/>
         </p:nvSpPr>
         <p:spPr>
           <a:xfrm>
-            <a:off x="4617720" y="2487168"/>
-            <a:ext cx="4251960" cy="1353312"/>
-          </a:xfrm>
-          <a:prstGeom prst="rect">
-            <a:avLst/>
-          </a:prstGeom>
-          <a:noFill/>
-          <a:ln w="9525">
-            <a:solidFill>
-              <a:srgbClr val="000000"/>
-            </a:solidFill>
-            <a:prstDash val="solid"/>
-          </a:ln>
-        </p:spPr>
-        <p:txBody>
-          <a:bodyPr wrap="square" lIns="114300" tIns="114300" rIns="114300" bIns="114300" rtlCol="0" anchor="t"/>
-          <a:lstStyle/>
-          <a:p>
-            <a:pPr algn="l" indent="0" marL="0">
-              <a:buNone/>
-            </a:pPr>
-            <a:r>
-              <a:rPr lang="en-US" sz="1500" b="1" dirty="0">
+            <a:off x="320040" y="3017520"/>
+            <a:ext cx="4023360" cy="1664208"/>
+          </a:xfrm>
+          <a:prstGeom prst="rect">
+            <a:avLst/>
+          </a:prstGeom>
+          <a:noFill/>
+          <a:ln/>
+        </p:spPr>
+        <p:txBody>
+          <a:bodyPr wrap="square" lIns="0" tIns="0" rIns="0" bIns="0" rtlCol="0" anchor="t"/>
+          <a:lstStyle/>
+          <a:p>
+            <a:pPr indent="0" marL="0">
+              <a:buNone/>
+            </a:pPr>
+            <a:r>
+              <a:rPr lang="en-US" sz="1600" b="1" dirty="0">
                 <a:solidFill>
                   <a:schemeClr val="tx1"/>
                 </a:solidFill>
               </a:rPr>
-              <a:t>외생 변수</a:t>
-            </a:r>
-            <a:endParaRPr lang="en-US" sz="1200" dirty="0"/>
-          </a:p>
-          <a:p>
-            <a:pPr algn="l" indent="0" marL="0">
-              <a:buNone/>
-            </a:pPr>
-            <a:r>
-              <a:rPr lang="en-US" sz="400" dirty="0">
+              <a:t>계절성</a:t>
+            </a:r>
+            <a:endParaRPr lang="en-US" sz="1600" dirty="0"/>
+          </a:p>
+          <a:p>
+            <a:pPr indent="0" marL="0">
+              <a:buNone/>
+            </a:pPr>
+            <a:r>
+              <a:rPr lang="en-US" sz="500" dirty="0">
                 <a:solidFill>
                   <a:schemeClr val="tx1"/>
                 </a:solidFill>
               </a:rPr>
               <a:t> </a:t>
             </a:r>
-            <a:endParaRPr lang="en-US" sz="1200" dirty="0"/>
-          </a:p>
-          <a:p>
-            <a:pPr algn="l" marL="152400" indent="-152400">
+            <a:endParaRPr lang="en-US" sz="1600" dirty="0"/>
+          </a:p>
+          <a:p>
+            <a:pPr marL="165100" indent="-165100">
+              <a:spcBef>
+                <a:spcPts val="300"/>
+              </a:spcBef>
               <a:buSzPct val="100000"/>
               <a:buChar char="•"/>
             </a:pPr>
             <a:r>
-              <a:rPr lang="en-US" sz="1200" dirty="0">
+              <a:rPr lang="en-US" sz="1300" dirty="0">
                 <a:solidFill>
                   <a:schemeClr val="tx1"/>
                 </a:solidFill>
               </a:rPr>
-              <a:t>등판 간격</a:t>
-            </a:r>
-            <a:endParaRPr lang="en-US" sz="1200" dirty="0"/>
-          </a:p>
-          <a:p>
-            <a:pPr algn="l" marL="152400" indent="-152400">
+              <a:t>구속은 시즌 초보다 후반에 높다</a:t>
+            </a:r>
+            <a:endParaRPr lang="en-US" sz="1600" dirty="0"/>
+          </a:p>
+          <a:p>
+            <a:pPr marL="165100" indent="-165100">
+              <a:spcBef>
+                <a:spcPts val="300"/>
+              </a:spcBef>
               <a:buSzPct val="100000"/>
               <a:buChar char="•"/>
             </a:pPr>
             <a:r>
-              <a:rPr lang="en-US" sz="1200" dirty="0">
+              <a:rPr lang="en-US" sz="1300" dirty="0">
                 <a:solidFill>
                   <a:schemeClr val="tx1"/>
                 </a:solidFill>
               </a:rPr>
-              <a:t>최근 7·14·28일 누적 투구 수, ACWR</a:t>
-            </a:r>
-            <a:endParaRPr lang="en-US" sz="1200" dirty="0"/>
-          </a:p>
-          <a:p>
-            <a:pPr algn="l" marL="152400" indent="-152400">
+              <a:t>2025년 4월 94.18 → 6월 94.61 mph 후 평평, 2024년도 같은 모양 (94.04 → 94.40)</a:t>
+            </a:r>
+            <a:endParaRPr lang="en-US" sz="1600" dirty="0"/>
+          </a:p>
+          <a:p>
+            <a:pPr marL="165100" indent="-165100">
+              <a:spcBef>
+                <a:spcPts val="300"/>
+              </a:spcBef>
               <a:buSzPct val="100000"/>
               <a:buChar char="•"/>
             </a:pPr>
             <a:r>
-              <a:rPr lang="en-US" sz="1200" dirty="0">
+              <a:rPr lang="en-US" sz="1300" dirty="0">
                 <a:solidFill>
                   <a:schemeClr val="tx1"/>
                 </a:solidFill>
               </a:rPr>
-              <a:t>휴식·부하로 설명되는 변화를 부상 신호와 구분한다</a:t>
-            </a:r>
-            <a:endParaRPr lang="en-US" sz="1200" dirty="0"/>
-          </a:p>
-        </p:txBody>
-      </p:sp>
-      <p:sp>
-        <p:nvSpPr>
-          <p:cNvPr id="13" name="Takeaway"/>
+              <a:t>부상 발생 자체도 특정 시기에 몰리는 경향이 있다</a:t>
+            </a:r>
+            <a:endParaRPr lang="en-US" sz="1600" dirty="0"/>
+          </a:p>
+        </p:txBody>
+      </p:sp>
+      <p:sp>
+        <p:nvSpPr>
+          <p:cNvPr id="14" name="외생 변수"/>
           <p:cNvSpPr txBox="1"/>
           <p:nvPr/>
         </p:nvSpPr>
         <p:spPr>
           <a:xfrm>
-            <a:off x="274320" y="4023360"/>
-            <a:ext cx="8595360" cy="329184"/>
+            <a:off x="4800600" y="3017520"/>
+            <a:ext cx="4023360" cy="1664208"/>
           </a:xfrm>
           <a:prstGeom prst="rect">
             <a:avLst/>
@@ -14452,58 +14544,89 @@
           <a:ln/>
         </p:spPr>
         <p:txBody>
-          <a:bodyPr wrap="square" lIns="0" tIns="0" rIns="0" bIns="0" rtlCol="0" anchor="ctr"/>
-          <a:lstStyle/>
-          <a:p>
-            <a:pPr marL="279400" indent="-279400">
+          <a:bodyPr wrap="square" lIns="0" tIns="0" rIns="0" bIns="0" rtlCol="0" anchor="t"/>
+          <a:lstStyle/>
+          <a:p>
+            <a:pPr indent="0" marL="0">
+              <a:buNone/>
+            </a:pPr>
+            <a:r>
+              <a:rPr lang="en-US" sz="1600" b="1" dirty="0">
+                <a:solidFill>
+                  <a:schemeClr val="tx1"/>
+                </a:solidFill>
+              </a:rPr>
+              <a:t>외생 변수</a:t>
+            </a:r>
+            <a:endParaRPr lang="en-US" sz="1600" dirty="0"/>
+          </a:p>
+          <a:p>
+            <a:pPr indent="0" marL="0">
+              <a:buNone/>
+            </a:pPr>
+            <a:r>
+              <a:rPr lang="en-US" sz="500" dirty="0">
+                <a:solidFill>
+                  <a:schemeClr val="tx1"/>
+                </a:solidFill>
+              </a:rPr>
+              <a:t> </a:t>
+            </a:r>
+            <a:endParaRPr lang="en-US" sz="1600" dirty="0"/>
+          </a:p>
+          <a:p>
+            <a:pPr marL="165100" indent="-165100">
+              <a:spcBef>
+                <a:spcPts val="300"/>
+              </a:spcBef>
               <a:buSzPct val="100000"/>
-              <a:buChar char="➡"/>
-            </a:pPr>
-            <a:r>
-              <a:rPr lang="en-US" sz="1450" b="1" dirty="0">
+              <a:buChar char="•"/>
+            </a:pPr>
+            <a:r>
+              <a:rPr lang="en-US" sz="1300" dirty="0">
                 <a:solidFill>
                   <a:schemeClr val="tx1"/>
                 </a:solidFill>
               </a:rPr>
-              <a:t>투수의 평소 수준을 예측할 수 있다면, 거기서 벗어난 정도가 곧 경고가 된다</a:t>
-            </a:r>
-            <a:endParaRPr lang="en-US" sz="1450" dirty="0"/>
-          </a:p>
-        </p:txBody>
-      </p:sp>
-      <p:sp>
-        <p:nvSpPr>
-          <p:cNvPr id="14" name="Course link"/>
-          <p:cNvSpPr txBox="1"/>
-          <p:nvPr/>
-        </p:nvSpPr>
-        <p:spPr>
-          <a:xfrm>
-            <a:off x="566928" y="4389120"/>
-            <a:ext cx="8321040" cy="274320"/>
-          </a:xfrm>
-          <a:prstGeom prst="rect">
-            <a:avLst/>
-          </a:prstGeom>
-          <a:noFill/>
-          <a:ln/>
-        </p:spPr>
-        <p:txBody>
-          <a:bodyPr wrap="square" lIns="0" tIns="0" rIns="0" bIns="0" rtlCol="0" anchor="ctr"/>
-          <a:lstStyle/>
-          <a:p>
-            <a:pPr indent="0" marL="0">
-              <a:buNone/>
-            </a:pPr>
-            <a:r>
-              <a:rPr lang="en-US" sz="1250" dirty="0">
+              <a:t>등판 간격 (직전 등판 이후 일수)</a:t>
+            </a:r>
+            <a:endParaRPr lang="en-US" sz="1600" dirty="0"/>
+          </a:p>
+          <a:p>
+            <a:pPr marL="165100" indent="-165100">
+              <a:spcBef>
+                <a:spcPts val="300"/>
+              </a:spcBef>
+              <a:buSzPct val="100000"/>
+              <a:buChar char="•"/>
+            </a:pPr>
+            <a:r>
+              <a:rPr lang="en-US" sz="1300" dirty="0">
                 <a:solidFill>
                   <a:schemeClr val="tx1"/>
                 </a:solidFill>
               </a:rPr>
-              <a:t>→ 수업에서 다루는 ARIMA / ARIMAX, EWMA, 잔차 기반 이상 탐지와 바로 연결된다</a:t>
-            </a:r>
-            <a:endParaRPr lang="en-US" sz="1250" dirty="0"/>
+              <a:t>최근 7·14·28일 누적 투구 수, ACWR (급성 / 만성 부하 비율)</a:t>
+            </a:r>
+            <a:endParaRPr lang="en-US" sz="1600" dirty="0"/>
+          </a:p>
+          <a:p>
+            <a:pPr marL="165100" indent="-165100">
+              <a:spcBef>
+                <a:spcPts val="300"/>
+              </a:spcBef>
+              <a:buSzPct val="100000"/>
+              <a:buChar char="•"/>
+            </a:pPr>
+            <a:r>
+              <a:rPr lang="en-US" sz="1300" dirty="0">
+                <a:solidFill>
+                  <a:schemeClr val="tx1"/>
+                </a:solidFill>
+              </a:rPr>
+              <a:t>휴식과 부하로 설명되는 구속 변화를 부상 신호와 구분한다</a:t>
+            </a:r>
+            <a:endParaRPr lang="en-US" sz="1600" dirty="0"/>
           </a:p>
         </p:txBody>
       </p:sp>
@@ -14884,7 +15007,7 @@
                 <a:gridCol w="2606040"/>
                 <a:gridCol w="2331720"/>
               </a:tblGrid>
-              <a:tr h="329184">
+              <a:tr h="365760">
                 <a:tc>
                   <a:txBody>
                     <a:bodyPr/>
@@ -15070,7 +15193,7 @@
                   </a:tcPr>
                 </a:tc>
               </a:tr>
-              <a:tr h="310896">
+              <a:tr h="347472">
                 <a:tc gridSpan="4">
                   <a:txBody>
                     <a:bodyPr/>
@@ -15080,14 +15203,14 @@
                         <a:buNone/>
                       </a:pPr>
                       <a:r>
-                        <a:rPr lang="en-US" sz="1150" b="1" dirty="0">
+                        <a:rPr lang="en-US" sz="1200" b="1" dirty="0">
                           <a:solidFill>
                             <a:schemeClr val="tx1"/>
                           </a:solidFill>
                         </a:rPr>
                         <a:t>주제 1. 구속이 부상과 연관되어 있다는 전제를 뒷받침하는 연구</a:t>
                       </a:r>
-                      <a:endParaRPr lang="en-US" sz="1150" dirty="0"/>
+                      <a:endParaRPr lang="en-US" sz="1200" dirty="0"/>
                     </a:p>
                   </a:txBody>
                   <a:tcPr marL="54864" marR="54864" marT="54864" marB="54864" anchor="ctr">
@@ -15127,7 +15250,7 @@
                   <a:tcPr/>
                 </a:tc>
               </a:tr>
-              <a:tr h="676656">
+              <a:tr h="896112">
                 <a:tc>
                   <a:txBody>
                     <a:bodyPr/>
@@ -15137,14 +15260,14 @@
                         <a:buNone/>
                       </a:pPr>
                       <a:r>
-                        <a:rPr lang="en-US" sz="1050" b="1" dirty="0">
+                        <a:rPr lang="en-US" sz="1100" b="1" dirty="0">
                           <a:solidFill>
                             <a:schemeClr val="tx1"/>
                           </a:solidFill>
                         </a:rPr>
                         <a:t>Prodromo 외 (2016)</a:t>
                       </a:r>
-                      <a:endParaRPr lang="en-US" sz="1050" dirty="0"/>
+                      <a:endParaRPr lang="en-US" sz="1100" dirty="0"/>
                     </a:p>
                   </a:txBody>
                   <a:tcPr marL="54864" marR="54864" marT="54864" marB="54864" anchor="ctr">
@@ -15183,28 +15306,28 @@
                         <a:buNone/>
                       </a:pPr>
                       <a:r>
-                        <a:rPr lang="en-US" sz="1050" dirty="0">
+                        <a:rPr lang="en-US" sz="1100" dirty="0">
                           <a:solidFill>
                             <a:schemeClr val="tx1"/>
                           </a:solidFill>
                         </a:rPr>
                         <a:t>UCLR 투수 vs 같은 나이 대조군 (2002–2015)</a:t>
                       </a:r>
-                      <a:endParaRPr lang="en-US" sz="1050" dirty="0"/>
+                      <a:endParaRPr lang="en-US" sz="1100" dirty="0"/>
                     </a:p>
                     <a:p>
                       <a:pPr algn="ctr" indent="0" marL="0">
                         <a:buNone/>
                       </a:pPr>
                       <a:r>
-                        <a:rPr lang="en-US" sz="1050" dirty="0">
+                        <a:rPr lang="en-US" sz="1100" dirty="0">
                           <a:solidFill>
                             <a:schemeClr val="tx1"/>
                           </a:solidFill>
                         </a:rPr>
                         <a:t>사례-대조, 조건부 로지스틱 회귀</a:t>
                       </a:r>
-                      <a:endParaRPr lang="en-US" sz="1050" dirty="0"/>
+                      <a:endParaRPr lang="en-US" sz="1100" dirty="0"/>
                     </a:p>
                   </a:txBody>
                   <a:tcPr marL="54864" marR="54864" marT="54864" marB="54864" anchor="ctr">
@@ -15243,14 +15366,14 @@
                         <a:buNone/>
                       </a:pPr>
                       <a:r>
-                        <a:rPr lang="en-US" sz="1050" dirty="0">
+                        <a:rPr lang="en-US" sz="1100" dirty="0">
                           <a:solidFill>
                             <a:schemeClr val="tx1"/>
                           </a:solidFill>
                         </a:rPr>
                         <a:t>수술 전 시즌 평균 구속이 더 높았고, 속구 평균 구속이 유의한 변수</a:t>
                       </a:r>
-                      <a:endParaRPr lang="en-US" sz="1050" dirty="0"/>
+                      <a:endParaRPr lang="en-US" sz="1100" dirty="0"/>
                     </a:p>
                   </a:txBody>
                   <a:tcPr marL="54864" marR="54864" marT="54864" marB="54864" anchor="ctr">
@@ -15289,14 +15412,14 @@
                         <a:buNone/>
                       </a:pPr>
                       <a:r>
-                        <a:rPr lang="en-US" sz="1050" dirty="0">
+                        <a:rPr lang="en-US" sz="1100" dirty="0">
                           <a:solidFill>
                             <a:schemeClr val="tx1"/>
                           </a:solidFill>
                         </a:rPr>
                         <a:t>투수끼리 비교, 시즌 평균 사용 → 변화 시점을 알 수 없음</a:t>
                       </a:r>
-                      <a:endParaRPr lang="en-US" sz="1050" dirty="0"/>
+                      <a:endParaRPr lang="en-US" sz="1100" dirty="0"/>
                     </a:p>
                   </a:txBody>
                   <a:tcPr marL="54864" marR="54864" marT="54864" marB="54864" anchor="ctr">
@@ -15327,7 +15450,7 @@
                   </a:tcPr>
                 </a:tc>
               </a:tr>
-              <a:tr h="310896">
+              <a:tr h="347472">
                 <a:tc gridSpan="4">
                   <a:txBody>
                     <a:bodyPr/>
@@ -15337,14 +15460,14 @@
                         <a:buNone/>
                       </a:pPr>
                       <a:r>
-                        <a:rPr lang="en-US" sz="1150" b="1" dirty="0">
+                        <a:rPr lang="en-US" sz="1200" b="1" dirty="0">
                           <a:solidFill>
                             <a:schemeClr val="tx1"/>
                           </a:solidFill>
                         </a:rPr>
                         <a:t>주제 2. 투수의 평소 모습과 부상 직전을 비교한 연구</a:t>
                       </a:r>
-                      <a:endParaRPr lang="en-US" sz="1150" dirty="0"/>
+                      <a:endParaRPr lang="en-US" sz="1200" dirty="0"/>
                     </a:p>
                   </a:txBody>
                   <a:tcPr marL="54864" marR="54864" marT="54864" marB="54864" anchor="ctr">
@@ -15384,7 +15507,7 @@
                   <a:tcPr/>
                 </a:tc>
               </a:tr>
-              <a:tr h="676656">
+              <a:tr h="896112">
                 <a:tc>
                   <a:txBody>
                     <a:bodyPr/>
@@ -15394,14 +15517,14 @@
                         <a:buNone/>
                       </a:pPr>
                       <a:r>
-                        <a:rPr lang="en-US" sz="1050" b="1" dirty="0">
+                        <a:rPr lang="en-US" sz="1100" b="1" dirty="0">
                           <a:solidFill>
                             <a:schemeClr val="tx1"/>
                           </a:solidFill>
                         </a:rPr>
                         <a:t>Mastroianni 외 (2026)</a:t>
                       </a:r>
-                      <a:endParaRPr lang="en-US" sz="1050" dirty="0"/>
+                      <a:endParaRPr lang="en-US" sz="1100" dirty="0"/>
                     </a:p>
                   </a:txBody>
                   <a:tcPr marL="54864" marR="54864" marT="54864" marB="54864" anchor="ctr">
@@ -15440,28 +15563,28 @@
                         <a:buNone/>
                       </a:pPr>
                       <a:r>
-                        <a:rPr lang="en-US" sz="1050" dirty="0">
+                        <a:rPr lang="en-US" sz="1100" dirty="0">
                           <a:solidFill>
                             <a:schemeClr val="tx1"/>
                           </a:solidFill>
                         </a:rPr>
                         <a:t>UCL 수술 투수 78명 vs 매칭 대조군 156명</a:t>
                       </a:r>
-                      <a:endParaRPr lang="en-US" sz="1050" dirty="0"/>
+                      <a:endParaRPr lang="en-US" sz="1100" dirty="0"/>
                     </a:p>
                     <a:p>
                       <a:pPr algn="ctr" indent="0" marL="0">
                         <a:buNone/>
                       </a:pPr>
                       <a:r>
-                        <a:rPr lang="en-US" sz="1050" dirty="0">
+                        <a:rPr lang="en-US" sz="1100" dirty="0">
                           <a:solidFill>
                             <a:schemeClr val="tx1"/>
                           </a:solidFill>
                         </a:rPr>
                         <a:t>투수 내 변화 분석</a:t>
                       </a:r>
-                      <a:endParaRPr lang="en-US" sz="1050" dirty="0"/>
+                      <a:endParaRPr lang="en-US" sz="1100" dirty="0"/>
                     </a:p>
                   </a:txBody>
                   <a:tcPr marL="54864" marR="54864" marT="54864" marB="54864" anchor="ctr">
@@ -15500,14 +15623,14 @@
                         <a:buNone/>
                       </a:pPr>
                       <a:r>
-                        <a:rPr lang="en-US" sz="1050" dirty="0">
+                        <a:rPr lang="en-US" sz="1100" dirty="0">
                           <a:solidFill>
                             <a:schemeClr val="tx1"/>
                           </a:solidFill>
                         </a:rPr>
                         <a:t>마지막 5등판 구속 점진 하락 (P = .019), 수평 릴리스 변동성 큼 (P = .005)</a:t>
                       </a:r>
-                      <a:endParaRPr lang="en-US" sz="1050" dirty="0"/>
+                      <a:endParaRPr lang="en-US" sz="1100" dirty="0"/>
                     </a:p>
                   </a:txBody>
                   <a:tcPr marL="54864" marR="54864" marT="54864" marB="54864" anchor="ctr">
@@ -15546,14 +15669,14 @@
                         <a:buNone/>
                       </a:pPr>
                       <a:r>
-                        <a:rPr lang="en-US" sz="1050" dirty="0">
+                        <a:rPr lang="en-US" sz="1100" dirty="0">
                           <a:solidFill>
                             <a:schemeClr val="tx1"/>
                           </a:solidFill>
                         </a:rPr>
                         <a:t>사후 분석, AUC·선행 일수 미보고</a:t>
                       </a:r>
-                      <a:endParaRPr lang="en-US" sz="1050" dirty="0"/>
+                      <a:endParaRPr lang="en-US" sz="1100" dirty="0"/>
                     </a:p>
                   </a:txBody>
                   <a:tcPr marL="54864" marR="54864" marT="54864" marB="54864" anchor="ctr">
@@ -15584,7 +15707,7 @@
                   </a:tcPr>
                 </a:tc>
               </a:tr>
-              <a:tr h="676656">
+              <a:tr h="896112">
                 <a:tc>
                   <a:txBody>
                     <a:bodyPr/>
@@ -15594,14 +15717,14 @@
                         <a:buNone/>
                       </a:pPr>
                       <a:r>
-                        <a:rPr lang="en-US" sz="1050" b="1" dirty="0">
+                        <a:rPr lang="en-US" sz="1100" b="1" dirty="0">
                           <a:solidFill>
                             <a:schemeClr val="tx1"/>
                           </a:solidFill>
                         </a:rPr>
                         <a:t>Ozaki (2026, 석사논문)</a:t>
                       </a:r>
-                      <a:endParaRPr lang="en-US" sz="1050" dirty="0"/>
+                      <a:endParaRPr lang="en-US" sz="1100" dirty="0"/>
                     </a:p>
                   </a:txBody>
                   <a:tcPr marL="54864" marR="54864" marT="54864" marB="54864" anchor="ctr">
@@ -15640,28 +15763,28 @@
                         <a:buNone/>
                       </a:pPr>
                       <a:r>
-                        <a:rPr lang="en-US" sz="1050" dirty="0">
+                        <a:rPr lang="en-US" sz="1100" dirty="0">
                           <a:solidFill>
                             <a:schemeClr val="tx1"/>
                           </a:solidFill>
                         </a:rPr>
                         <a:t>UCLR 투수 46명 (2016–2024)</a:t>
                       </a:r>
-                      <a:endParaRPr lang="en-US" sz="1050" dirty="0"/>
+                      <a:endParaRPr lang="en-US" sz="1100" dirty="0"/>
                     </a:p>
                     <a:p>
                       <a:pPr algn="ctr" indent="0" marL="0">
                         <a:buNone/>
                       </a:pPr>
                       <a:r>
-                        <a:rPr lang="en-US" sz="1050" dirty="0">
+                        <a:rPr lang="en-US" sz="1100" dirty="0">
                           <a:solidFill>
                             <a:schemeClr val="tx1"/>
                           </a:solidFill>
                         </a:rPr>
                         <a:t>오토인코더 이상 탐지</a:t>
                       </a:r>
-                      <a:endParaRPr lang="en-US" sz="1050" dirty="0"/>
+                      <a:endParaRPr lang="en-US" sz="1100" dirty="0"/>
                     </a:p>
                   </a:txBody>
                   <a:tcPr marL="54864" marR="54864" marT="54864" marB="54864" anchor="ctr">
@@ -15700,14 +15823,14 @@
                         <a:buNone/>
                       </a:pPr>
                       <a:r>
-                        <a:rPr lang="en-US" sz="1050" dirty="0">
+                        <a:rPr lang="en-US" sz="1100" dirty="0">
                           <a:solidFill>
                             <a:schemeClr val="tx1"/>
                           </a:solidFill>
                         </a:rPr>
                         <a:t>부상이 가까울수록 이상 정도 2.7배. 코드와 매칭 대조군 45쌍 공개</a:t>
                       </a:r>
-                      <a:endParaRPr lang="en-US" sz="1050" dirty="0"/>
+                      <a:endParaRPr lang="en-US" sz="1100" dirty="0"/>
                     </a:p>
                   </a:txBody>
                   <a:tcPr marL="54864" marR="54864" marT="54864" marB="54864" anchor="ctr">
@@ -15746,14 +15869,14 @@
                         <a:buNone/>
                       </a:pPr>
                       <a:r>
-                        <a:rPr lang="en-US" sz="1050" dirty="0">
+                        <a:rPr lang="en-US" sz="1100" dirty="0">
                           <a:solidFill>
                             <a:schemeClr val="tx1"/>
                           </a:solidFill>
                         </a:rPr>
                         <a:t>건강한 투수도 경보 (73% vs 66%), 시간 순서를 일부러 무시</a:t>
                       </a:r>
-                      <a:endParaRPr lang="en-US" sz="1050" dirty="0"/>
+                      <a:endParaRPr lang="en-US" sz="1100" dirty="0"/>
                     </a:p>
                   </a:txBody>
                   <a:tcPr marL="54864" marR="54864" marT="54864" marB="54864" anchor="ctr">
@@ -15788,43 +15911,6 @@
           </a:graphicData>
         </a:graphic>
       </p:graphicFrame>
-      <p:sp>
-        <p:nvSpPr>
-          <p:cNvPr id="10" name="Takeaway"/>
-          <p:cNvSpPr txBox="1"/>
-          <p:nvPr/>
-        </p:nvSpPr>
-        <p:spPr>
-          <a:xfrm>
-            <a:off x="274320" y="4206240"/>
-            <a:ext cx="8595360" cy="365760"/>
-          </a:xfrm>
-          <a:prstGeom prst="rect">
-            <a:avLst/>
-          </a:prstGeom>
-          <a:noFill/>
-          <a:ln/>
-        </p:spPr>
-        <p:txBody>
-          <a:bodyPr wrap="square" lIns="0" tIns="0" rIns="0" bIns="0" rtlCol="0" anchor="ctr"/>
-          <a:lstStyle/>
-          <a:p>
-            <a:pPr marL="279400" indent="-279400">
-              <a:buSzPct val="100000"/>
-              <a:buChar char="➡"/>
-            </a:pPr>
-            <a:r>
-              <a:rPr lang="en-US" sz="1350" b="1" dirty="0">
-                <a:solidFill>
-                  <a:schemeClr val="tx1"/>
-                </a:solidFill>
-              </a:rPr>
-              <a:t>구속은 부상과 연관되고 부상 직전 평소와 달라지지만, 이를 경보로 바꿔 오경보까지 평가한 연구는 없다</a:t>
-            </a:r>
-            <a:endParaRPr lang="en-US" sz="1350" dirty="0"/>
-          </a:p>
-        </p:txBody>
-      </p:sp>
       <p:sp>
         <p:nvSpPr>
           <p:cNvPr id="25" name="Slide Number Placeholder 0"/>
@@ -16202,7 +16288,7 @@
                 <a:gridCol w="2606040"/>
                 <a:gridCol w="2331720"/>
               </a:tblGrid>
-              <a:tr h="329184">
+              <a:tr h="365760">
                 <a:tc>
                   <a:txBody>
                     <a:bodyPr/>
@@ -16388,7 +16474,7 @@
                   </a:tcPr>
                 </a:tc>
               </a:tr>
-              <a:tr h="310896">
+              <a:tr h="347472">
                 <a:tc gridSpan="4">
                   <a:txBody>
                     <a:bodyPr/>
@@ -16398,14 +16484,14 @@
                         <a:buNone/>
                       </a:pPr>
                       <a:r>
-                        <a:rPr lang="en-US" sz="1150" b="1" dirty="0">
+                        <a:rPr lang="en-US" sz="1200" b="1" dirty="0">
                           <a:solidFill>
                             <a:schemeClr val="tx1"/>
                           </a:solidFill>
                         </a:rPr>
                         <a:t>주제 3. 시계열 방법을 쓴 연구</a:t>
                       </a:r>
-                      <a:endParaRPr lang="en-US" sz="1150" dirty="0"/>
+                      <a:endParaRPr lang="en-US" sz="1200" dirty="0"/>
                     </a:p>
                   </a:txBody>
                   <a:tcPr marL="54864" marR="54864" marT="54864" marB="54864" anchor="ctr">
@@ -16445,7 +16531,7 @@
                   <a:tcPr/>
                 </a:tc>
               </a:tr>
-              <a:tr h="713232">
+              <a:tr h="896112">
                 <a:tc>
                   <a:txBody>
                     <a:bodyPr/>
@@ -16455,14 +16541,14 @@
                         <a:buNone/>
                       </a:pPr>
                       <a:r>
-                        <a:rPr lang="en-US" sz="1050" b="1" dirty="0">
+                        <a:rPr lang="en-US" sz="1100" b="1" dirty="0">
                           <a:solidFill>
                             <a:schemeClr val="tx1"/>
                           </a:solidFill>
                         </a:rPr>
                         <a:t>Mayo 외 (2021)</a:t>
                       </a:r>
-                      <a:endParaRPr lang="en-US" sz="1050" dirty="0"/>
+                      <a:endParaRPr lang="en-US" sz="1100" dirty="0"/>
                     </a:p>
                   </a:txBody>
                   <a:tcPr marL="54864" marR="54864" marT="54864" marB="54864" anchor="ctr">
@@ -16501,28 +16587,28 @@
                         <a:buNone/>
                       </a:pPr>
                       <a:r>
-                        <a:rPr lang="en-US" sz="1050" dirty="0">
+                        <a:rPr lang="en-US" sz="1100" dirty="0">
                           <a:solidFill>
                             <a:schemeClr val="tx1"/>
                           </a:solidFill>
                         </a:rPr>
                         <a:t>UCLR 투수 223명의 수술 전 15경기</a:t>
                       </a:r>
-                      <a:endParaRPr lang="en-US" sz="1050" dirty="0"/>
+                      <a:endParaRPr lang="en-US" sz="1100" dirty="0"/>
                     </a:p>
                     <a:p>
                       <a:pPr algn="ctr" indent="0" marL="0">
                         <a:buNone/>
                       </a:pPr>
                       <a:r>
-                        <a:rPr lang="en-US" sz="1050" dirty="0">
+                        <a:rPr lang="en-US" sz="1100" dirty="0">
                           <a:solidFill>
                             <a:schemeClr val="tx1"/>
                           </a:solidFill>
                         </a:rPr>
                         <a:t>Mann-Kendall 추세검정</a:t>
                       </a:r>
-                      <a:endParaRPr lang="en-US" sz="1050" dirty="0"/>
+                      <a:endParaRPr lang="en-US" sz="1100" dirty="0"/>
                     </a:p>
                   </a:txBody>
                   <a:tcPr marL="54864" marR="54864" marT="54864" marB="54864" anchor="ctr">
@@ -16561,14 +16647,14 @@
                         <a:buNone/>
                       </a:pPr>
                       <a:r>
-                        <a:rPr lang="en-US" sz="1050" dirty="0">
+                        <a:rPr lang="en-US" sz="1100" dirty="0">
                           <a:solidFill>
                             <a:schemeClr val="tx1"/>
                           </a:solidFill>
                         </a:rPr>
                         <a:t>포심 구속 경기당 약 0.1 mph 하락 (tau = −0.657, P &lt; .001), 회전수 경기당 약 5 rpm 감소</a:t>
                       </a:r>
-                      <a:endParaRPr lang="en-US" sz="1050" dirty="0"/>
+                      <a:endParaRPr lang="en-US" sz="1100" dirty="0"/>
                     </a:p>
                   </a:txBody>
                   <a:tcPr marL="54864" marR="54864" marT="54864" marB="54864" anchor="ctr">
@@ -16607,14 +16693,14 @@
                         <a:buNone/>
                       </a:pPr>
                       <a:r>
-                        <a:rPr lang="en-US" sz="1050" dirty="0">
+                        <a:rPr lang="en-US" sz="1100" dirty="0">
                           <a:solidFill>
                             <a:schemeClr val="tx1"/>
                           </a:solidFill>
                         </a:rPr>
                         <a:t>건강한 대조군 없음, 경보 규칙 없음</a:t>
                       </a:r>
-                      <a:endParaRPr lang="en-US" sz="1050" dirty="0"/>
+                      <a:endParaRPr lang="en-US" sz="1100" dirty="0"/>
                     </a:p>
                   </a:txBody>
                   <a:tcPr marL="54864" marR="54864" marT="54864" marB="54864" anchor="ctr">
@@ -16645,7 +16731,7 @@
                   </a:tcPr>
                 </a:tc>
               </a:tr>
-              <a:tr h="676656">
+              <a:tr h="896112">
                 <a:tc>
                   <a:txBody>
                     <a:bodyPr/>
@@ -16655,14 +16741,14 @@
                         <a:buNone/>
                       </a:pPr>
                       <a:r>
-                        <a:rPr lang="en-US" sz="1050" b="1" dirty="0">
+                        <a:rPr lang="en-US" sz="1100" b="1" dirty="0">
                           <a:solidFill>
                             <a:schemeClr val="tx1"/>
                           </a:solidFill>
                         </a:rPr>
                         <a:t>Bright 외 (2026)</a:t>
                       </a:r>
-                      <a:endParaRPr lang="en-US" sz="1050" dirty="0"/>
+                      <a:endParaRPr lang="en-US" sz="1100" dirty="0"/>
                     </a:p>
                   </a:txBody>
                   <a:tcPr marL="54864" marR="54864" marT="54864" marB="54864" anchor="ctr">
@@ -16701,28 +16787,28 @@
                         <a:buNone/>
                       </a:pPr>
                       <a:r>
-                        <a:rPr lang="en-US" sz="1050" dirty="0">
+                        <a:rPr lang="en-US" sz="1100" dirty="0">
                           <a:solidFill>
                             <a:schemeClr val="tx1"/>
                           </a:solidFill>
                         </a:rPr>
                         <a:t>중계 영상으로 3차원 자세 추정</a:t>
                       </a:r>
-                      <a:endParaRPr lang="en-US" sz="1050" dirty="0"/>
+                      <a:endParaRPr lang="en-US" sz="1100" dirty="0"/>
                     </a:p>
                     <a:p>
                       <a:pPr algn="ctr" indent="0" marL="0">
                         <a:buNone/>
                       </a:pPr>
                       <a:r>
-                        <a:rPr lang="en-US" sz="1050" dirty="0">
+                        <a:rPr lang="en-US" sz="1100" dirty="0">
                           <a:solidFill>
                             <a:schemeClr val="tx1"/>
                           </a:solidFill>
                         </a:rPr>
                         <a:t>투수 7,348명 선별</a:t>
                       </a:r>
-                      <a:endParaRPr lang="en-US" sz="1050" dirty="0"/>
+                      <a:endParaRPr lang="en-US" sz="1100" dirty="0"/>
                     </a:p>
                   </a:txBody>
                   <a:tcPr marL="54864" marR="54864" marT="54864" marB="54864" anchor="ctr">
@@ -16761,14 +16847,14 @@
                         <a:buNone/>
                       </a:pPr>
                       <a:r>
-                        <a:rPr lang="en-US" sz="1050" dirty="0">
+                        <a:rPr lang="en-US" sz="1100" dirty="0">
                           <a:solidFill>
                             <a:schemeClr val="tx1"/>
                           </a:solidFill>
                         </a:rPr>
                         <a:t>토미 존 수술 AUC 0.811, 중증 팔 부상 AUC 0.825</a:t>
                       </a:r>
-                      <a:endParaRPr lang="en-US" sz="1050" dirty="0"/>
+                      <a:endParaRPr lang="en-US" sz="1100" dirty="0"/>
                     </a:p>
                   </a:txBody>
                   <a:tcPr marL="54864" marR="54864" marT="54864" marB="54864" anchor="ctr">
@@ -16807,14 +16893,14 @@
                         <a:buNone/>
                       </a:pPr>
                       <a:r>
-                        <a:rPr lang="en-US" sz="1050" dirty="0">
+                        <a:rPr lang="en-US" sz="1100" dirty="0">
                           <a:solidFill>
                             <a:schemeClr val="tx1"/>
                           </a:solidFill>
                         </a:rPr>
                         <a:t>영상 추정값 사용, 시점별 선별 모형 (개인 시계열 경보 아님)</a:t>
                       </a:r>
-                      <a:endParaRPr lang="en-US" sz="1050" dirty="0"/>
+                      <a:endParaRPr lang="en-US" sz="1100" dirty="0"/>
                     </a:p>
                   </a:txBody>
                   <a:tcPr marL="54864" marR="54864" marT="54864" marB="54864" anchor="ctr">
@@ -16845,7 +16931,7 @@
                   </a:tcPr>
                 </a:tc>
               </a:tr>
-              <a:tr h="310896">
+              <a:tr h="347472">
                 <a:tc gridSpan="4">
                   <a:txBody>
                     <a:bodyPr/>
@@ -16855,14 +16941,14 @@
                         <a:buNone/>
                       </a:pPr>
                       <a:r>
-                        <a:rPr lang="en-US" sz="1150" b="1" dirty="0">
+                        <a:rPr lang="en-US" sz="1200" b="1" dirty="0">
                           <a:solidFill>
                             <a:schemeClr val="tx1"/>
                           </a:solidFill>
                         </a:rPr>
                         <a:t>주제 4. 외생 변수 관련 연구</a:t>
                       </a:r>
-                      <a:endParaRPr lang="en-US" sz="1150" dirty="0"/>
+                      <a:endParaRPr lang="en-US" sz="1200" dirty="0"/>
                     </a:p>
                   </a:txBody>
                   <a:tcPr marL="54864" marR="54864" marT="54864" marB="54864" anchor="ctr">
@@ -16902,7 +16988,7 @@
                   <a:tcPr/>
                 </a:tc>
               </a:tr>
-              <a:tr h="676656">
+              <a:tr h="896112">
                 <a:tc>
                   <a:txBody>
                     <a:bodyPr/>
@@ -16912,14 +16998,14 @@
                         <a:buNone/>
                       </a:pPr>
                       <a:r>
-                        <a:rPr lang="en-US" sz="1050" b="1" dirty="0">
+                        <a:rPr lang="en-US" sz="1100" b="1" dirty="0">
                           <a:solidFill>
                             <a:schemeClr val="tx1"/>
                           </a:solidFill>
                         </a:rPr>
                         <a:t>Slowik 외 (2021)</a:t>
                       </a:r>
-                      <a:endParaRPr lang="en-US" sz="1050" dirty="0"/>
+                      <a:endParaRPr lang="en-US" sz="1100" dirty="0"/>
                     </a:p>
                   </a:txBody>
                   <a:tcPr marL="54864" marR="54864" marT="54864" marB="54864" anchor="ctr">
@@ -16958,28 +17044,28 @@
                         <a:buNone/>
                       </a:pPr>
                       <a:r>
-                        <a:rPr lang="en-US" sz="1050" dirty="0">
+                        <a:rPr lang="en-US" sz="1100" dirty="0">
                           <a:solidFill>
                             <a:schemeClr val="tx1"/>
                           </a:solidFill>
                         </a:rPr>
                         <a:t>대학 투수 17명</a:t>
                       </a:r>
-                      <a:endParaRPr lang="en-US" sz="1050" dirty="0"/>
+                      <a:endParaRPr lang="en-US" sz="1100" dirty="0"/>
                     </a:p>
                     <a:p>
                       <a:pPr algn="ctr" indent="0" marL="0">
                         <a:buNone/>
                       </a:pPr>
                       <a:r>
-                        <a:rPr lang="en-US" sz="1050" dirty="0">
+                        <a:rPr lang="en-US" sz="1100" dirty="0">
                           <a:solidFill>
                             <a:schemeClr val="tx1"/>
                           </a:solidFill>
                         </a:rPr>
                         <a:t>ACWR, ROC로 기준 선정</a:t>
                       </a:r>
-                      <a:endParaRPr lang="en-US" sz="1050" dirty="0"/>
+                      <a:endParaRPr lang="en-US" sz="1100" dirty="0"/>
                     </a:p>
                   </a:txBody>
                   <a:tcPr marL="54864" marR="54864" marT="54864" marB="54864" anchor="ctr">
@@ -17018,14 +17104,14 @@
                         <a:buNone/>
                       </a:pPr>
                       <a:r>
-                        <a:rPr lang="en-US" sz="1050" dirty="0">
+                        <a:rPr lang="en-US" sz="1100" dirty="0">
                           <a:solidFill>
                             <a:schemeClr val="tx1"/>
                           </a:solidFill>
                         </a:rPr>
                         <a:t>ACWR이 ±33% 넘게 변하면 다음 주 부상 위험 8.3배</a:t>
                       </a:r>
-                      <a:endParaRPr lang="en-US" sz="1050" dirty="0"/>
+                      <a:endParaRPr lang="en-US" sz="1100" dirty="0"/>
                     </a:p>
                   </a:txBody>
                   <a:tcPr marL="54864" marR="54864" marT="54864" marB="54864" anchor="ctr">
@@ -17064,14 +17150,14 @@
                         <a:buNone/>
                       </a:pPr>
                       <a:r>
-                        <a:rPr lang="en-US" sz="1050" dirty="0">
+                        <a:rPr lang="en-US" sz="1100" dirty="0">
                           <a:solidFill>
                             <a:schemeClr val="tx1"/>
                           </a:solidFill>
                         </a:rPr>
                         <a:t>표본이 작음 (95% CI 1.8–54.1), 만성 구간 3주</a:t>
                       </a:r>
-                      <a:endParaRPr lang="en-US" sz="1050" dirty="0"/>
+                      <a:endParaRPr lang="en-US" sz="1100" dirty="0"/>
                     </a:p>
                   </a:txBody>
                   <a:tcPr marL="54864" marR="54864" marT="54864" marB="54864" anchor="ctr">
@@ -17106,43 +17192,6 @@
           </a:graphicData>
         </a:graphic>
       </p:graphicFrame>
-      <p:sp>
-        <p:nvSpPr>
-          <p:cNvPr id="10" name="Takeaway"/>
-          <p:cNvSpPr txBox="1"/>
-          <p:nvPr/>
-        </p:nvSpPr>
-        <p:spPr>
-          <a:xfrm>
-            <a:off x="274320" y="4206240"/>
-            <a:ext cx="8595360" cy="365760"/>
-          </a:xfrm>
-          <a:prstGeom prst="rect">
-            <a:avLst/>
-          </a:prstGeom>
-          <a:noFill/>
-          <a:ln/>
-        </p:spPr>
-        <p:txBody>
-          <a:bodyPr wrap="square" lIns="0" tIns="0" rIns="0" bIns="0" rtlCol="0" anchor="ctr"/>
-          <a:lstStyle/>
-          <a:p>
-            <a:pPr marL="279400" indent="-279400">
-              <a:buSzPct val="100000"/>
-              <a:buChar char="➡"/>
-            </a:pPr>
-            <a:r>
-              <a:rPr lang="en-US" sz="1350" b="1" dirty="0">
-                <a:solidFill>
-                  <a:schemeClr val="tx1"/>
-                </a:solidFill>
-              </a:rPr>
-              <a:t>부상 전 하락 추세는 확인됐지만 경보 규칙은 없고, 투구 부하(ACWR)는 함께 볼 외생 신호다</a:t>
-            </a:r>
-            <a:endParaRPr lang="en-US" sz="1350" dirty="0"/>
-          </a:p>
-        </p:txBody>
-      </p:sp>
       <p:sp>
         <p:nvSpPr>
           <p:cNvPr id="25" name="Slide Number Placeholder 0"/>
@@ -17494,14 +17543,14 @@
       </p:sp>
       <p:sp>
         <p:nvSpPr>
-          <p:cNvPr id="9" name="Limit label"/>
+          <p:cNvPr id="9" name="Label 한계 1"/>
           <p:cNvSpPr txBox="1"/>
           <p:nvPr/>
         </p:nvSpPr>
         <p:spPr>
           <a:xfrm>
-            <a:off x="320040" y="1024128"/>
-            <a:ext cx="2697480" cy="274320"/>
+            <a:off x="274320" y="1005840"/>
+            <a:ext cx="2743200" cy="274320"/>
           </a:xfrm>
           <a:prstGeom prst="rect">
             <a:avLst/>
@@ -17517,14 +17566,14 @@
               <a:buNone/>
             </a:pPr>
             <a:r>
-              <a:rPr lang="en-US" sz="1200" b="1" dirty="0">
+              <a:rPr lang="en-US" sz="1300" b="1" dirty="0">
                 <a:solidFill>
                   <a:schemeClr val="tx1"/>
                 </a:solidFill>
               </a:rPr>
               <a:t>한계 1</a:t>
             </a:r>
-            <a:endParaRPr lang="en-US" sz="1200" dirty="0"/>
+            <a:endParaRPr lang="en-US" sz="1300" dirty="0"/>
           </a:p>
         </p:txBody>
       </p:sp>
@@ -17536,8 +17585,8 @@
         </p:nvSpPr>
         <p:spPr>
           <a:xfrm>
-            <a:off x="320040" y="1325880"/>
-            <a:ext cx="2697480" cy="1143000"/>
+            <a:off x="274320" y="1325880"/>
+            <a:ext cx="2743200" cy="1325880"/>
           </a:xfrm>
           <a:prstGeom prst="rect">
             <a:avLst/>
@@ -17547,7 +17596,6 @@
             <a:solidFill>
               <a:srgbClr val="000000"/>
             </a:solidFill>
-            <a:prstDash val="solid"/>
           </a:ln>
         </p:spPr>
         <p:txBody>
@@ -17577,7 +17625,7 @@
         </p:nvSpPr>
         <p:spPr>
           <a:xfrm>
-            <a:off x="1481328" y="2560320"/>
+            <a:off x="1463040" y="2743200"/>
             <a:ext cx="365760" cy="365760"/>
           </a:xfrm>
           <a:prstGeom prst="downArrow">
@@ -17596,14 +17644,14 @@
       </p:sp>
       <p:sp>
         <p:nvSpPr>
-          <p:cNvPr id="12" name="Need label"/>
+          <p:cNvPr id="12" name="Label 필요"/>
           <p:cNvSpPr txBox="1"/>
           <p:nvPr/>
         </p:nvSpPr>
         <p:spPr>
           <a:xfrm>
-            <a:off x="320040" y="2971800"/>
-            <a:ext cx="2697480" cy="274320"/>
+            <a:off x="274320" y="3200400"/>
+            <a:ext cx="2743200" cy="274320"/>
           </a:xfrm>
           <a:prstGeom prst="rect">
             <a:avLst/>
@@ -17619,14 +17667,14 @@
               <a:buNone/>
             </a:pPr>
             <a:r>
-              <a:rPr lang="en-US" sz="1200" b="1" dirty="0">
+              <a:rPr lang="en-US" sz="1300" b="1" dirty="0">
                 <a:solidFill>
                   <a:schemeClr val="tx1"/>
                 </a:solidFill>
               </a:rPr>
               <a:t>필요</a:t>
             </a:r>
-            <a:endParaRPr lang="en-US" sz="1200" dirty="0"/>
+            <a:endParaRPr lang="en-US" sz="1300" dirty="0"/>
           </a:p>
         </p:txBody>
       </p:sp>
@@ -17638,8 +17686,8 @@
         </p:nvSpPr>
         <p:spPr>
           <a:xfrm>
-            <a:off x="320040" y="3273552"/>
-            <a:ext cx="2697480" cy="1143000"/>
+            <a:off x="274320" y="3520440"/>
+            <a:ext cx="2743200" cy="1188720"/>
           </a:xfrm>
           <a:prstGeom prst="rect">
             <a:avLst/>
@@ -17649,7 +17697,6 @@
             <a:solidFill>
               <a:srgbClr val="000000"/>
             </a:solidFill>
-            <a:prstDash val="solid"/>
           </a:ln>
         </p:spPr>
         <p:txBody>
@@ -17673,14 +17720,14 @@
       </p:sp>
       <p:sp>
         <p:nvSpPr>
-          <p:cNvPr id="14" name="Limit label"/>
+          <p:cNvPr id="14" name="Label 한계 2"/>
           <p:cNvSpPr txBox="1"/>
           <p:nvPr/>
         </p:nvSpPr>
         <p:spPr>
           <a:xfrm>
-            <a:off x="3200400" y="1024128"/>
-            <a:ext cx="2697480" cy="274320"/>
+            <a:off x="3200400" y="1005840"/>
+            <a:ext cx="2743200" cy="274320"/>
           </a:xfrm>
           <a:prstGeom prst="rect">
             <a:avLst/>
@@ -17696,14 +17743,14 @@
               <a:buNone/>
             </a:pPr>
             <a:r>
-              <a:rPr lang="en-US" sz="1200" b="1" dirty="0">
+              <a:rPr lang="en-US" sz="1300" b="1" dirty="0">
                 <a:solidFill>
                   <a:schemeClr val="tx1"/>
                 </a:solidFill>
               </a:rPr>
               <a:t>한계 2</a:t>
             </a:r>
-            <a:endParaRPr lang="en-US" sz="1200" dirty="0"/>
+            <a:endParaRPr lang="en-US" sz="1300" dirty="0"/>
           </a:p>
         </p:txBody>
       </p:sp>
@@ -17716,7 +17763,7 @@
         <p:spPr>
           <a:xfrm>
             <a:off x="3200400" y="1325880"/>
-            <a:ext cx="2697480" cy="1143000"/>
+            <a:ext cx="2743200" cy="1325880"/>
           </a:xfrm>
           <a:prstGeom prst="rect">
             <a:avLst/>
@@ -17726,7 +17773,6 @@
             <a:solidFill>
               <a:srgbClr val="000000"/>
             </a:solidFill>
-            <a:prstDash val="solid"/>
           </a:ln>
         </p:spPr>
         <p:txBody>
@@ -17756,7 +17802,7 @@
         </p:nvSpPr>
         <p:spPr>
           <a:xfrm>
-            <a:off x="4361688" y="2560320"/>
+            <a:off x="4389120" y="2743200"/>
             <a:ext cx="365760" cy="365760"/>
           </a:xfrm>
           <a:prstGeom prst="downArrow">
@@ -17775,14 +17821,14 @@
       </p:sp>
       <p:sp>
         <p:nvSpPr>
-          <p:cNvPr id="17" name="Need label"/>
+          <p:cNvPr id="17" name="Label 필요"/>
           <p:cNvSpPr txBox="1"/>
           <p:nvPr/>
         </p:nvSpPr>
         <p:spPr>
           <a:xfrm>
-            <a:off x="3200400" y="2971800"/>
-            <a:ext cx="2697480" cy="274320"/>
+            <a:off x="3200400" y="3200400"/>
+            <a:ext cx="2743200" cy="274320"/>
           </a:xfrm>
           <a:prstGeom prst="rect">
             <a:avLst/>
@@ -17798,14 +17844,14 @@
               <a:buNone/>
             </a:pPr>
             <a:r>
-              <a:rPr lang="en-US" sz="1200" b="1" dirty="0">
+              <a:rPr lang="en-US" sz="1300" b="1" dirty="0">
                 <a:solidFill>
                   <a:schemeClr val="tx1"/>
                 </a:solidFill>
               </a:rPr>
               <a:t>필요</a:t>
             </a:r>
-            <a:endParaRPr lang="en-US" sz="1200" dirty="0"/>
+            <a:endParaRPr lang="en-US" sz="1300" dirty="0"/>
           </a:p>
         </p:txBody>
       </p:sp>
@@ -17817,8 +17863,8 @@
         </p:nvSpPr>
         <p:spPr>
           <a:xfrm>
-            <a:off x="3200400" y="3273552"/>
-            <a:ext cx="2697480" cy="1143000"/>
+            <a:off x="3200400" y="3520440"/>
+            <a:ext cx="2743200" cy="1188720"/>
           </a:xfrm>
           <a:prstGeom prst="rect">
             <a:avLst/>
@@ -17828,7 +17874,6 @@
             <a:solidFill>
               <a:srgbClr val="000000"/>
             </a:solidFill>
-            <a:prstDash val="solid"/>
           </a:ln>
         </p:spPr>
         <p:txBody>
@@ -17852,14 +17897,14 @@
       </p:sp>
       <p:sp>
         <p:nvSpPr>
-          <p:cNvPr id="19" name="Limit label"/>
+          <p:cNvPr id="19" name="Label 한계 3"/>
           <p:cNvSpPr txBox="1"/>
           <p:nvPr/>
         </p:nvSpPr>
         <p:spPr>
           <a:xfrm>
-            <a:off x="6080760" y="1024128"/>
-            <a:ext cx="2697480" cy="274320"/>
+            <a:off x="6126480" y="1005840"/>
+            <a:ext cx="2743200" cy="274320"/>
           </a:xfrm>
           <a:prstGeom prst="rect">
             <a:avLst/>
@@ -17875,14 +17920,14 @@
               <a:buNone/>
             </a:pPr>
             <a:r>
-              <a:rPr lang="en-US" sz="1200" b="1" dirty="0">
+              <a:rPr lang="en-US" sz="1300" b="1" dirty="0">
                 <a:solidFill>
                   <a:schemeClr val="tx1"/>
                 </a:solidFill>
               </a:rPr>
               <a:t>한계 3</a:t>
             </a:r>
-            <a:endParaRPr lang="en-US" sz="1200" dirty="0"/>
+            <a:endParaRPr lang="en-US" sz="1300" dirty="0"/>
           </a:p>
         </p:txBody>
       </p:sp>
@@ -17894,8 +17939,8 @@
         </p:nvSpPr>
         <p:spPr>
           <a:xfrm>
-            <a:off x="6080760" y="1325880"/>
-            <a:ext cx="2697480" cy="1143000"/>
+            <a:off x="6126480" y="1325880"/>
+            <a:ext cx="2743200" cy="1325880"/>
           </a:xfrm>
           <a:prstGeom prst="rect">
             <a:avLst/>
@@ -17905,7 +17950,6 @@
             <a:solidFill>
               <a:srgbClr val="000000"/>
             </a:solidFill>
-            <a:prstDash val="solid"/>
           </a:ln>
         </p:spPr>
         <p:txBody>
@@ -17921,7 +17965,7 @@
                   <a:schemeClr val="tx1"/>
                 </a:solidFill>
               </a:rPr>
-              <a:t>느린 하락이 기준선에 흡수될까 봐 시계열 모델을 피함</a:t>
+              <a:t>등판을 시간 순서 없는 독립 관측이나 시즌 평균으로 다룸 (자기상관 무시)</a:t>
             </a:r>
             <a:endParaRPr lang="en-US" sz="1200" dirty="0"/>
           </a:p>
@@ -17935,7 +17979,7 @@
         </p:nvSpPr>
         <p:spPr>
           <a:xfrm>
-            <a:off x="7242048" y="2560320"/>
+            <a:off x="7315200" y="2743200"/>
             <a:ext cx="365760" cy="365760"/>
           </a:xfrm>
           <a:prstGeom prst="downArrow">
@@ -17954,14 +17998,14 @@
       </p:sp>
       <p:sp>
         <p:nvSpPr>
-          <p:cNvPr id="22" name="Need label"/>
+          <p:cNvPr id="22" name="Label 필요"/>
           <p:cNvSpPr txBox="1"/>
           <p:nvPr/>
         </p:nvSpPr>
         <p:spPr>
           <a:xfrm>
-            <a:off x="6080760" y="2971800"/>
-            <a:ext cx="2697480" cy="274320"/>
+            <a:off x="6126480" y="3200400"/>
+            <a:ext cx="2743200" cy="274320"/>
           </a:xfrm>
           <a:prstGeom prst="rect">
             <a:avLst/>
@@ -17977,14 +18021,14 @@
               <a:buNone/>
             </a:pPr>
             <a:r>
-              <a:rPr lang="en-US" sz="1200" b="1" dirty="0">
+              <a:rPr lang="en-US" sz="1300" b="1" dirty="0">
                 <a:solidFill>
                   <a:schemeClr val="tx1"/>
                 </a:solidFill>
               </a:rPr>
               <a:t>필요</a:t>
             </a:r>
-            <a:endParaRPr lang="en-US" sz="1200" dirty="0"/>
+            <a:endParaRPr lang="en-US" sz="1300" dirty="0"/>
           </a:p>
         </p:txBody>
       </p:sp>
@@ -17996,8 +18040,8 @@
         </p:nvSpPr>
         <p:spPr>
           <a:xfrm>
-            <a:off x="6080760" y="3273552"/>
-            <a:ext cx="2697480" cy="1143000"/>
+            <a:off x="6126480" y="3520440"/>
+            <a:ext cx="2743200" cy="1188720"/>
           </a:xfrm>
           <a:prstGeom prst="rect">
             <a:avLst/>
@@ -18007,7 +18051,6 @@
             <a:solidFill>
               <a:srgbClr val="000000"/>
             </a:solidFill>
-            <a:prstDash val="solid"/>
           </a:ln>
         </p:spPr>
         <p:txBody>
@@ -18023,7 +18066,7 @@
                   <a:schemeClr val="tx1"/>
                 </a:solidFill>
               </a:rPr>
-              <a:t>한 걸음 앞 예측의 잔차를 감시하면 기준선이 따라가도 신호가 남는다</a:t>
+              <a:t>과거 등판으로 다음 등판을 예측하고 잔차를 감시하는 시계열 모델이 필요하다</a:t>
             </a:r>
             <a:endParaRPr lang="en-US" sz="1200" dirty="0"/>
           </a:p>
@@ -18386,8 +18429,8 @@
         </p:nvSpPr>
         <p:spPr>
           <a:xfrm>
-            <a:off x="320040" y="1024128"/>
-            <a:ext cx="8503920" cy="566928"/>
+            <a:off x="274320" y="1005840"/>
+            <a:ext cx="8595360" cy="566928"/>
           </a:xfrm>
           <a:prstGeom prst="rect">
             <a:avLst/>
@@ -18397,7 +18440,6 @@
             <a:solidFill>
               <a:srgbClr val="000000"/>
             </a:solidFill>
-            <a:prstDash val="solid"/>
           </a:ln>
         </p:spPr>
         <p:txBody>
@@ -18416,7 +18458,7 @@
               <a:t>핵심 아이디어  </a:t>
             </a:r>
             <a:r>
-              <a:rPr lang="en-US" sz="1400" b="1" dirty="0">
+              <a:rPr lang="en-US" sz="1350" b="1" dirty="0">
                 <a:solidFill>
                   <a:schemeClr val="tx1"/>
                 </a:solidFill>
@@ -18435,8 +18477,8 @@
         </p:nvSpPr>
         <p:spPr>
           <a:xfrm>
-            <a:off x="320040" y="1783080"/>
-            <a:ext cx="4160520" cy="2880360"/>
+            <a:off x="274320" y="1737360"/>
+            <a:ext cx="4206240" cy="2971800"/>
           </a:xfrm>
           <a:prstGeom prst="rect">
             <a:avLst/>
@@ -18458,8 +18500,8 @@
         </p:nvSpPr>
         <p:spPr>
           <a:xfrm>
-            <a:off x="502920" y="1901952"/>
-            <a:ext cx="3794760" cy="502920"/>
+            <a:off x="457200" y="1856232"/>
+            <a:ext cx="3840480" cy="548640"/>
           </a:xfrm>
           <a:prstGeom prst="rect">
             <a:avLst/>
@@ -18502,8 +18544,140 @@
         </p:nvSpPr>
         <p:spPr>
           <a:xfrm>
-            <a:off x="502920" y="2560320"/>
-            <a:ext cx="3794760" cy="548640"/>
+            <a:off x="457200" y="2560320"/>
+            <a:ext cx="3840480" cy="566928"/>
+          </a:xfrm>
+          <a:prstGeom prst="rect">
+            <a:avLst/>
+          </a:prstGeom>
+          <a:noFill/>
+          <a:ln w="9525">
+            <a:solidFill>
+              <a:srgbClr val="000000"/>
+            </a:solidFill>
+          </a:ln>
+        </p:spPr>
+        <p:txBody>
+          <a:bodyPr wrap="square" lIns="127000" tIns="127000" rIns="127000" bIns="127000" rtlCol="0" anchor="ctr"/>
+          <a:lstStyle/>
+          <a:p>
+            <a:pPr algn="l" indent="0" marL="0">
+              <a:buNone/>
+            </a:pPr>
+            <a:r>
+              <a:rPr lang="en-US" sz="1300" b="1" dirty="0">
+                <a:solidFill>
+                  <a:schemeClr val="tx1"/>
+                </a:solidFill>
+              </a:rPr>
+              <a:t>성능 지표   </a:t>
+            </a:r>
+            <a:r>
+              <a:rPr lang="en-US" sz="1300" dirty="0">
+                <a:solidFill>
+                  <a:schemeClr val="tx1"/>
+                </a:solidFill>
+              </a:rPr>
+              <a:t>구속 · 변동성 · 릴리스</a:t>
+            </a:r>
+            <a:endParaRPr lang="en-US" sz="1200" dirty="0"/>
+          </a:p>
+        </p:txBody>
+      </p:sp>
+      <p:sp>
+        <p:nvSpPr>
+          <p:cNvPr id="13" name="Novelty chip"/>
+          <p:cNvSpPr/>
+          <p:nvPr/>
+        </p:nvSpPr>
+        <p:spPr>
+          <a:xfrm>
+            <a:off x="457200" y="3236976"/>
+            <a:ext cx="3840480" cy="566928"/>
+          </a:xfrm>
+          <a:prstGeom prst="rect">
+            <a:avLst/>
+          </a:prstGeom>
+          <a:noFill/>
+          <a:ln w="9525">
+            <a:solidFill>
+              <a:srgbClr val="000000"/>
+            </a:solidFill>
+          </a:ln>
+        </p:spPr>
+        <p:txBody>
+          <a:bodyPr wrap="square" lIns="127000" tIns="127000" rIns="127000" bIns="127000" rtlCol="0" anchor="ctr"/>
+          <a:lstStyle/>
+          <a:p>
+            <a:pPr algn="l" indent="0" marL="0">
+              <a:buNone/>
+            </a:pPr>
+            <a:r>
+              <a:rPr lang="en-US" sz="1300" b="1" dirty="0">
+                <a:solidFill>
+                  <a:schemeClr val="tx1"/>
+                </a:solidFill>
+              </a:rPr>
+              <a:t>부하 지표   </a:t>
+            </a:r>
+            <a:r>
+              <a:rPr lang="en-US" sz="1300" dirty="0">
+                <a:solidFill>
+                  <a:schemeClr val="tx1"/>
+                </a:solidFill>
+              </a:rPr>
+              <a:t>등판 간격 · 누적 투구 수 · ACWR</a:t>
+            </a:r>
+            <a:endParaRPr lang="en-US" sz="1200" dirty="0"/>
+          </a:p>
+        </p:txBody>
+      </p:sp>
+      <p:sp>
+        <p:nvSpPr>
+          <p:cNvPr id="14" name="Novelty note 1"/>
+          <p:cNvSpPr txBox="1"/>
+          <p:nvPr/>
+        </p:nvSpPr>
+        <p:spPr>
+          <a:xfrm>
+            <a:off x="457200" y="3977640"/>
+            <a:ext cx="3840480" cy="640080"/>
+          </a:xfrm>
+          <a:prstGeom prst="rect">
+            <a:avLst/>
+          </a:prstGeom>
+          <a:noFill/>
+          <a:ln/>
+        </p:spPr>
+        <p:txBody>
+          <a:bodyPr wrap="square" lIns="0" tIns="0" rIns="0" bIns="0" rtlCol="0" anchor="ctr"/>
+          <a:lstStyle/>
+          <a:p>
+            <a:pPr indent="0" marL="0">
+              <a:buNone/>
+            </a:pPr>
+            <a:r>
+              <a:rPr lang="en-US" sz="1250" dirty="0">
+                <a:solidFill>
+                  <a:schemeClr val="tx1"/>
+                </a:solidFill>
+              </a:rPr>
+              <a:t>누구나 접근할 수 있는 Statcast와 MLB 기록만 사용 → 재현 가능한 결론</a:t>
+            </a:r>
+            <a:endParaRPr lang="en-US" sz="1250" dirty="0"/>
+          </a:p>
+        </p:txBody>
+      </p:sp>
+      <p:sp>
+        <p:nvSpPr>
+          <p:cNvPr id="15" name="Novelty card 2"/>
+          <p:cNvSpPr/>
+          <p:nvPr/>
+        </p:nvSpPr>
+        <p:spPr>
+          <a:xfrm>
+            <a:off x="4663440" y="1737360"/>
+            <a:ext cx="4206240" cy="2971800"/>
           </a:xfrm>
           <a:prstGeom prst="rect">
             <a:avLst/>
@@ -18516,43 +18690,61 @@
             <a:prstDash val="solid"/>
           </a:ln>
         </p:spPr>
-        <p:txBody>
-          <a:bodyPr wrap="square" lIns="127000" tIns="127000" rIns="127000" bIns="127000" rtlCol="0" anchor="ctr"/>
-          <a:lstStyle/>
-          <a:p>
-            <a:pPr algn="l" indent="0" marL="0">
-              <a:buNone/>
-            </a:pPr>
-            <a:r>
-              <a:rPr lang="en-US" sz="1300" b="1" dirty="0">
+      </p:sp>
+      <p:sp>
+        <p:nvSpPr>
+          <p:cNvPr id="16" name="Novelty title 2"/>
+          <p:cNvSpPr txBox="1"/>
+          <p:nvPr/>
+        </p:nvSpPr>
+        <p:spPr>
+          <a:xfrm>
+            <a:off x="4846320" y="1856232"/>
+            <a:ext cx="3840480" cy="548640"/>
+          </a:xfrm>
+          <a:prstGeom prst="rect">
+            <a:avLst/>
+          </a:prstGeom>
+          <a:noFill/>
+          <a:ln/>
+        </p:spPr>
+        <p:txBody>
+          <a:bodyPr wrap="square" lIns="0" tIns="0" rIns="0" bIns="0" rtlCol="0" anchor="ctr"/>
+          <a:lstStyle/>
+          <a:p>
+            <a:pPr indent="0" marL="0">
+              <a:buNone/>
+            </a:pPr>
+            <a:r>
+              <a:rPr lang="en-US" sz="1800" b="1" dirty="0">
                 <a:solidFill>
                   <a:schemeClr val="tx1"/>
                 </a:solidFill>
               </a:rPr>
-              <a:t>성능 지표   </a:t>
-            </a:r>
-            <a:r>
-              <a:rPr lang="en-US" sz="1300" dirty="0">
+              <a:t>2.  </a:t>
+            </a:r>
+            <a:r>
+              <a:rPr lang="en-US" sz="1600" b="1" dirty="0">
                 <a:solidFill>
                   <a:schemeClr val="tx1"/>
                 </a:solidFill>
               </a:rPr>
-              <a:t>구속 · 변동성 · 릴리스</a:t>
-            </a:r>
-            <a:endParaRPr lang="en-US" sz="1200" dirty="0"/>
-          </a:p>
-        </p:txBody>
-      </p:sp>
-      <p:sp>
-        <p:nvSpPr>
-          <p:cNvPr id="13" name="Novelty chip"/>
+              <a:t>통계 검정을 넘어 실제 경보 시스템 평가</a:t>
+            </a:r>
+            <a:endParaRPr lang="en-US" sz="1800" dirty="0"/>
+          </a:p>
+        </p:txBody>
+      </p:sp>
+      <p:sp>
+        <p:nvSpPr>
+          <p:cNvPr id="17" name="Novelty chip"/>
           <p:cNvSpPr/>
           <p:nvPr/>
         </p:nvSpPr>
         <p:spPr>
           <a:xfrm>
-            <a:off x="502920" y="3218688"/>
-            <a:ext cx="3794760" cy="548640"/>
+            <a:off x="4846320" y="2560320"/>
+            <a:ext cx="3840480" cy="566928"/>
           </a:xfrm>
           <a:prstGeom prst="rect">
             <a:avLst/>
@@ -18562,7 +18754,6 @@
             <a:solidFill>
               <a:srgbClr val="000000"/>
             </a:solidFill>
-            <a:prstDash val="solid"/>
           </a:ln>
         </p:spPr>
         <p:txBody>
@@ -18578,7 +18769,7 @@
                   <a:schemeClr val="tx1"/>
                 </a:solidFill>
               </a:rPr>
-              <a:t>부하 지표   </a:t>
+              <a:t>얼마나 일찍?   </a:t>
             </a:r>
             <a:r>
               <a:rPr lang="en-US" sz="1300" dirty="0">
@@ -18586,7 +18777,7 @@
                   <a:schemeClr val="tx1"/>
                 </a:solidFill>
               </a:rPr>
-              <a:t>등판 간격 · 누적 투구 수 · ACWR</a:t>
+              <a:t>IL 등재 며칠 전에 울리는가</a:t>
             </a:r>
             <a:endParaRPr lang="en-US" sz="1200" dirty="0"/>
           </a:p>
@@ -18594,50 +18785,14 @@
       </p:sp>
       <p:sp>
         <p:nvSpPr>
-          <p:cNvPr id="14" name="Novelty note 1"/>
-          <p:cNvSpPr txBox="1"/>
-          <p:nvPr/>
-        </p:nvSpPr>
-        <p:spPr>
-          <a:xfrm>
-            <a:off x="502920" y="3931920"/>
-            <a:ext cx="3794760" cy="594360"/>
-          </a:xfrm>
-          <a:prstGeom prst="rect">
-            <a:avLst/>
-          </a:prstGeom>
-          <a:noFill/>
-          <a:ln/>
-        </p:spPr>
-        <p:txBody>
-          <a:bodyPr wrap="square" lIns="0" tIns="0" rIns="0" bIns="0" rtlCol="0" anchor="ctr"/>
-          <a:lstStyle/>
-          <a:p>
-            <a:pPr indent="0" marL="0">
-              <a:buNone/>
-            </a:pPr>
-            <a:r>
-              <a:rPr lang="en-US" sz="1200" dirty="0">
-                <a:solidFill>
-                  <a:schemeClr val="tx1"/>
-                </a:solidFill>
-              </a:rPr>
-              <a:t>누구나 접근할 수 있는 Statcast와 MLB 기록만 사용 → 재현 가능한 결론</a:t>
-            </a:r>
-            <a:endParaRPr lang="en-US" sz="1200" dirty="0"/>
-          </a:p>
-        </p:txBody>
-      </p:sp>
-      <p:sp>
-        <p:nvSpPr>
-          <p:cNvPr id="15" name="Novelty card 2"/>
+          <p:cNvPr id="18" name="Novelty chip"/>
           <p:cNvSpPr/>
           <p:nvPr/>
         </p:nvSpPr>
         <p:spPr>
           <a:xfrm>
-            <a:off x="4663440" y="1783080"/>
-            <a:ext cx="4160520" cy="2880360"/>
+            <a:off x="4846320" y="3236976"/>
+            <a:ext cx="3840480" cy="566928"/>
           </a:xfrm>
           <a:prstGeom prst="rect">
             <a:avLst/>
@@ -18647,123 +18802,6 @@
             <a:solidFill>
               <a:srgbClr val="000000"/>
             </a:solidFill>
-            <a:prstDash val="solid"/>
-          </a:ln>
-        </p:spPr>
-      </p:sp>
-      <p:sp>
-        <p:nvSpPr>
-          <p:cNvPr id="16" name="Novelty title 2"/>
-          <p:cNvSpPr txBox="1"/>
-          <p:nvPr/>
-        </p:nvSpPr>
-        <p:spPr>
-          <a:xfrm>
-            <a:off x="4846320" y="1901952"/>
-            <a:ext cx="3794760" cy="502920"/>
-          </a:xfrm>
-          <a:prstGeom prst="rect">
-            <a:avLst/>
-          </a:prstGeom>
-          <a:noFill/>
-          <a:ln/>
-        </p:spPr>
-        <p:txBody>
-          <a:bodyPr wrap="square" lIns="0" tIns="0" rIns="0" bIns="0" rtlCol="0" anchor="ctr"/>
-          <a:lstStyle/>
-          <a:p>
-            <a:pPr indent="0" marL="0">
-              <a:buNone/>
-            </a:pPr>
-            <a:r>
-              <a:rPr lang="en-US" sz="1800" b="1" dirty="0">
-                <a:solidFill>
-                  <a:schemeClr val="tx1"/>
-                </a:solidFill>
-              </a:rPr>
-              <a:t>2.  </a:t>
-            </a:r>
-            <a:r>
-              <a:rPr lang="en-US" sz="1600" b="1" dirty="0">
-                <a:solidFill>
-                  <a:schemeClr val="tx1"/>
-                </a:solidFill>
-              </a:rPr>
-              <a:t>통계 검정을 넘어 실제 경보 시스템 평가</a:t>
-            </a:r>
-            <a:endParaRPr lang="en-US" sz="1800" dirty="0"/>
-          </a:p>
-        </p:txBody>
-      </p:sp>
-      <p:sp>
-        <p:nvSpPr>
-          <p:cNvPr id="17" name="Novelty chip"/>
-          <p:cNvSpPr/>
-          <p:nvPr/>
-        </p:nvSpPr>
-        <p:spPr>
-          <a:xfrm>
-            <a:off x="4846320" y="2560320"/>
-            <a:ext cx="3794760" cy="548640"/>
-          </a:xfrm>
-          <a:prstGeom prst="rect">
-            <a:avLst/>
-          </a:prstGeom>
-          <a:noFill/>
-          <a:ln w="9525">
-            <a:solidFill>
-              <a:srgbClr val="000000"/>
-            </a:solidFill>
-            <a:prstDash val="solid"/>
-          </a:ln>
-        </p:spPr>
-        <p:txBody>
-          <a:bodyPr wrap="square" lIns="127000" tIns="127000" rIns="127000" bIns="127000" rtlCol="0" anchor="ctr"/>
-          <a:lstStyle/>
-          <a:p>
-            <a:pPr algn="l" indent="0" marL="0">
-              <a:buNone/>
-            </a:pPr>
-            <a:r>
-              <a:rPr lang="en-US" sz="1300" b="1" dirty="0">
-                <a:solidFill>
-                  <a:schemeClr val="tx1"/>
-                </a:solidFill>
-              </a:rPr>
-              <a:t>얼마나 일찍?   </a:t>
-            </a:r>
-            <a:r>
-              <a:rPr lang="en-US" sz="1300" dirty="0">
-                <a:solidFill>
-                  <a:schemeClr val="tx1"/>
-                </a:solidFill>
-              </a:rPr>
-              <a:t>IL 등재 며칠 전에 울리는가</a:t>
-            </a:r>
-            <a:endParaRPr lang="en-US" sz="1200" dirty="0"/>
-          </a:p>
-        </p:txBody>
-      </p:sp>
-      <p:sp>
-        <p:nvSpPr>
-          <p:cNvPr id="18" name="Novelty chip"/>
-          <p:cNvSpPr/>
-          <p:nvPr/>
-        </p:nvSpPr>
-        <p:spPr>
-          <a:xfrm>
-            <a:off x="4846320" y="3218688"/>
-            <a:ext cx="3794760" cy="548640"/>
-          </a:xfrm>
-          <a:prstGeom prst="rect">
-            <a:avLst/>
-          </a:prstGeom>
-          <a:noFill/>
-          <a:ln w="9525">
-            <a:solidFill>
-              <a:srgbClr val="000000"/>
-            </a:solidFill>
-            <a:prstDash val="solid"/>
           </a:ln>
         </p:spPr>
         <p:txBody>
@@ -18801,8 +18839,8 @@
         </p:nvSpPr>
         <p:spPr>
           <a:xfrm>
-            <a:off x="4846320" y="3931920"/>
-            <a:ext cx="3794760" cy="594360"/>
+            <a:off x="4846320" y="3977640"/>
+            <a:ext cx="3840480" cy="640080"/>
           </a:xfrm>
           <a:prstGeom prst="rect">
             <a:avLst/>
@@ -18818,14 +18856,14 @@
               <a:buNone/>
             </a:pPr>
             <a:r>
-              <a:rPr lang="en-US" sz="1200" dirty="0">
+              <a:rPr lang="en-US" sz="1250" dirty="0">
                 <a:solidFill>
                   <a:schemeClr val="tx1"/>
                 </a:solidFill>
               </a:rPr>
               <a:t>조사한 선행 연구 중 선행 일수와 오경보 빈도를 함께 보고한 사례는 없다</a:t>
             </a:r>
-            <a:endParaRPr lang="en-US" sz="1200" dirty="0"/>
+            <a:endParaRPr lang="en-US" sz="1250" dirty="0"/>
           </a:p>
         </p:txBody>
       </p:sp>
@@ -19187,7 +19225,7 @@
         <p:spPr>
           <a:xfrm>
             <a:off x="228600" y="987552"/>
-            <a:ext cx="8686800" cy="1325880"/>
+            <a:ext cx="8686800" cy="1371600"/>
           </a:xfrm>
           <a:prstGeom prst="rect">
             <a:avLst/>
@@ -19334,7 +19372,7 @@
           </p:nvPr>
         </p:nvGraphicFramePr>
         <p:xfrm>
-          <a:off x="548640" y="2359152"/>
+          <a:off x="548640" y="2377440"/>
           <a:ext cx="6858000" cy="914400"/>
         </p:xfrm>
         <a:graphic>
@@ -19342,10 +19380,10 @@
             <a:tbl>
               <a:tblPr/>
               <a:tblGrid>
-                <a:gridCol w="1234440"/>
-                <a:gridCol w="7086600"/>
+                <a:gridCol w="1280160"/>
+                <a:gridCol w="7040880"/>
               </a:tblGrid>
-              <a:tr h="329184">
+              <a:tr h="310896">
                 <a:tc>
                   <a:txBody>
                     <a:bodyPr/>
@@ -19439,7 +19477,7 @@
                   </a:tcPr>
                 </a:tc>
               </a:tr>
-              <a:tr h="329184">
+              <a:tr h="338328">
                 <a:tc>
                   <a:txBody>
                     <a:bodyPr/>
@@ -19533,7 +19571,7 @@
                   </a:tcPr>
                 </a:tc>
               </a:tr>
-              <a:tr h="329184">
+              <a:tr h="338328">
                 <a:tc>
                   <a:txBody>
                     <a:bodyPr/>
@@ -19627,7 +19665,7 @@
                   </a:tcPr>
                 </a:tc>
               </a:tr>
-              <a:tr h="329184">
+              <a:tr h="338328">
                 <a:tc>
                   <a:txBody>
                     <a:bodyPr/>
@@ -19721,7 +19759,7 @@
                   </a:tcPr>
                 </a:tc>
               </a:tr>
-              <a:tr h="329184">
+              <a:tr h="338328">
                 <a:tc>
                   <a:txBody>
                     <a:bodyPr/>
@@ -19815,7 +19853,7 @@
                   </a:tcPr>
                 </a:tc>
               </a:tr>
-              <a:tr h="329184">
+              <a:tr h="338328">
                 <a:tc>
                   <a:txBody>
                     <a:bodyPr/>
@@ -19921,7 +19959,7 @@
         </p:nvSpPr>
         <p:spPr>
           <a:xfrm>
-            <a:off x="228600" y="4407408"/>
+            <a:off x="228600" y="4425696"/>
             <a:ext cx="8686800" cy="384048"/>
           </a:xfrm>
           <a:prstGeom prst="rect">
